--- a/output/wordlabs-under-prefix-3day.pptx
+++ b/output/wordlabs-under-prefix-3day.pptx
@@ -6040,7 +6040,7 @@
                 <a:ea typeface="Calibri" pitchFamily="34" charset="-122"/>
                 <a:cs typeface="Calibri" pitchFamily="34" charset="-120"/>
               </a:rPr>
-              <a:t>The students could </a:t>
+              <a:t>The </a:t>
             </a:r>
             <a:pPr algn="l" indent="0" marL="0">
               <a:buNone/>
@@ -6057,7 +6057,7 @@
                 <a:ea typeface="Calibri" pitchFamily="34" charset="-122"/>
                 <a:cs typeface="Calibri" pitchFamily="34" charset="-120"/>
               </a:rPr>
-              <a:t>understand</a:t>
+              <a:t>undercover</a:t>
             </a:r>
             <a:pPr algn="l" indent="0" marL="0">
               <a:buNone/>
@@ -6071,7 +6071,7 @@
                 <a:ea typeface="Calibri" pitchFamily="34" charset="-122"/>
                 <a:cs typeface="Calibri" pitchFamily="34" charset="-120"/>
               </a:rPr>
-              <a:t> why the </a:t>
+              <a:t> detective had to </a:t>
             </a:r>
             <a:pPr algn="l" indent="0" marL="0">
               <a:buNone/>
@@ -6088,7 +6088,7 @@
                 <a:ea typeface="Calibri" pitchFamily="34" charset="-122"/>
                 <a:cs typeface="Calibri" pitchFamily="34" charset="-120"/>
               </a:rPr>
-              <a:t>underground</a:t>
+              <a:t>underwater</a:t>
             </a:r>
             <a:pPr algn="l" indent="0" marL="0">
               <a:buNone/>
@@ -6102,7 +6102,7 @@
                 <a:ea typeface="Calibri" pitchFamily="34" charset="-122"/>
                 <a:cs typeface="Calibri" pitchFamily="34" charset="-120"/>
               </a:rPr>
-              <a:t> tunnel felt so cool and dark.</a:t>
+              <a:t> dive to find the missing clues.</a:t>
             </a:r>
             <a:endParaRPr lang="en-US" sz="1800" dirty="0"/>
           </a:p>
@@ -6257,7 +6257,7 @@
                 <a:ea typeface="Trebuchet MS" pitchFamily="34" charset="-122"/>
                 <a:cs typeface="Trebuchet MS" pitchFamily="34" charset="-120"/>
               </a:rPr>
-              <a:t>understand</a:t>
+              <a:t>undercover</a:t>
             </a:r>
             <a:endParaRPr lang="en-US" sz="1400" dirty="0"/>
           </a:p>
@@ -6385,7 +6385,7 @@
                 <a:ea typeface="Trebuchet MS" pitchFamily="34" charset="-122"/>
                 <a:cs typeface="Trebuchet MS" pitchFamily="34" charset="-120"/>
               </a:rPr>
-              <a:t>underground</a:t>
+              <a:t>underwater</a:t>
             </a:r>
             <a:endParaRPr lang="en-US" sz="1400" dirty="0"/>
           </a:p>
@@ -6855,7 +6855,7 @@
                 <a:ea typeface="Trebuchet MS" pitchFamily="34" charset="-122"/>
                 <a:cs typeface="Trebuchet MS" pitchFamily="34" charset="-120"/>
               </a:rPr>
-              <a:t>understand</a:t>
+              <a:t>undercover</a:t>
             </a:r>
             <a:endParaRPr lang="en-US" sz="2800" dirty="0"/>
           </a:p>
@@ -7682,7 +7682,7 @@
                 <a:ea typeface="Trebuchet MS" pitchFamily="34" charset="-122"/>
                 <a:cs typeface="Trebuchet MS" pitchFamily="34" charset="-120"/>
               </a:rPr>
-              <a:t>understand</a:t>
+              <a:t>undercover</a:t>
             </a:r>
             <a:endParaRPr lang="en-US" sz="2800" dirty="0"/>
           </a:p>
@@ -7860,7 +7860,7 @@
                 <a:ea typeface="Calibri" pitchFamily="34" charset="-122"/>
                 <a:cs typeface="Calibri" pitchFamily="34" charset="-120"/>
               </a:rPr>
-              <a:t>below, beneath</a:t>
+              <a:t>beneath or secret</a:t>
             </a:r>
             <a:endParaRPr lang="en-US" sz="850" dirty="0"/>
           </a:p>
@@ -7933,7 +7933,7 @@
                 <a:ea typeface="Trebuchet MS" pitchFamily="34" charset="-122"/>
                 <a:cs typeface="Trebuchet MS" pitchFamily="34" charset="-120"/>
               </a:rPr>
-              <a:t>stand</a:t>
+              <a:t>cover</a:t>
             </a:r>
             <a:endParaRPr lang="en-US" sz="1300" dirty="0"/>
           </a:p>
@@ -7972,7 +7972,7 @@
                 <a:ea typeface="Calibri" pitchFamily="34" charset="-122"/>
                 <a:cs typeface="Calibri" pitchFamily="34" charset="-120"/>
               </a:rPr>
-              <a:t>to stand, to be in a position</a:t>
+              <a:t>to hide or conceal</a:t>
             </a:r>
             <a:endParaRPr lang="en-US" sz="850" dirty="0"/>
           </a:p>
@@ -8667,7 +8667,7 @@
                 <a:ea typeface="Trebuchet MS" pitchFamily="34" charset="-122"/>
                 <a:cs typeface="Trebuchet MS" pitchFamily="34" charset="-120"/>
               </a:rPr>
-              <a:t>understand</a:t>
+              <a:t>undercover</a:t>
             </a:r>
             <a:endParaRPr lang="en-US" sz="2800" dirty="0"/>
           </a:p>
@@ -8845,7 +8845,7 @@
                 <a:ea typeface="Calibri" pitchFamily="34" charset="-122"/>
                 <a:cs typeface="Calibri" pitchFamily="34" charset="-120"/>
               </a:rPr>
-              <a:t>below, beneath</a:t>
+              <a:t>beneath or secret</a:t>
             </a:r>
             <a:endParaRPr lang="en-US" sz="850" dirty="0"/>
           </a:p>
@@ -8918,7 +8918,7 @@
                 <a:ea typeface="Trebuchet MS" pitchFamily="34" charset="-122"/>
                 <a:cs typeface="Trebuchet MS" pitchFamily="34" charset="-120"/>
               </a:rPr>
-              <a:t>stand</a:t>
+              <a:t>cover</a:t>
             </a:r>
             <a:endParaRPr lang="en-US" sz="1300" dirty="0"/>
           </a:p>
@@ -8957,7 +8957,7 @@
                 <a:ea typeface="Calibri" pitchFamily="34" charset="-122"/>
                 <a:cs typeface="Calibri" pitchFamily="34" charset="-120"/>
               </a:rPr>
-              <a:t>to stand, to be in a position</a:t>
+              <a:t>to hide or conceal</a:t>
             </a:r>
             <a:endParaRPr lang="en-US" sz="850" dirty="0"/>
           </a:p>
@@ -9064,8 +9064,8 @@
         </p:nvSpPr>
         <p:spPr>
           <a:xfrm>
-            <a:off x="2313432" y="3364992"/>
-            <a:ext cx="1645920" cy="475488"/>
+            <a:off x="1975104" y="3364992"/>
+            <a:ext cx="1554480" cy="475488"/>
           </a:xfrm>
           <a:prstGeom prst="rect">
             <a:avLst>
@@ -9091,8 +9091,8 @@
         </p:nvSpPr>
         <p:spPr>
           <a:xfrm>
-            <a:off x="2313432" y="3364992"/>
-            <a:ext cx="1645920" cy="475488"/>
+            <a:off x="1975104" y="3364992"/>
+            <a:ext cx="1554480" cy="475488"/>
           </a:xfrm>
           <a:prstGeom prst="rect">
             <a:avLst/>
@@ -9130,8 +9130,8 @@
         </p:nvSpPr>
         <p:spPr>
           <a:xfrm>
-            <a:off x="3959352" y="3364992"/>
-            <a:ext cx="411480" cy="475488"/>
+            <a:off x="3529584" y="3364992"/>
+            <a:ext cx="73152" cy="475488"/>
           </a:xfrm>
           <a:prstGeom prst="rect">
             <a:avLst/>
@@ -9169,8 +9169,8 @@
         </p:nvSpPr>
         <p:spPr>
           <a:xfrm>
-            <a:off x="4370832" y="3364992"/>
-            <a:ext cx="1645920" cy="475488"/>
+            <a:off x="3602736" y="3364992"/>
+            <a:ext cx="1554480" cy="475488"/>
           </a:xfrm>
           <a:prstGeom prst="rect">
             <a:avLst>
@@ -9196,8 +9196,8 @@
         </p:nvSpPr>
         <p:spPr>
           <a:xfrm>
-            <a:off x="4370832" y="3364992"/>
-            <a:ext cx="1645920" cy="475488"/>
+            <a:off x="3602736" y="3364992"/>
+            <a:ext cx="1554480" cy="475488"/>
           </a:xfrm>
           <a:prstGeom prst="rect">
             <a:avLst/>
@@ -9235,8 +9235,8 @@
         </p:nvSpPr>
         <p:spPr>
           <a:xfrm>
-            <a:off x="6016752" y="3364992"/>
-            <a:ext cx="411480" cy="475488"/>
+            <a:off x="5157216" y="3364992"/>
+            <a:ext cx="73152" cy="475488"/>
           </a:xfrm>
           <a:prstGeom prst="rect">
             <a:avLst/>
@@ -9274,8 +9274,8 @@
         </p:nvSpPr>
         <p:spPr>
           <a:xfrm>
-            <a:off x="6428232" y="3364992"/>
-            <a:ext cx="1645920" cy="475488"/>
+            <a:off x="5230368" y="3364992"/>
+            <a:ext cx="1554480" cy="475488"/>
           </a:xfrm>
           <a:prstGeom prst="rect">
             <a:avLst>
@@ -9301,8 +9301,8 @@
         </p:nvSpPr>
         <p:spPr>
           <a:xfrm>
-            <a:off x="6428232" y="3364992"/>
-            <a:ext cx="1645920" cy="475488"/>
+            <a:off x="5230368" y="3364992"/>
+            <a:ext cx="1554480" cy="475488"/>
           </a:xfrm>
           <a:prstGeom prst="rect">
             <a:avLst/>
@@ -9326,7 +9326,7 @@
                 <a:ea typeface="Trebuchet MS" pitchFamily="34" charset="-122"/>
                 <a:cs typeface="Trebuchet MS" pitchFamily="34" charset="-120"/>
               </a:rPr>
-              <a:t>stand</a:t>
+              <a:t>cov</a:t>
             </a:r>
             <a:endParaRPr lang="en-US" sz="1400" dirty="0"/>
           </a:p>
@@ -9334,7 +9334,112 @@
       </p:sp>
       <p:sp>
         <p:nvSpPr>
-          <p:cNvPr id="33" name="Shape 31"/>
+          <p:cNvPr id="33" name="Text 31"/>
+          <p:cNvSpPr/>
+          <p:nvPr/>
+        </p:nvSpPr>
+        <p:spPr>
+          <a:xfrm>
+            <a:off x="6784848" y="3364992"/>
+            <a:ext cx="73152" cy="475488"/>
+          </a:xfrm>
+          <a:prstGeom prst="rect">
+            <a:avLst/>
+          </a:prstGeom>
+          <a:noFill/>
+          <a:ln/>
+        </p:spPr>
+        <p:txBody>
+          <a:bodyPr wrap="square" lIns="0" tIns="0" rIns="0" bIns="0" rtlCol="0" anchor="ctr"/>
+          <a:lstStyle/>
+          <a:p>
+            <a:pPr algn="ctr" indent="0" marL="0">
+              <a:buNone/>
+            </a:pPr>
+            <a:r>
+              <a:rPr lang="en-US" sz="1600" b="1" dirty="0">
+                <a:solidFill>
+                  <a:srgbClr val="0D9488"/>
+                </a:solidFill>
+                <a:latin typeface="Trebuchet MS" pitchFamily="34" charset="0"/>
+                <a:ea typeface="Trebuchet MS" pitchFamily="34" charset="-122"/>
+                <a:cs typeface="Trebuchet MS" pitchFamily="34" charset="-120"/>
+              </a:rPr>
+              <a:t>·</a:t>
+            </a:r>
+            <a:endParaRPr lang="en-US" sz="1600" dirty="0"/>
+          </a:p>
+        </p:txBody>
+      </p:sp>
+      <p:sp>
+        <p:nvSpPr>
+          <p:cNvPr id="34" name="Shape 32"/>
+          <p:cNvSpPr/>
+          <p:nvPr/>
+        </p:nvSpPr>
+        <p:spPr>
+          <a:xfrm>
+            <a:off x="6858000" y="3364992"/>
+            <a:ext cx="1554480" cy="475488"/>
+          </a:xfrm>
+          <a:prstGeom prst="rect">
+            <a:avLst>
+              <a:gd name="adj" fmla="val 9615"/>
+            </a:avLst>
+          </a:prstGeom>
+          <a:solidFill>
+            <a:srgbClr val="FFFFFF"/>
+          </a:solidFill>
+          <a:ln w="12700">
+            <a:solidFill>
+              <a:srgbClr val="0D9488"/>
+            </a:solidFill>
+            <a:prstDash val="solid"/>
+          </a:ln>
+        </p:spPr>
+      </p:sp>
+      <p:sp>
+        <p:nvSpPr>
+          <p:cNvPr id="35" name="Text 33"/>
+          <p:cNvSpPr/>
+          <p:nvPr/>
+        </p:nvSpPr>
+        <p:spPr>
+          <a:xfrm>
+            <a:off x="6858000" y="3364992"/>
+            <a:ext cx="1554480" cy="475488"/>
+          </a:xfrm>
+          <a:prstGeom prst="rect">
+            <a:avLst/>
+          </a:prstGeom>
+          <a:noFill/>
+          <a:ln/>
+        </p:spPr>
+        <p:txBody>
+          <a:bodyPr wrap="square" lIns="0" tIns="0" rIns="0" bIns="0" rtlCol="0" anchor="ctr"/>
+          <a:lstStyle/>
+          <a:p>
+            <a:pPr algn="ctr" indent="0" marL="0">
+              <a:buNone/>
+            </a:pPr>
+            <a:r>
+              <a:rPr lang="en-US" sz="1400" b="1" dirty="0">
+                <a:solidFill>
+                  <a:srgbClr val="0D9488"/>
+                </a:solidFill>
+                <a:latin typeface="Trebuchet MS" pitchFamily="34" charset="0"/>
+                <a:ea typeface="Trebuchet MS" pitchFamily="34" charset="-122"/>
+                <a:cs typeface="Trebuchet MS" pitchFamily="34" charset="-120"/>
+              </a:rPr>
+              <a:t>er</a:t>
+            </a:r>
+            <a:endParaRPr lang="en-US" sz="1400" dirty="0"/>
+          </a:p>
+        </p:txBody>
+      </p:sp>
+      <p:sp>
+        <p:nvSpPr>
+          <p:cNvPr id="36" name="Shape 34"/>
           <p:cNvSpPr/>
           <p:nvPr/>
         </p:nvSpPr>
@@ -9361,7 +9466,7 @@
       </p:sp>
       <p:sp>
         <p:nvSpPr>
-          <p:cNvPr id="34" name="Text 32"/>
+          <p:cNvPr id="37" name="Text 35"/>
           <p:cNvSpPr/>
           <p:nvPr/>
         </p:nvSpPr>
@@ -9400,7 +9505,7 @@
       </p:sp>
       <p:sp>
         <p:nvSpPr>
-          <p:cNvPr id="35" name="Shape 33"/>
+          <p:cNvPr id="38" name="Shape 36"/>
           <p:cNvSpPr/>
           <p:nvPr/>
         </p:nvSpPr>
@@ -9427,7 +9532,7 @@
       </p:sp>
       <p:sp>
         <p:nvSpPr>
-          <p:cNvPr id="36" name="Text 34"/>
+          <p:cNvPr id="39" name="Text 37"/>
           <p:cNvSpPr/>
           <p:nvPr/>
         </p:nvSpPr>
@@ -9889,7 +9994,7 @@
                 <a:ea typeface="Trebuchet MS" pitchFamily="34" charset="-122"/>
                 <a:cs typeface="Trebuchet MS" pitchFamily="34" charset="-120"/>
               </a:rPr>
-              <a:t>understand</a:t>
+              <a:t>undercover</a:t>
             </a:r>
             <a:endParaRPr lang="en-US" sz="2800" dirty="0"/>
           </a:p>
@@ -10067,7 +10172,7 @@
                 <a:ea typeface="Calibri" pitchFamily="34" charset="-122"/>
                 <a:cs typeface="Calibri" pitchFamily="34" charset="-120"/>
               </a:rPr>
-              <a:t>below, beneath</a:t>
+              <a:t>beneath or secret</a:t>
             </a:r>
             <a:endParaRPr lang="en-US" sz="850" dirty="0"/>
           </a:p>
@@ -10140,7 +10245,7 @@
                 <a:ea typeface="Trebuchet MS" pitchFamily="34" charset="-122"/>
                 <a:cs typeface="Trebuchet MS" pitchFamily="34" charset="-120"/>
               </a:rPr>
-              <a:t>stand</a:t>
+              <a:t>cover</a:t>
             </a:r>
             <a:endParaRPr lang="en-US" sz="1300" dirty="0"/>
           </a:p>
@@ -10179,7 +10284,7 @@
                 <a:ea typeface="Calibri" pitchFamily="34" charset="-122"/>
                 <a:cs typeface="Calibri" pitchFamily="34" charset="-120"/>
               </a:rPr>
-              <a:t>to stand, to be in a position</a:t>
+              <a:t>to hide or conceal</a:t>
             </a:r>
             <a:endParaRPr lang="en-US" sz="850" dirty="0"/>
           </a:p>
@@ -10286,8 +10391,8 @@
         </p:nvSpPr>
         <p:spPr>
           <a:xfrm>
-            <a:off x="2313432" y="3364992"/>
-            <a:ext cx="1645920" cy="475488"/>
+            <a:off x="1975104" y="3364992"/>
+            <a:ext cx="1554480" cy="475488"/>
           </a:xfrm>
           <a:prstGeom prst="rect">
             <a:avLst>
@@ -10313,8 +10418,8 @@
         </p:nvSpPr>
         <p:spPr>
           <a:xfrm>
-            <a:off x="2313432" y="3364992"/>
-            <a:ext cx="1645920" cy="475488"/>
+            <a:off x="1975104" y="3364992"/>
+            <a:ext cx="1554480" cy="475488"/>
           </a:xfrm>
           <a:prstGeom prst="rect">
             <a:avLst/>
@@ -10352,8 +10457,8 @@
         </p:nvSpPr>
         <p:spPr>
           <a:xfrm>
-            <a:off x="3959352" y="3364992"/>
-            <a:ext cx="411480" cy="475488"/>
+            <a:off x="3529584" y="3364992"/>
+            <a:ext cx="73152" cy="475488"/>
           </a:xfrm>
           <a:prstGeom prst="rect">
             <a:avLst/>
@@ -10391,8 +10496,8 @@
         </p:nvSpPr>
         <p:spPr>
           <a:xfrm>
-            <a:off x="4370832" y="3364992"/>
-            <a:ext cx="1645920" cy="475488"/>
+            <a:off x="3602736" y="3364992"/>
+            <a:ext cx="1554480" cy="475488"/>
           </a:xfrm>
           <a:prstGeom prst="rect">
             <a:avLst>
@@ -10418,8 +10523,8 @@
         </p:nvSpPr>
         <p:spPr>
           <a:xfrm>
-            <a:off x="4370832" y="3364992"/>
-            <a:ext cx="1645920" cy="475488"/>
+            <a:off x="3602736" y="3364992"/>
+            <a:ext cx="1554480" cy="475488"/>
           </a:xfrm>
           <a:prstGeom prst="rect">
             <a:avLst/>
@@ -10457,8 +10562,8 @@
         </p:nvSpPr>
         <p:spPr>
           <a:xfrm>
-            <a:off x="6016752" y="3364992"/>
-            <a:ext cx="411480" cy="475488"/>
+            <a:off x="5157216" y="3364992"/>
+            <a:ext cx="73152" cy="475488"/>
           </a:xfrm>
           <a:prstGeom prst="rect">
             <a:avLst/>
@@ -10496,8 +10601,8 @@
         </p:nvSpPr>
         <p:spPr>
           <a:xfrm>
-            <a:off x="6428232" y="3364992"/>
-            <a:ext cx="1645920" cy="475488"/>
+            <a:off x="5230368" y="3364992"/>
+            <a:ext cx="1554480" cy="475488"/>
           </a:xfrm>
           <a:prstGeom prst="rect">
             <a:avLst>
@@ -10523,8 +10628,8 @@
         </p:nvSpPr>
         <p:spPr>
           <a:xfrm>
-            <a:off x="6428232" y="3364992"/>
-            <a:ext cx="1645920" cy="475488"/>
+            <a:off x="5230368" y="3364992"/>
+            <a:ext cx="1554480" cy="475488"/>
           </a:xfrm>
           <a:prstGeom prst="rect">
             <a:avLst/>
@@ -10548,7 +10653,7 @@
                 <a:ea typeface="Trebuchet MS" pitchFamily="34" charset="-122"/>
                 <a:cs typeface="Trebuchet MS" pitchFamily="34" charset="-120"/>
               </a:rPr>
-              <a:t>stand</a:t>
+              <a:t>cov</a:t>
             </a:r>
             <a:endParaRPr lang="en-US" sz="1400" dirty="0"/>
           </a:p>
@@ -10556,7 +10661,112 @@
       </p:sp>
       <p:sp>
         <p:nvSpPr>
-          <p:cNvPr id="33" name="Shape 31"/>
+          <p:cNvPr id="33" name="Text 31"/>
+          <p:cNvSpPr/>
+          <p:nvPr/>
+        </p:nvSpPr>
+        <p:spPr>
+          <a:xfrm>
+            <a:off x="6784848" y="3364992"/>
+            <a:ext cx="73152" cy="475488"/>
+          </a:xfrm>
+          <a:prstGeom prst="rect">
+            <a:avLst/>
+          </a:prstGeom>
+          <a:noFill/>
+          <a:ln/>
+        </p:spPr>
+        <p:txBody>
+          <a:bodyPr wrap="square" lIns="0" tIns="0" rIns="0" bIns="0" rtlCol="0" anchor="ctr"/>
+          <a:lstStyle/>
+          <a:p>
+            <a:pPr algn="ctr" indent="0" marL="0">
+              <a:buNone/>
+            </a:pPr>
+            <a:r>
+              <a:rPr lang="en-US" sz="1600" b="1" dirty="0">
+                <a:solidFill>
+                  <a:srgbClr val="0D9488"/>
+                </a:solidFill>
+                <a:latin typeface="Trebuchet MS" pitchFamily="34" charset="0"/>
+                <a:ea typeface="Trebuchet MS" pitchFamily="34" charset="-122"/>
+                <a:cs typeface="Trebuchet MS" pitchFamily="34" charset="-120"/>
+              </a:rPr>
+              <a:t>·</a:t>
+            </a:r>
+            <a:endParaRPr lang="en-US" sz="1600" dirty="0"/>
+          </a:p>
+        </p:txBody>
+      </p:sp>
+      <p:sp>
+        <p:nvSpPr>
+          <p:cNvPr id="34" name="Shape 32"/>
+          <p:cNvSpPr/>
+          <p:nvPr/>
+        </p:nvSpPr>
+        <p:spPr>
+          <a:xfrm>
+            <a:off x="6858000" y="3364992"/>
+            <a:ext cx="1554480" cy="475488"/>
+          </a:xfrm>
+          <a:prstGeom prst="rect">
+            <a:avLst>
+              <a:gd name="adj" fmla="val 9615"/>
+            </a:avLst>
+          </a:prstGeom>
+          <a:solidFill>
+            <a:srgbClr val="FFFFFF"/>
+          </a:solidFill>
+          <a:ln w="12700">
+            <a:solidFill>
+              <a:srgbClr val="0D9488"/>
+            </a:solidFill>
+            <a:prstDash val="solid"/>
+          </a:ln>
+        </p:spPr>
+      </p:sp>
+      <p:sp>
+        <p:nvSpPr>
+          <p:cNvPr id="35" name="Text 33"/>
+          <p:cNvSpPr/>
+          <p:nvPr/>
+        </p:nvSpPr>
+        <p:spPr>
+          <a:xfrm>
+            <a:off x="6858000" y="3364992"/>
+            <a:ext cx="1554480" cy="475488"/>
+          </a:xfrm>
+          <a:prstGeom prst="rect">
+            <a:avLst/>
+          </a:prstGeom>
+          <a:noFill/>
+          <a:ln/>
+        </p:spPr>
+        <p:txBody>
+          <a:bodyPr wrap="square" lIns="0" tIns="0" rIns="0" bIns="0" rtlCol="0" anchor="ctr"/>
+          <a:lstStyle/>
+          <a:p>
+            <a:pPr algn="ctr" indent="0" marL="0">
+              <a:buNone/>
+            </a:pPr>
+            <a:r>
+              <a:rPr lang="en-US" sz="1400" b="1" dirty="0">
+                <a:solidFill>
+                  <a:srgbClr val="0D9488"/>
+                </a:solidFill>
+                <a:latin typeface="Trebuchet MS" pitchFamily="34" charset="0"/>
+                <a:ea typeface="Trebuchet MS" pitchFamily="34" charset="-122"/>
+                <a:cs typeface="Trebuchet MS" pitchFamily="34" charset="-120"/>
+              </a:rPr>
+              <a:t>er</a:t>
+            </a:r>
+            <a:endParaRPr lang="en-US" sz="1400" dirty="0"/>
+          </a:p>
+        </p:txBody>
+      </p:sp>
+      <p:sp>
+        <p:nvSpPr>
+          <p:cNvPr id="36" name="Shape 34"/>
           <p:cNvSpPr/>
           <p:nvPr/>
         </p:nvSpPr>
@@ -10583,7 +10793,7 @@
       </p:sp>
       <p:sp>
         <p:nvSpPr>
-          <p:cNvPr id="34" name="Text 32"/>
+          <p:cNvPr id="37" name="Text 35"/>
           <p:cNvSpPr/>
           <p:nvPr/>
         </p:nvSpPr>
@@ -10622,7 +10832,7 @@
       </p:sp>
       <p:sp>
         <p:nvSpPr>
-          <p:cNvPr id="35" name="Shape 33"/>
+          <p:cNvPr id="38" name="Shape 36"/>
           <p:cNvSpPr/>
           <p:nvPr/>
         </p:nvSpPr>
@@ -10649,7 +10859,7 @@
       </p:sp>
       <p:sp>
         <p:nvSpPr>
-          <p:cNvPr id="36" name="Shape 34"/>
+          <p:cNvPr id="39" name="Shape 37"/>
           <p:cNvSpPr/>
           <p:nvPr/>
         </p:nvSpPr>
@@ -10676,7 +10886,7 @@
       </p:sp>
       <p:sp>
         <p:nvSpPr>
-          <p:cNvPr id="37" name="Text 35"/>
+          <p:cNvPr id="40" name="Text 38"/>
           <p:cNvSpPr/>
           <p:nvPr/>
         </p:nvSpPr>
@@ -10715,7 +10925,7 @@
       </p:sp>
       <p:sp>
         <p:nvSpPr>
-          <p:cNvPr id="38" name="Shape 36"/>
+          <p:cNvPr id="41" name="Shape 39"/>
           <p:cNvSpPr/>
           <p:nvPr/>
         </p:nvSpPr>
@@ -10742,7 +10952,7 @@
       </p:sp>
       <p:sp>
         <p:nvSpPr>
-          <p:cNvPr id="39" name="Text 37"/>
+          <p:cNvPr id="42" name="Text 40"/>
           <p:cNvSpPr/>
           <p:nvPr/>
         </p:nvSpPr>
@@ -10781,7 +10991,7 @@
       </p:sp>
       <p:sp>
         <p:nvSpPr>
-          <p:cNvPr id="40" name="Shape 38"/>
+          <p:cNvPr id="43" name="Shape 41"/>
           <p:cNvSpPr/>
           <p:nvPr/>
         </p:nvSpPr>
@@ -10808,7 +11018,7 @@
       </p:sp>
       <p:sp>
         <p:nvSpPr>
-          <p:cNvPr id="41" name="Text 39"/>
+          <p:cNvPr id="44" name="Text 42"/>
           <p:cNvSpPr/>
           <p:nvPr/>
         </p:nvSpPr>
@@ -10847,7 +11057,7 @@
       </p:sp>
       <p:sp>
         <p:nvSpPr>
-          <p:cNvPr id="42" name="Shape 40"/>
+          <p:cNvPr id="45" name="Shape 43"/>
           <p:cNvSpPr/>
           <p:nvPr/>
         </p:nvSpPr>
@@ -10874,7 +11084,7 @@
       </p:sp>
       <p:sp>
         <p:nvSpPr>
-          <p:cNvPr id="43" name="Text 41"/>
+          <p:cNvPr id="46" name="Text 44"/>
           <p:cNvSpPr/>
           <p:nvPr/>
         </p:nvSpPr>
@@ -10913,7 +11123,7 @@
       </p:sp>
       <p:sp>
         <p:nvSpPr>
-          <p:cNvPr id="44" name="Shape 42"/>
+          <p:cNvPr id="47" name="Shape 45"/>
           <p:cNvSpPr/>
           <p:nvPr/>
         </p:nvSpPr>
@@ -10940,7 +11150,7 @@
       </p:sp>
       <p:sp>
         <p:nvSpPr>
-          <p:cNvPr id="45" name="Text 43"/>
+          <p:cNvPr id="48" name="Text 46"/>
           <p:cNvSpPr/>
           <p:nvPr/>
         </p:nvSpPr>
@@ -10971,7 +11181,7 @@
                 <a:ea typeface="Trebuchet MS" pitchFamily="34" charset="-122"/>
                 <a:cs typeface="Trebuchet MS" pitchFamily="34" charset="-120"/>
               </a:rPr>
-              <a:t>s</a:t>
+              <a:t>c</a:t>
             </a:r>
             <a:endParaRPr lang="en-US" sz="900" dirty="0"/>
           </a:p>
@@ -10979,7 +11189,7 @@
       </p:sp>
       <p:sp>
         <p:nvSpPr>
-          <p:cNvPr id="46" name="Shape 44"/>
+          <p:cNvPr id="49" name="Shape 47"/>
           <p:cNvSpPr/>
           <p:nvPr/>
         </p:nvSpPr>
@@ -11006,7 +11216,7 @@
       </p:sp>
       <p:sp>
         <p:nvSpPr>
-          <p:cNvPr id="47" name="Text 45"/>
+          <p:cNvPr id="50" name="Text 48"/>
           <p:cNvSpPr/>
           <p:nvPr/>
         </p:nvSpPr>
@@ -11037,7 +11247,7 @@
                 <a:ea typeface="Trebuchet MS" pitchFamily="34" charset="-122"/>
                 <a:cs typeface="Trebuchet MS" pitchFamily="34" charset="-120"/>
               </a:rPr>
-              <a:t>t</a:t>
+              <a:t>o</a:t>
             </a:r>
             <a:endParaRPr lang="en-US" sz="900" dirty="0"/>
           </a:p>
@@ -11045,7 +11255,7 @@
       </p:sp>
       <p:sp>
         <p:nvSpPr>
-          <p:cNvPr id="48" name="Shape 46"/>
+          <p:cNvPr id="51" name="Shape 49"/>
           <p:cNvSpPr/>
           <p:nvPr/>
         </p:nvSpPr>
@@ -11072,7 +11282,7 @@
       </p:sp>
       <p:sp>
         <p:nvSpPr>
-          <p:cNvPr id="49" name="Text 47"/>
+          <p:cNvPr id="52" name="Text 50"/>
           <p:cNvSpPr/>
           <p:nvPr/>
         </p:nvSpPr>
@@ -11103,7 +11313,7 @@
                 <a:ea typeface="Trebuchet MS" pitchFamily="34" charset="-122"/>
                 <a:cs typeface="Trebuchet MS" pitchFamily="34" charset="-120"/>
               </a:rPr>
-              <a:t>a</a:t>
+              <a:t>v</a:t>
             </a:r>
             <a:endParaRPr lang="en-US" sz="900" dirty="0"/>
           </a:p>
@@ -11111,7 +11321,7 @@
       </p:sp>
       <p:sp>
         <p:nvSpPr>
-          <p:cNvPr id="50" name="Shape 48"/>
+          <p:cNvPr id="53" name="Shape 51"/>
           <p:cNvSpPr/>
           <p:nvPr/>
         </p:nvSpPr>
@@ -11138,7 +11348,7 @@
       </p:sp>
       <p:sp>
         <p:nvSpPr>
-          <p:cNvPr id="51" name="Text 49"/>
+          <p:cNvPr id="54" name="Text 52"/>
           <p:cNvSpPr/>
           <p:nvPr/>
         </p:nvSpPr>
@@ -11169,7 +11379,7 @@
                 <a:ea typeface="Trebuchet MS" pitchFamily="34" charset="-122"/>
                 <a:cs typeface="Trebuchet MS" pitchFamily="34" charset="-120"/>
               </a:rPr>
-              <a:t>nd</a:t>
+              <a:t>er</a:t>
             </a:r>
             <a:endParaRPr lang="en-US" sz="900" dirty="0"/>
           </a:p>
@@ -11600,7 +11810,7 @@
                 <a:ea typeface="Trebuchet MS" pitchFamily="34" charset="-122"/>
                 <a:cs typeface="Trebuchet MS" pitchFamily="34" charset="-120"/>
               </a:rPr>
-              <a:t>underground</a:t>
+              <a:t>underwater</a:t>
             </a:r>
             <a:endParaRPr lang="en-US" sz="2800" dirty="0"/>
           </a:p>
@@ -12427,7 +12637,7 @@
                 <a:ea typeface="Trebuchet MS" pitchFamily="34" charset="-122"/>
                 <a:cs typeface="Trebuchet MS" pitchFamily="34" charset="-120"/>
               </a:rPr>
-              <a:t>underground</a:t>
+              <a:t>underwater</a:t>
             </a:r>
             <a:endParaRPr lang="en-US" sz="2800" dirty="0"/>
           </a:p>
@@ -12605,7 +12815,7 @@
                 <a:ea typeface="Calibri" pitchFamily="34" charset="-122"/>
                 <a:cs typeface="Calibri" pitchFamily="34" charset="-120"/>
               </a:rPr>
-              <a:t>below, beneath</a:t>
+              <a:t>beneath or below</a:t>
             </a:r>
             <a:endParaRPr lang="en-US" sz="850" dirty="0"/>
           </a:p>
@@ -12678,7 +12888,7 @@
                 <a:ea typeface="Trebuchet MS" pitchFamily="34" charset="-122"/>
                 <a:cs typeface="Trebuchet MS" pitchFamily="34" charset="-120"/>
               </a:rPr>
-              <a:t>ground</a:t>
+              <a:t>water</a:t>
             </a:r>
             <a:endParaRPr lang="en-US" sz="1300" dirty="0"/>
           </a:p>
@@ -12717,7 +12927,7 @@
                 <a:ea typeface="Calibri" pitchFamily="34" charset="-122"/>
                 <a:cs typeface="Calibri" pitchFamily="34" charset="-120"/>
               </a:rPr>
-              <a:t>the earth beneath our feet</a:t>
+              <a:t>the liquid found in rivers and oceans</a:t>
             </a:r>
             <a:endParaRPr lang="en-US" sz="850" dirty="0"/>
           </a:p>
@@ -13412,7 +13622,7 @@
                 <a:ea typeface="Trebuchet MS" pitchFamily="34" charset="-122"/>
                 <a:cs typeface="Trebuchet MS" pitchFamily="34" charset="-120"/>
               </a:rPr>
-              <a:t>underground</a:t>
+              <a:t>underwater</a:t>
             </a:r>
             <a:endParaRPr lang="en-US" sz="2800" dirty="0"/>
           </a:p>
@@ -13590,7 +13800,7 @@
                 <a:ea typeface="Calibri" pitchFamily="34" charset="-122"/>
                 <a:cs typeface="Calibri" pitchFamily="34" charset="-120"/>
               </a:rPr>
-              <a:t>below, beneath</a:t>
+              <a:t>beneath or below</a:t>
             </a:r>
             <a:endParaRPr lang="en-US" sz="850" dirty="0"/>
           </a:p>
@@ -13663,7 +13873,7 @@
                 <a:ea typeface="Trebuchet MS" pitchFamily="34" charset="-122"/>
                 <a:cs typeface="Trebuchet MS" pitchFamily="34" charset="-120"/>
               </a:rPr>
-              <a:t>ground</a:t>
+              <a:t>water</a:t>
             </a:r>
             <a:endParaRPr lang="en-US" sz="1300" dirty="0"/>
           </a:p>
@@ -13702,7 +13912,7 @@
                 <a:ea typeface="Calibri" pitchFamily="34" charset="-122"/>
                 <a:cs typeface="Calibri" pitchFamily="34" charset="-120"/>
               </a:rPr>
-              <a:t>the earth beneath our feet</a:t>
+              <a:t>the liquid found in rivers and oceans</a:t>
             </a:r>
             <a:endParaRPr lang="en-US" sz="850" dirty="0"/>
           </a:p>
@@ -13809,8 +14019,8 @@
         </p:nvSpPr>
         <p:spPr>
           <a:xfrm>
-            <a:off x="2313432" y="3364992"/>
-            <a:ext cx="1645920" cy="475488"/>
+            <a:off x="1975104" y="3364992"/>
+            <a:ext cx="1554480" cy="475488"/>
           </a:xfrm>
           <a:prstGeom prst="rect">
             <a:avLst>
@@ -13836,8 +14046,8 @@
         </p:nvSpPr>
         <p:spPr>
           <a:xfrm>
-            <a:off x="2313432" y="3364992"/>
-            <a:ext cx="1645920" cy="475488"/>
+            <a:off x="1975104" y="3364992"/>
+            <a:ext cx="1554480" cy="475488"/>
           </a:xfrm>
           <a:prstGeom prst="rect">
             <a:avLst/>
@@ -13875,8 +14085,8 @@
         </p:nvSpPr>
         <p:spPr>
           <a:xfrm>
-            <a:off x="3959352" y="3364992"/>
-            <a:ext cx="411480" cy="475488"/>
+            <a:off x="3529584" y="3364992"/>
+            <a:ext cx="73152" cy="475488"/>
           </a:xfrm>
           <a:prstGeom prst="rect">
             <a:avLst/>
@@ -13914,8 +14124,8 @@
         </p:nvSpPr>
         <p:spPr>
           <a:xfrm>
-            <a:off x="4370832" y="3364992"/>
-            <a:ext cx="1645920" cy="475488"/>
+            <a:off x="3602736" y="3364992"/>
+            <a:ext cx="1554480" cy="475488"/>
           </a:xfrm>
           <a:prstGeom prst="rect">
             <a:avLst>
@@ -13941,8 +14151,8 @@
         </p:nvSpPr>
         <p:spPr>
           <a:xfrm>
-            <a:off x="4370832" y="3364992"/>
-            <a:ext cx="1645920" cy="475488"/>
+            <a:off x="3602736" y="3364992"/>
+            <a:ext cx="1554480" cy="475488"/>
           </a:xfrm>
           <a:prstGeom prst="rect">
             <a:avLst/>
@@ -13980,8 +14190,8 @@
         </p:nvSpPr>
         <p:spPr>
           <a:xfrm>
-            <a:off x="6016752" y="3364992"/>
-            <a:ext cx="411480" cy="475488"/>
+            <a:off x="5157216" y="3364992"/>
+            <a:ext cx="73152" cy="475488"/>
           </a:xfrm>
           <a:prstGeom prst="rect">
             <a:avLst/>
@@ -14019,8 +14229,8 @@
         </p:nvSpPr>
         <p:spPr>
           <a:xfrm>
-            <a:off x="6428232" y="3364992"/>
-            <a:ext cx="1645920" cy="475488"/>
+            <a:off x="5230368" y="3364992"/>
+            <a:ext cx="1554480" cy="475488"/>
           </a:xfrm>
           <a:prstGeom prst="rect">
             <a:avLst>
@@ -14046,8 +14256,8 @@
         </p:nvSpPr>
         <p:spPr>
           <a:xfrm>
-            <a:off x="6428232" y="3364992"/>
-            <a:ext cx="1645920" cy="475488"/>
+            <a:off x="5230368" y="3364992"/>
+            <a:ext cx="1554480" cy="475488"/>
           </a:xfrm>
           <a:prstGeom prst="rect">
             <a:avLst/>
@@ -14071,7 +14281,7 @@
                 <a:ea typeface="Trebuchet MS" pitchFamily="34" charset="-122"/>
                 <a:cs typeface="Trebuchet MS" pitchFamily="34" charset="-120"/>
               </a:rPr>
-              <a:t>ground</a:t>
+              <a:t>wa</a:t>
             </a:r>
             <a:endParaRPr lang="en-US" sz="1400" dirty="0"/>
           </a:p>
@@ -14079,7 +14289,112 @@
       </p:sp>
       <p:sp>
         <p:nvSpPr>
-          <p:cNvPr id="33" name="Shape 31"/>
+          <p:cNvPr id="33" name="Text 31"/>
+          <p:cNvSpPr/>
+          <p:nvPr/>
+        </p:nvSpPr>
+        <p:spPr>
+          <a:xfrm>
+            <a:off x="6784848" y="3364992"/>
+            <a:ext cx="73152" cy="475488"/>
+          </a:xfrm>
+          <a:prstGeom prst="rect">
+            <a:avLst/>
+          </a:prstGeom>
+          <a:noFill/>
+          <a:ln/>
+        </p:spPr>
+        <p:txBody>
+          <a:bodyPr wrap="square" lIns="0" tIns="0" rIns="0" bIns="0" rtlCol="0" anchor="ctr"/>
+          <a:lstStyle/>
+          <a:p>
+            <a:pPr algn="ctr" indent="0" marL="0">
+              <a:buNone/>
+            </a:pPr>
+            <a:r>
+              <a:rPr lang="en-US" sz="1600" b="1" dirty="0">
+                <a:solidFill>
+                  <a:srgbClr val="0D9488"/>
+                </a:solidFill>
+                <a:latin typeface="Trebuchet MS" pitchFamily="34" charset="0"/>
+                <a:ea typeface="Trebuchet MS" pitchFamily="34" charset="-122"/>
+                <a:cs typeface="Trebuchet MS" pitchFamily="34" charset="-120"/>
+              </a:rPr>
+              <a:t>·</a:t>
+            </a:r>
+            <a:endParaRPr lang="en-US" sz="1600" dirty="0"/>
+          </a:p>
+        </p:txBody>
+      </p:sp>
+      <p:sp>
+        <p:nvSpPr>
+          <p:cNvPr id="34" name="Shape 32"/>
+          <p:cNvSpPr/>
+          <p:nvPr/>
+        </p:nvSpPr>
+        <p:spPr>
+          <a:xfrm>
+            <a:off x="6858000" y="3364992"/>
+            <a:ext cx="1554480" cy="475488"/>
+          </a:xfrm>
+          <a:prstGeom prst="rect">
+            <a:avLst>
+              <a:gd name="adj" fmla="val 9615"/>
+            </a:avLst>
+          </a:prstGeom>
+          <a:solidFill>
+            <a:srgbClr val="FFFFFF"/>
+          </a:solidFill>
+          <a:ln w="12700">
+            <a:solidFill>
+              <a:srgbClr val="0D9488"/>
+            </a:solidFill>
+            <a:prstDash val="solid"/>
+          </a:ln>
+        </p:spPr>
+      </p:sp>
+      <p:sp>
+        <p:nvSpPr>
+          <p:cNvPr id="35" name="Text 33"/>
+          <p:cNvSpPr/>
+          <p:nvPr/>
+        </p:nvSpPr>
+        <p:spPr>
+          <a:xfrm>
+            <a:off x="6858000" y="3364992"/>
+            <a:ext cx="1554480" cy="475488"/>
+          </a:xfrm>
+          <a:prstGeom prst="rect">
+            <a:avLst/>
+          </a:prstGeom>
+          <a:noFill/>
+          <a:ln/>
+        </p:spPr>
+        <p:txBody>
+          <a:bodyPr wrap="square" lIns="0" tIns="0" rIns="0" bIns="0" rtlCol="0" anchor="ctr"/>
+          <a:lstStyle/>
+          <a:p>
+            <a:pPr algn="ctr" indent="0" marL="0">
+              <a:buNone/>
+            </a:pPr>
+            <a:r>
+              <a:rPr lang="en-US" sz="1400" b="1" dirty="0">
+                <a:solidFill>
+                  <a:srgbClr val="0D9488"/>
+                </a:solidFill>
+                <a:latin typeface="Trebuchet MS" pitchFamily="34" charset="0"/>
+                <a:ea typeface="Trebuchet MS" pitchFamily="34" charset="-122"/>
+                <a:cs typeface="Trebuchet MS" pitchFamily="34" charset="-120"/>
+              </a:rPr>
+              <a:t>ter</a:t>
+            </a:r>
+            <a:endParaRPr lang="en-US" sz="1400" dirty="0"/>
+          </a:p>
+        </p:txBody>
+      </p:sp>
+      <p:sp>
+        <p:nvSpPr>
+          <p:cNvPr id="36" name="Shape 34"/>
           <p:cNvSpPr/>
           <p:nvPr/>
         </p:nvSpPr>
@@ -14106,7 +14421,7 @@
       </p:sp>
       <p:sp>
         <p:nvSpPr>
-          <p:cNvPr id="34" name="Text 32"/>
+          <p:cNvPr id="37" name="Text 35"/>
           <p:cNvSpPr/>
           <p:nvPr/>
         </p:nvSpPr>
@@ -14145,7 +14460,7 @@
       </p:sp>
       <p:sp>
         <p:nvSpPr>
-          <p:cNvPr id="35" name="Shape 33"/>
+          <p:cNvPr id="38" name="Shape 36"/>
           <p:cNvSpPr/>
           <p:nvPr/>
         </p:nvSpPr>
@@ -14172,7 +14487,7 @@
       </p:sp>
       <p:sp>
         <p:nvSpPr>
-          <p:cNvPr id="36" name="Text 34"/>
+          <p:cNvPr id="39" name="Text 37"/>
           <p:cNvSpPr/>
           <p:nvPr/>
         </p:nvSpPr>
@@ -14899,7 +15214,7 @@
                 <a:ea typeface="Trebuchet MS" pitchFamily="34" charset="-122"/>
                 <a:cs typeface="Trebuchet MS" pitchFamily="34" charset="-120"/>
               </a:rPr>
-              <a:t>underground</a:t>
+              <a:t>underwater</a:t>
             </a:r>
             <a:endParaRPr lang="en-US" sz="2800" dirty="0"/>
           </a:p>
@@ -15077,7 +15392,7 @@
                 <a:ea typeface="Calibri" pitchFamily="34" charset="-122"/>
                 <a:cs typeface="Calibri" pitchFamily="34" charset="-120"/>
               </a:rPr>
-              <a:t>below, beneath</a:t>
+              <a:t>beneath or below</a:t>
             </a:r>
             <a:endParaRPr lang="en-US" sz="850" dirty="0"/>
           </a:p>
@@ -15150,7 +15465,7 @@
                 <a:ea typeface="Trebuchet MS" pitchFamily="34" charset="-122"/>
                 <a:cs typeface="Trebuchet MS" pitchFamily="34" charset="-120"/>
               </a:rPr>
-              <a:t>ground</a:t>
+              <a:t>water</a:t>
             </a:r>
             <a:endParaRPr lang="en-US" sz="1300" dirty="0"/>
           </a:p>
@@ -15189,7 +15504,7 @@
                 <a:ea typeface="Calibri" pitchFamily="34" charset="-122"/>
                 <a:cs typeface="Calibri" pitchFamily="34" charset="-120"/>
               </a:rPr>
-              <a:t>the earth beneath our feet</a:t>
+              <a:t>the liquid found in rivers and oceans</a:t>
             </a:r>
             <a:endParaRPr lang="en-US" sz="850" dirty="0"/>
           </a:p>
@@ -15296,8 +15611,8 @@
         </p:nvSpPr>
         <p:spPr>
           <a:xfrm>
-            <a:off x="2313432" y="3364992"/>
-            <a:ext cx="1645920" cy="475488"/>
+            <a:off x="1975104" y="3364992"/>
+            <a:ext cx="1554480" cy="475488"/>
           </a:xfrm>
           <a:prstGeom prst="rect">
             <a:avLst>
@@ -15323,8 +15638,8 @@
         </p:nvSpPr>
         <p:spPr>
           <a:xfrm>
-            <a:off x="2313432" y="3364992"/>
-            <a:ext cx="1645920" cy="475488"/>
+            <a:off x="1975104" y="3364992"/>
+            <a:ext cx="1554480" cy="475488"/>
           </a:xfrm>
           <a:prstGeom prst="rect">
             <a:avLst/>
@@ -15362,8 +15677,8 @@
         </p:nvSpPr>
         <p:spPr>
           <a:xfrm>
-            <a:off x="3959352" y="3364992"/>
-            <a:ext cx="411480" cy="475488"/>
+            <a:off x="3529584" y="3364992"/>
+            <a:ext cx="73152" cy="475488"/>
           </a:xfrm>
           <a:prstGeom prst="rect">
             <a:avLst/>
@@ -15401,8 +15716,8 @@
         </p:nvSpPr>
         <p:spPr>
           <a:xfrm>
-            <a:off x="4370832" y="3364992"/>
-            <a:ext cx="1645920" cy="475488"/>
+            <a:off x="3602736" y="3364992"/>
+            <a:ext cx="1554480" cy="475488"/>
           </a:xfrm>
           <a:prstGeom prst="rect">
             <a:avLst>
@@ -15428,8 +15743,8 @@
         </p:nvSpPr>
         <p:spPr>
           <a:xfrm>
-            <a:off x="4370832" y="3364992"/>
-            <a:ext cx="1645920" cy="475488"/>
+            <a:off x="3602736" y="3364992"/>
+            <a:ext cx="1554480" cy="475488"/>
           </a:xfrm>
           <a:prstGeom prst="rect">
             <a:avLst/>
@@ -15467,8 +15782,8 @@
         </p:nvSpPr>
         <p:spPr>
           <a:xfrm>
-            <a:off x="6016752" y="3364992"/>
-            <a:ext cx="411480" cy="475488"/>
+            <a:off x="5157216" y="3364992"/>
+            <a:ext cx="73152" cy="475488"/>
           </a:xfrm>
           <a:prstGeom prst="rect">
             <a:avLst/>
@@ -15506,8 +15821,8 @@
         </p:nvSpPr>
         <p:spPr>
           <a:xfrm>
-            <a:off x="6428232" y="3364992"/>
-            <a:ext cx="1645920" cy="475488"/>
+            <a:off x="5230368" y="3364992"/>
+            <a:ext cx="1554480" cy="475488"/>
           </a:xfrm>
           <a:prstGeom prst="rect">
             <a:avLst>
@@ -15533,8 +15848,8 @@
         </p:nvSpPr>
         <p:spPr>
           <a:xfrm>
-            <a:off x="6428232" y="3364992"/>
-            <a:ext cx="1645920" cy="475488"/>
+            <a:off x="5230368" y="3364992"/>
+            <a:ext cx="1554480" cy="475488"/>
           </a:xfrm>
           <a:prstGeom prst="rect">
             <a:avLst/>
@@ -15558,7 +15873,7 @@
                 <a:ea typeface="Trebuchet MS" pitchFamily="34" charset="-122"/>
                 <a:cs typeface="Trebuchet MS" pitchFamily="34" charset="-120"/>
               </a:rPr>
-              <a:t>ground</a:t>
+              <a:t>wa</a:t>
             </a:r>
             <a:endParaRPr lang="en-US" sz="1400" dirty="0"/>
           </a:p>
@@ -15566,7 +15881,112 @@
       </p:sp>
       <p:sp>
         <p:nvSpPr>
-          <p:cNvPr id="33" name="Shape 31"/>
+          <p:cNvPr id="33" name="Text 31"/>
+          <p:cNvSpPr/>
+          <p:nvPr/>
+        </p:nvSpPr>
+        <p:spPr>
+          <a:xfrm>
+            <a:off x="6784848" y="3364992"/>
+            <a:ext cx="73152" cy="475488"/>
+          </a:xfrm>
+          <a:prstGeom prst="rect">
+            <a:avLst/>
+          </a:prstGeom>
+          <a:noFill/>
+          <a:ln/>
+        </p:spPr>
+        <p:txBody>
+          <a:bodyPr wrap="square" lIns="0" tIns="0" rIns="0" bIns="0" rtlCol="0" anchor="ctr"/>
+          <a:lstStyle/>
+          <a:p>
+            <a:pPr algn="ctr" indent="0" marL="0">
+              <a:buNone/>
+            </a:pPr>
+            <a:r>
+              <a:rPr lang="en-US" sz="1600" b="1" dirty="0">
+                <a:solidFill>
+                  <a:srgbClr val="0D9488"/>
+                </a:solidFill>
+                <a:latin typeface="Trebuchet MS" pitchFamily="34" charset="0"/>
+                <a:ea typeface="Trebuchet MS" pitchFamily="34" charset="-122"/>
+                <a:cs typeface="Trebuchet MS" pitchFamily="34" charset="-120"/>
+              </a:rPr>
+              <a:t>·</a:t>
+            </a:r>
+            <a:endParaRPr lang="en-US" sz="1600" dirty="0"/>
+          </a:p>
+        </p:txBody>
+      </p:sp>
+      <p:sp>
+        <p:nvSpPr>
+          <p:cNvPr id="34" name="Shape 32"/>
+          <p:cNvSpPr/>
+          <p:nvPr/>
+        </p:nvSpPr>
+        <p:spPr>
+          <a:xfrm>
+            <a:off x="6858000" y="3364992"/>
+            <a:ext cx="1554480" cy="475488"/>
+          </a:xfrm>
+          <a:prstGeom prst="rect">
+            <a:avLst>
+              <a:gd name="adj" fmla="val 9615"/>
+            </a:avLst>
+          </a:prstGeom>
+          <a:solidFill>
+            <a:srgbClr val="FFFFFF"/>
+          </a:solidFill>
+          <a:ln w="12700">
+            <a:solidFill>
+              <a:srgbClr val="0D9488"/>
+            </a:solidFill>
+            <a:prstDash val="solid"/>
+          </a:ln>
+        </p:spPr>
+      </p:sp>
+      <p:sp>
+        <p:nvSpPr>
+          <p:cNvPr id="35" name="Text 33"/>
+          <p:cNvSpPr/>
+          <p:nvPr/>
+        </p:nvSpPr>
+        <p:spPr>
+          <a:xfrm>
+            <a:off x="6858000" y="3364992"/>
+            <a:ext cx="1554480" cy="475488"/>
+          </a:xfrm>
+          <a:prstGeom prst="rect">
+            <a:avLst/>
+          </a:prstGeom>
+          <a:noFill/>
+          <a:ln/>
+        </p:spPr>
+        <p:txBody>
+          <a:bodyPr wrap="square" lIns="0" tIns="0" rIns="0" bIns="0" rtlCol="0" anchor="ctr"/>
+          <a:lstStyle/>
+          <a:p>
+            <a:pPr algn="ctr" indent="0" marL="0">
+              <a:buNone/>
+            </a:pPr>
+            <a:r>
+              <a:rPr lang="en-US" sz="1400" b="1" dirty="0">
+                <a:solidFill>
+                  <a:srgbClr val="0D9488"/>
+                </a:solidFill>
+                <a:latin typeface="Trebuchet MS" pitchFamily="34" charset="0"/>
+                <a:ea typeface="Trebuchet MS" pitchFamily="34" charset="-122"/>
+                <a:cs typeface="Trebuchet MS" pitchFamily="34" charset="-120"/>
+              </a:rPr>
+              <a:t>ter</a:t>
+            </a:r>
+            <a:endParaRPr lang="en-US" sz="1400" dirty="0"/>
+          </a:p>
+        </p:txBody>
+      </p:sp>
+      <p:sp>
+        <p:nvSpPr>
+          <p:cNvPr id="36" name="Shape 34"/>
           <p:cNvSpPr/>
           <p:nvPr/>
         </p:nvSpPr>
@@ -15593,7 +16013,7 @@
       </p:sp>
       <p:sp>
         <p:nvSpPr>
-          <p:cNvPr id="34" name="Text 32"/>
+          <p:cNvPr id="37" name="Text 35"/>
           <p:cNvSpPr/>
           <p:nvPr/>
         </p:nvSpPr>
@@ -15632,7 +16052,7 @@
       </p:sp>
       <p:sp>
         <p:nvSpPr>
-          <p:cNvPr id="35" name="Shape 33"/>
+          <p:cNvPr id="38" name="Shape 36"/>
           <p:cNvSpPr/>
           <p:nvPr/>
         </p:nvSpPr>
@@ -15659,7 +16079,7 @@
       </p:sp>
       <p:sp>
         <p:nvSpPr>
-          <p:cNvPr id="36" name="Shape 34"/>
+          <p:cNvPr id="39" name="Shape 37"/>
           <p:cNvSpPr/>
           <p:nvPr/>
         </p:nvSpPr>
@@ -15686,7 +16106,7 @@
       </p:sp>
       <p:sp>
         <p:nvSpPr>
-          <p:cNvPr id="37" name="Text 35"/>
+          <p:cNvPr id="40" name="Text 38"/>
           <p:cNvSpPr/>
           <p:nvPr/>
         </p:nvSpPr>
@@ -15725,7 +16145,7 @@
       </p:sp>
       <p:sp>
         <p:nvSpPr>
-          <p:cNvPr id="38" name="Shape 36"/>
+          <p:cNvPr id="41" name="Shape 39"/>
           <p:cNvSpPr/>
           <p:nvPr/>
         </p:nvSpPr>
@@ -15752,7 +16172,7 @@
       </p:sp>
       <p:sp>
         <p:nvSpPr>
-          <p:cNvPr id="39" name="Text 37"/>
+          <p:cNvPr id="42" name="Text 40"/>
           <p:cNvSpPr/>
           <p:nvPr/>
         </p:nvSpPr>
@@ -15791,7 +16211,7 @@
       </p:sp>
       <p:sp>
         <p:nvSpPr>
-          <p:cNvPr id="40" name="Shape 38"/>
+          <p:cNvPr id="43" name="Shape 41"/>
           <p:cNvSpPr/>
           <p:nvPr/>
         </p:nvSpPr>
@@ -15818,7 +16238,7 @@
       </p:sp>
       <p:sp>
         <p:nvSpPr>
-          <p:cNvPr id="41" name="Text 39"/>
+          <p:cNvPr id="44" name="Text 42"/>
           <p:cNvSpPr/>
           <p:nvPr/>
         </p:nvSpPr>
@@ -15857,7 +16277,7 @@
       </p:sp>
       <p:sp>
         <p:nvSpPr>
-          <p:cNvPr id="42" name="Shape 40"/>
+          <p:cNvPr id="45" name="Shape 43"/>
           <p:cNvSpPr/>
           <p:nvPr/>
         </p:nvSpPr>
@@ -15884,7 +16304,7 @@
       </p:sp>
       <p:sp>
         <p:nvSpPr>
-          <p:cNvPr id="43" name="Text 41"/>
+          <p:cNvPr id="46" name="Text 44"/>
           <p:cNvSpPr/>
           <p:nvPr/>
         </p:nvSpPr>
@@ -15923,7 +16343,7 @@
       </p:sp>
       <p:sp>
         <p:nvSpPr>
-          <p:cNvPr id="44" name="Shape 42"/>
+          <p:cNvPr id="47" name="Shape 45"/>
           <p:cNvSpPr/>
           <p:nvPr/>
         </p:nvSpPr>
@@ -15950,7 +16370,7 @@
       </p:sp>
       <p:sp>
         <p:nvSpPr>
-          <p:cNvPr id="45" name="Text 43"/>
+          <p:cNvPr id="48" name="Text 46"/>
           <p:cNvSpPr/>
           <p:nvPr/>
         </p:nvSpPr>
@@ -15981,7 +16401,7 @@
                 <a:ea typeface="Trebuchet MS" pitchFamily="34" charset="-122"/>
                 <a:cs typeface="Trebuchet MS" pitchFamily="34" charset="-120"/>
               </a:rPr>
-              <a:t>g</a:t>
+              <a:t>w</a:t>
             </a:r>
             <a:endParaRPr lang="en-US" sz="900" dirty="0"/>
           </a:p>
@@ -15989,7 +16409,7 @@
       </p:sp>
       <p:sp>
         <p:nvSpPr>
-          <p:cNvPr id="46" name="Shape 44"/>
+          <p:cNvPr id="49" name="Shape 47"/>
           <p:cNvSpPr/>
           <p:nvPr/>
         </p:nvSpPr>
@@ -16016,7 +16436,7 @@
       </p:sp>
       <p:sp>
         <p:nvSpPr>
-          <p:cNvPr id="47" name="Text 45"/>
+          <p:cNvPr id="50" name="Text 48"/>
           <p:cNvSpPr/>
           <p:nvPr/>
         </p:nvSpPr>
@@ -16047,7 +16467,7 @@
                 <a:ea typeface="Trebuchet MS" pitchFamily="34" charset="-122"/>
                 <a:cs typeface="Trebuchet MS" pitchFamily="34" charset="-120"/>
               </a:rPr>
-              <a:t>r</a:t>
+              <a:t>a</a:t>
             </a:r>
             <a:endParaRPr lang="en-US" sz="900" dirty="0"/>
           </a:p>
@@ -16055,7 +16475,7 @@
       </p:sp>
       <p:sp>
         <p:nvSpPr>
-          <p:cNvPr id="48" name="Shape 46"/>
+          <p:cNvPr id="51" name="Shape 49"/>
           <p:cNvSpPr/>
           <p:nvPr/>
         </p:nvSpPr>
@@ -16082,7 +16502,7 @@
       </p:sp>
       <p:sp>
         <p:nvSpPr>
-          <p:cNvPr id="49" name="Text 47"/>
+          <p:cNvPr id="52" name="Text 50"/>
           <p:cNvSpPr/>
           <p:nvPr/>
         </p:nvSpPr>
@@ -16113,7 +16533,7 @@
                 <a:ea typeface="Trebuchet MS" pitchFamily="34" charset="-122"/>
                 <a:cs typeface="Trebuchet MS" pitchFamily="34" charset="-120"/>
               </a:rPr>
-              <a:t>ou</a:t>
+              <a:t>t</a:t>
             </a:r>
             <a:endParaRPr lang="en-US" sz="900" dirty="0"/>
           </a:p>
@@ -16121,7 +16541,7 @@
       </p:sp>
       <p:sp>
         <p:nvSpPr>
-          <p:cNvPr id="50" name="Shape 48"/>
+          <p:cNvPr id="53" name="Shape 51"/>
           <p:cNvSpPr/>
           <p:nvPr/>
         </p:nvSpPr>
@@ -16148,7 +16568,7 @@
       </p:sp>
       <p:sp>
         <p:nvSpPr>
-          <p:cNvPr id="51" name="Text 49"/>
+          <p:cNvPr id="54" name="Text 52"/>
           <p:cNvSpPr/>
           <p:nvPr/>
         </p:nvSpPr>
@@ -16179,7 +16599,7 @@
                 <a:ea typeface="Trebuchet MS" pitchFamily="34" charset="-122"/>
                 <a:cs typeface="Trebuchet MS" pitchFamily="34" charset="-120"/>
               </a:rPr>
-              <a:t>nd</a:t>
+              <a:t>er</a:t>
             </a:r>
             <a:endParaRPr lang="en-US" sz="900" dirty="0"/>
           </a:p>
@@ -17505,7 +17925,7 @@
                 <a:ea typeface="Calibri" pitchFamily="34" charset="-122"/>
                 <a:cs typeface="Calibri" pitchFamily="34" charset="-120"/>
               </a:rPr>
-              <a:t>The </a:t>
+              <a:t>We had to </a:t>
             </a:r>
             <a:pPr algn="l" indent="0" marL="0">
               <a:buNone/>
@@ -17522,7 +17942,7 @@
                 <a:ea typeface="Calibri" pitchFamily="34" charset="-122"/>
                 <a:cs typeface="Calibri" pitchFamily="34" charset="-120"/>
               </a:rPr>
-              <a:t>undercover</a:t>
+              <a:t>underground</a:t>
             </a:r>
             <a:pPr algn="l" indent="0" marL="0">
               <a:buNone/>
@@ -17536,7 +17956,7 @@
                 <a:ea typeface="Calibri" pitchFamily="34" charset="-122"/>
                 <a:cs typeface="Calibri" pitchFamily="34" charset="-120"/>
               </a:rPr>
-              <a:t> ranger had to </a:t>
+              <a:t> the cables, </a:t>
             </a:r>
             <a:pPr algn="l" indent="0" marL="0">
               <a:buNone/>
@@ -17553,7 +17973,7 @@
                 <a:ea typeface="Calibri" pitchFamily="34" charset="-122"/>
                 <a:cs typeface="Calibri" pitchFamily="34" charset="-120"/>
               </a:rPr>
-              <a:t>underwater</a:t>
+              <a:t>underline</a:t>
             </a:r>
             <a:pPr algn="l" indent="0" marL="0">
               <a:buNone/>
@@ -17567,7 +17987,7 @@
                 <a:ea typeface="Calibri" pitchFamily="34" charset="-122"/>
                 <a:cs typeface="Calibri" pitchFamily="34" charset="-120"/>
               </a:rPr>
-              <a:t> dive to </a:t>
+              <a:t> the key ideas, and make sure the food was not </a:t>
             </a:r>
             <a:pPr algn="l" indent="0" marL="0">
               <a:buNone/>
@@ -17584,7 +18004,7 @@
                 <a:ea typeface="Calibri" pitchFamily="34" charset="-122"/>
                 <a:cs typeface="Calibri" pitchFamily="34" charset="-120"/>
               </a:rPr>
-              <a:t>underline</a:t>
+              <a:t>undercooked</a:t>
             </a:r>
             <a:pPr algn="l" indent="0" marL="0">
               <a:buNone/>
@@ -17598,7 +18018,7 @@
                 <a:ea typeface="Calibri" pitchFamily="34" charset="-122"/>
                 <a:cs typeface="Calibri" pitchFamily="34" charset="-120"/>
               </a:rPr>
-              <a:t> the importance of protecting the reef.</a:t>
+              <a:t>.</a:t>
             </a:r>
             <a:endParaRPr lang="en-US" sz="1800" dirty="0"/>
           </a:p>
@@ -17753,7 +18173,7 @@
                 <a:ea typeface="Trebuchet MS" pitchFamily="34" charset="-122"/>
                 <a:cs typeface="Trebuchet MS" pitchFamily="34" charset="-120"/>
               </a:rPr>
-              <a:t>undercover</a:t>
+              <a:t>underground</a:t>
             </a:r>
             <a:endParaRPr lang="en-US" sz="1400" dirty="0"/>
           </a:p>
@@ -17881,7 +18301,7 @@
                 <a:ea typeface="Trebuchet MS" pitchFamily="34" charset="-122"/>
                 <a:cs typeface="Trebuchet MS" pitchFamily="34" charset="-120"/>
               </a:rPr>
-              <a:t>underwater</a:t>
+              <a:t>underline</a:t>
             </a:r>
             <a:endParaRPr lang="en-US" sz="1400" dirty="0"/>
           </a:p>
@@ -18009,7 +18429,7 @@
                 <a:ea typeface="Trebuchet MS" pitchFamily="34" charset="-122"/>
                 <a:cs typeface="Trebuchet MS" pitchFamily="34" charset="-120"/>
               </a:rPr>
-              <a:t>underline</a:t>
+              <a:t>undercooked</a:t>
             </a:r>
             <a:endParaRPr lang="en-US" sz="1400" dirty="0"/>
           </a:p>
@@ -18479,7 +18899,7 @@
                 <a:ea typeface="Trebuchet MS" pitchFamily="34" charset="-122"/>
                 <a:cs typeface="Trebuchet MS" pitchFamily="34" charset="-120"/>
               </a:rPr>
-              <a:t>undercover</a:t>
+              <a:t>underground</a:t>
             </a:r>
             <a:endParaRPr lang="en-US" sz="2800" dirty="0"/>
           </a:p>
@@ -19306,7 +19726,7 @@
                 <a:ea typeface="Trebuchet MS" pitchFamily="34" charset="-122"/>
                 <a:cs typeface="Trebuchet MS" pitchFamily="34" charset="-120"/>
               </a:rPr>
-              <a:t>undercover</a:t>
+              <a:t>underground</a:t>
             </a:r>
             <a:endParaRPr lang="en-US" sz="2800" dirty="0"/>
           </a:p>
@@ -19484,7 +19904,7 @@
                 <a:ea typeface="Calibri" pitchFamily="34" charset="-122"/>
                 <a:cs typeface="Calibri" pitchFamily="34" charset="-120"/>
               </a:rPr>
-              <a:t>below, beneath</a:t>
+              <a:t>below or beneath</a:t>
             </a:r>
             <a:endParaRPr lang="en-US" sz="850" dirty="0"/>
           </a:p>
@@ -19557,7 +19977,7 @@
                 <a:ea typeface="Trebuchet MS" pitchFamily="34" charset="-122"/>
                 <a:cs typeface="Trebuchet MS" pitchFamily="34" charset="-120"/>
               </a:rPr>
-              <a:t>cover</a:t>
+              <a:t>ground</a:t>
             </a:r>
             <a:endParaRPr lang="en-US" sz="1300" dirty="0"/>
           </a:p>
@@ -19596,7 +20016,7 @@
                 <a:ea typeface="Calibri" pitchFamily="34" charset="-122"/>
                 <a:cs typeface="Calibri" pitchFamily="34" charset="-120"/>
               </a:rPr>
-              <a:t>to hide or conceal</a:t>
+              <a:t>the surface of the earth</a:t>
             </a:r>
             <a:endParaRPr lang="en-US" sz="850" dirty="0"/>
           </a:p>
@@ -20291,7 +20711,7 @@
                 <a:ea typeface="Trebuchet MS" pitchFamily="34" charset="-122"/>
                 <a:cs typeface="Trebuchet MS" pitchFamily="34" charset="-120"/>
               </a:rPr>
-              <a:t>undercover</a:t>
+              <a:t>underground</a:t>
             </a:r>
             <a:endParaRPr lang="en-US" sz="2800" dirty="0"/>
           </a:p>
@@ -20469,7 +20889,7 @@
                 <a:ea typeface="Calibri" pitchFamily="34" charset="-122"/>
                 <a:cs typeface="Calibri" pitchFamily="34" charset="-120"/>
               </a:rPr>
-              <a:t>below, beneath</a:t>
+              <a:t>below or beneath</a:t>
             </a:r>
             <a:endParaRPr lang="en-US" sz="850" dirty="0"/>
           </a:p>
@@ -20542,7 +20962,7 @@
                 <a:ea typeface="Trebuchet MS" pitchFamily="34" charset="-122"/>
                 <a:cs typeface="Trebuchet MS" pitchFamily="34" charset="-120"/>
               </a:rPr>
-              <a:t>cover</a:t>
+              <a:t>ground</a:t>
             </a:r>
             <a:endParaRPr lang="en-US" sz="1300" dirty="0"/>
           </a:p>
@@ -20581,7 +21001,7 @@
                 <a:ea typeface="Calibri" pitchFamily="34" charset="-122"/>
                 <a:cs typeface="Calibri" pitchFamily="34" charset="-120"/>
               </a:rPr>
-              <a:t>to hide or conceal</a:t>
+              <a:t>the surface of the earth</a:t>
             </a:r>
             <a:endParaRPr lang="en-US" sz="850" dirty="0"/>
           </a:p>
@@ -20688,8 +21108,8 @@
         </p:nvSpPr>
         <p:spPr>
           <a:xfrm>
-            <a:off x="1975104" y="3364992"/>
-            <a:ext cx="1554480" cy="475488"/>
+            <a:off x="2313432" y="3364992"/>
+            <a:ext cx="1645920" cy="475488"/>
           </a:xfrm>
           <a:prstGeom prst="rect">
             <a:avLst>
@@ -20715,8 +21135,8 @@
         </p:nvSpPr>
         <p:spPr>
           <a:xfrm>
-            <a:off x="1975104" y="3364992"/>
-            <a:ext cx="1554480" cy="475488"/>
+            <a:off x="2313432" y="3364992"/>
+            <a:ext cx="1645920" cy="475488"/>
           </a:xfrm>
           <a:prstGeom prst="rect">
             <a:avLst/>
@@ -20754,8 +21174,8 @@
         </p:nvSpPr>
         <p:spPr>
           <a:xfrm>
-            <a:off x="3529584" y="3364992"/>
-            <a:ext cx="73152" cy="475488"/>
+            <a:off x="3959352" y="3364992"/>
+            <a:ext cx="411480" cy="475488"/>
           </a:xfrm>
           <a:prstGeom prst="rect">
             <a:avLst/>
@@ -20793,8 +21213,8 @@
         </p:nvSpPr>
         <p:spPr>
           <a:xfrm>
-            <a:off x="3602736" y="3364992"/>
-            <a:ext cx="1554480" cy="475488"/>
+            <a:off x="4370832" y="3364992"/>
+            <a:ext cx="1645920" cy="475488"/>
           </a:xfrm>
           <a:prstGeom prst="rect">
             <a:avLst>
@@ -20820,8 +21240,8 @@
         </p:nvSpPr>
         <p:spPr>
           <a:xfrm>
-            <a:off x="3602736" y="3364992"/>
-            <a:ext cx="1554480" cy="475488"/>
+            <a:off x="4370832" y="3364992"/>
+            <a:ext cx="1645920" cy="475488"/>
           </a:xfrm>
           <a:prstGeom prst="rect">
             <a:avLst/>
@@ -20859,8 +21279,8 @@
         </p:nvSpPr>
         <p:spPr>
           <a:xfrm>
-            <a:off x="5157216" y="3364992"/>
-            <a:ext cx="73152" cy="475488"/>
+            <a:off x="6016752" y="3364992"/>
+            <a:ext cx="411480" cy="475488"/>
           </a:xfrm>
           <a:prstGeom prst="rect">
             <a:avLst/>
@@ -20898,8 +21318,8 @@
         </p:nvSpPr>
         <p:spPr>
           <a:xfrm>
-            <a:off x="5230368" y="3364992"/>
-            <a:ext cx="1554480" cy="475488"/>
+            <a:off x="6428232" y="3364992"/>
+            <a:ext cx="1645920" cy="475488"/>
           </a:xfrm>
           <a:prstGeom prst="rect">
             <a:avLst>
@@ -20925,8 +21345,8 @@
         </p:nvSpPr>
         <p:spPr>
           <a:xfrm>
-            <a:off x="5230368" y="3364992"/>
-            <a:ext cx="1554480" cy="475488"/>
+            <a:off x="6428232" y="3364992"/>
+            <a:ext cx="1645920" cy="475488"/>
           </a:xfrm>
           <a:prstGeom prst="rect">
             <a:avLst/>
@@ -20950,7 +21370,7 @@
                 <a:ea typeface="Trebuchet MS" pitchFamily="34" charset="-122"/>
                 <a:cs typeface="Trebuchet MS" pitchFamily="34" charset="-120"/>
               </a:rPr>
-              <a:t>cov</a:t>
+              <a:t>ground</a:t>
             </a:r>
             <a:endParaRPr lang="en-US" sz="1400" dirty="0"/>
           </a:p>
@@ -20958,119 +21378,80 @@
       </p:sp>
       <p:sp>
         <p:nvSpPr>
-          <p:cNvPr id="33" name="Text 31"/>
-          <p:cNvSpPr/>
-          <p:nvPr/>
-        </p:nvSpPr>
-        <p:spPr>
-          <a:xfrm>
-            <a:off x="6784848" y="3364992"/>
-            <a:ext cx="73152" cy="475488"/>
-          </a:xfrm>
-          <a:prstGeom prst="rect">
-            <a:avLst/>
-          </a:prstGeom>
-          <a:noFill/>
-          <a:ln/>
-        </p:spPr>
-        <p:txBody>
-          <a:bodyPr wrap="square" lIns="0" tIns="0" rIns="0" bIns="0" rtlCol="0" anchor="ctr"/>
-          <a:lstStyle/>
-          <a:p>
-            <a:pPr algn="ctr" indent="0" marL="0">
-              <a:buNone/>
-            </a:pPr>
-            <a:r>
-              <a:rPr lang="en-US" sz="1600" b="1" dirty="0">
-                <a:solidFill>
-                  <a:srgbClr val="0D9488"/>
+          <p:cNvPr id="33" name="Shape 31"/>
+          <p:cNvSpPr/>
+          <p:nvPr/>
+        </p:nvSpPr>
+        <p:spPr>
+          <a:xfrm>
+            <a:off x="365760" y="4096512"/>
+            <a:ext cx="1371600" cy="804672"/>
+          </a:xfrm>
+          <a:prstGeom prst="rect">
+            <a:avLst>
+              <a:gd name="adj" fmla="val 6818"/>
+            </a:avLst>
+          </a:prstGeom>
+          <a:solidFill>
+            <a:srgbClr val="E2E8F0"/>
+          </a:solidFill>
+          <a:ln w="12700">
+            <a:solidFill>
+              <a:srgbClr val="E2E8F0"/>
+            </a:solidFill>
+            <a:prstDash val="solid"/>
+          </a:ln>
+        </p:spPr>
+      </p:sp>
+      <p:sp>
+        <p:nvSpPr>
+          <p:cNvPr id="34" name="Text 32"/>
+          <p:cNvSpPr/>
+          <p:nvPr/>
+        </p:nvSpPr>
+        <p:spPr>
+          <a:xfrm>
+            <a:off x="365760" y="4096512"/>
+            <a:ext cx="1371600" cy="804672"/>
+          </a:xfrm>
+          <a:prstGeom prst="rect">
+            <a:avLst/>
+          </a:prstGeom>
+          <a:noFill/>
+          <a:ln/>
+        </p:spPr>
+        <p:txBody>
+          <a:bodyPr wrap="square" lIns="0" tIns="0" rIns="0" bIns="0" rtlCol="0" anchor="ctr"/>
+          <a:lstStyle/>
+          <a:p>
+            <a:pPr algn="ctr" indent="0" marL="0">
+              <a:buNone/>
+            </a:pPr>
+            <a:r>
+              <a:rPr lang="en-US" sz="1100" b="1" dirty="0">
+                <a:solidFill>
+                  <a:srgbClr val="475569"/>
                 </a:solidFill>
                 <a:latin typeface="Trebuchet MS" pitchFamily="34" charset="0"/>
                 <a:ea typeface="Trebuchet MS" pitchFamily="34" charset="-122"/>
                 <a:cs typeface="Trebuchet MS" pitchFamily="34" charset="-120"/>
               </a:rPr>
-              <a:t>·</a:t>
-            </a:r>
-            <a:endParaRPr lang="en-US" sz="1600" dirty="0"/>
-          </a:p>
-        </p:txBody>
-      </p:sp>
-      <p:sp>
-        <p:nvSpPr>
-          <p:cNvPr id="34" name="Shape 32"/>
-          <p:cNvSpPr/>
-          <p:nvPr/>
-        </p:nvSpPr>
-        <p:spPr>
-          <a:xfrm>
-            <a:off x="6858000" y="3364992"/>
-            <a:ext cx="1554480" cy="475488"/>
-          </a:xfrm>
-          <a:prstGeom prst="rect">
-            <a:avLst>
-              <a:gd name="adj" fmla="val 9615"/>
-            </a:avLst>
-          </a:prstGeom>
-          <a:solidFill>
-            <a:srgbClr val="FFFFFF"/>
-          </a:solidFill>
-          <a:ln w="12700">
-            <a:solidFill>
-              <a:srgbClr val="0D9488"/>
-            </a:solidFill>
-            <a:prstDash val="solid"/>
-          </a:ln>
-        </p:spPr>
-      </p:sp>
-      <p:sp>
-        <p:nvSpPr>
-          <p:cNvPr id="35" name="Text 33"/>
-          <p:cNvSpPr/>
-          <p:nvPr/>
-        </p:nvSpPr>
-        <p:spPr>
-          <a:xfrm>
-            <a:off x="6858000" y="3364992"/>
-            <a:ext cx="1554480" cy="475488"/>
-          </a:xfrm>
-          <a:prstGeom prst="rect">
-            <a:avLst/>
-          </a:prstGeom>
-          <a:noFill/>
-          <a:ln/>
-        </p:spPr>
-        <p:txBody>
-          <a:bodyPr wrap="square" lIns="0" tIns="0" rIns="0" bIns="0" rtlCol="0" anchor="ctr"/>
-          <a:lstStyle/>
-          <a:p>
-            <a:pPr algn="ctr" indent="0" marL="0">
-              <a:buNone/>
-            </a:pPr>
-            <a:r>
-              <a:rPr lang="en-US" sz="1400" b="1" dirty="0">
-                <a:solidFill>
-                  <a:srgbClr val="0D9488"/>
-                </a:solidFill>
-                <a:latin typeface="Trebuchet MS" pitchFamily="34" charset="0"/>
-                <a:ea typeface="Trebuchet MS" pitchFamily="34" charset="-122"/>
-                <a:cs typeface="Trebuchet MS" pitchFamily="34" charset="-120"/>
-              </a:rPr>
-              <a:t>er</a:t>
-            </a:r>
-            <a:endParaRPr lang="en-US" sz="1400" dirty="0"/>
-          </a:p>
-        </p:txBody>
-      </p:sp>
-      <p:sp>
-        <p:nvSpPr>
-          <p:cNvPr id="36" name="Shape 34"/>
-          <p:cNvSpPr/>
-          <p:nvPr/>
-        </p:nvSpPr>
-        <p:spPr>
-          <a:xfrm>
-            <a:off x="365760" y="4096512"/>
-            <a:ext cx="1371600" cy="804672"/>
+              <a:t>Phonemes</a:t>
+            </a:r>
+            <a:endParaRPr lang="en-US" sz="1100" dirty="0"/>
+          </a:p>
+        </p:txBody>
+      </p:sp>
+      <p:sp>
+        <p:nvSpPr>
+          <p:cNvPr id="35" name="Shape 33"/>
+          <p:cNvSpPr/>
+          <p:nvPr/>
+        </p:nvSpPr>
+        <p:spPr>
+          <a:xfrm>
+            <a:off x="1874520" y="4096512"/>
+            <a:ext cx="6903720" cy="804672"/>
           </a:xfrm>
           <a:prstGeom prst="rect">
             <a:avLst>
@@ -21078,85 +21459,19 @@
             </a:avLst>
           </a:prstGeom>
           <a:solidFill>
-            <a:srgbClr val="E2E8F0"/>
+            <a:srgbClr val="F8FAFC"/>
           </a:solidFill>
           <a:ln w="12700">
             <a:solidFill>
               <a:srgbClr val="E2E8F0"/>
             </a:solidFill>
-            <a:prstDash val="solid"/>
-          </a:ln>
-        </p:spPr>
-      </p:sp>
-      <p:sp>
-        <p:nvSpPr>
-          <p:cNvPr id="37" name="Text 35"/>
-          <p:cNvSpPr/>
-          <p:nvPr/>
-        </p:nvSpPr>
-        <p:spPr>
-          <a:xfrm>
-            <a:off x="365760" y="4096512"/>
-            <a:ext cx="1371600" cy="804672"/>
-          </a:xfrm>
-          <a:prstGeom prst="rect">
-            <a:avLst/>
-          </a:prstGeom>
-          <a:noFill/>
-          <a:ln/>
-        </p:spPr>
-        <p:txBody>
-          <a:bodyPr wrap="square" lIns="0" tIns="0" rIns="0" bIns="0" rtlCol="0" anchor="ctr"/>
-          <a:lstStyle/>
-          <a:p>
-            <a:pPr algn="ctr" indent="0" marL="0">
-              <a:buNone/>
-            </a:pPr>
-            <a:r>
-              <a:rPr lang="en-US" sz="1100" b="1" dirty="0">
-                <a:solidFill>
-                  <a:srgbClr val="475569"/>
-                </a:solidFill>
-                <a:latin typeface="Trebuchet MS" pitchFamily="34" charset="0"/>
-                <a:ea typeface="Trebuchet MS" pitchFamily="34" charset="-122"/>
-                <a:cs typeface="Trebuchet MS" pitchFamily="34" charset="-120"/>
-              </a:rPr>
-              <a:t>Phonemes</a:t>
-            </a:r>
-            <a:endParaRPr lang="en-US" sz="1100" dirty="0"/>
-          </a:p>
-        </p:txBody>
-      </p:sp>
-      <p:sp>
-        <p:nvSpPr>
-          <p:cNvPr id="38" name="Shape 36"/>
-          <p:cNvSpPr/>
-          <p:nvPr/>
-        </p:nvSpPr>
-        <p:spPr>
-          <a:xfrm>
-            <a:off x="1874520" y="4096512"/>
-            <a:ext cx="6903720" cy="804672"/>
-          </a:xfrm>
-          <a:prstGeom prst="rect">
-            <a:avLst>
-              <a:gd name="adj" fmla="val 6818"/>
-            </a:avLst>
-          </a:prstGeom>
-          <a:solidFill>
-            <a:srgbClr val="F8FAFC"/>
-          </a:solidFill>
-          <a:ln w="12700">
-            <a:solidFill>
-              <a:srgbClr val="E2E8F0"/>
-            </a:solidFill>
             <a:prstDash val="dash"/>
           </a:ln>
         </p:spPr>
       </p:sp>
       <p:sp>
         <p:nvSpPr>
-          <p:cNvPr id="39" name="Text 37"/>
+          <p:cNvPr id="36" name="Text 34"/>
           <p:cNvSpPr/>
           <p:nvPr/>
         </p:nvSpPr>
@@ -21618,7 +21933,7 @@
                 <a:ea typeface="Trebuchet MS" pitchFamily="34" charset="-122"/>
                 <a:cs typeface="Trebuchet MS" pitchFamily="34" charset="-120"/>
               </a:rPr>
-              <a:t>undercover</a:t>
+              <a:t>underground</a:t>
             </a:r>
             <a:endParaRPr lang="en-US" sz="2800" dirty="0"/>
           </a:p>
@@ -21796,7 +22111,7 @@
                 <a:ea typeface="Calibri" pitchFamily="34" charset="-122"/>
                 <a:cs typeface="Calibri" pitchFamily="34" charset="-120"/>
               </a:rPr>
-              <a:t>below, beneath</a:t>
+              <a:t>below or beneath</a:t>
             </a:r>
             <a:endParaRPr lang="en-US" sz="850" dirty="0"/>
           </a:p>
@@ -21869,7 +22184,7 @@
                 <a:ea typeface="Trebuchet MS" pitchFamily="34" charset="-122"/>
                 <a:cs typeface="Trebuchet MS" pitchFamily="34" charset="-120"/>
               </a:rPr>
-              <a:t>cover</a:t>
+              <a:t>ground</a:t>
             </a:r>
             <a:endParaRPr lang="en-US" sz="1300" dirty="0"/>
           </a:p>
@@ -21908,7 +22223,7 @@
                 <a:ea typeface="Calibri" pitchFamily="34" charset="-122"/>
                 <a:cs typeface="Calibri" pitchFamily="34" charset="-120"/>
               </a:rPr>
-              <a:t>to hide or conceal</a:t>
+              <a:t>the surface of the earth</a:t>
             </a:r>
             <a:endParaRPr lang="en-US" sz="850" dirty="0"/>
           </a:p>
@@ -22015,8 +22330,8 @@
         </p:nvSpPr>
         <p:spPr>
           <a:xfrm>
-            <a:off x="1975104" y="3364992"/>
-            <a:ext cx="1554480" cy="475488"/>
+            <a:off x="2313432" y="3364992"/>
+            <a:ext cx="1645920" cy="475488"/>
           </a:xfrm>
           <a:prstGeom prst="rect">
             <a:avLst>
@@ -22042,8 +22357,8 @@
         </p:nvSpPr>
         <p:spPr>
           <a:xfrm>
-            <a:off x="1975104" y="3364992"/>
-            <a:ext cx="1554480" cy="475488"/>
+            <a:off x="2313432" y="3364992"/>
+            <a:ext cx="1645920" cy="475488"/>
           </a:xfrm>
           <a:prstGeom prst="rect">
             <a:avLst/>
@@ -22081,8 +22396,8 @@
         </p:nvSpPr>
         <p:spPr>
           <a:xfrm>
-            <a:off x="3529584" y="3364992"/>
-            <a:ext cx="73152" cy="475488"/>
+            <a:off x="3959352" y="3364992"/>
+            <a:ext cx="411480" cy="475488"/>
           </a:xfrm>
           <a:prstGeom prst="rect">
             <a:avLst/>
@@ -22120,8 +22435,8 @@
         </p:nvSpPr>
         <p:spPr>
           <a:xfrm>
-            <a:off x="3602736" y="3364992"/>
-            <a:ext cx="1554480" cy="475488"/>
+            <a:off x="4370832" y="3364992"/>
+            <a:ext cx="1645920" cy="475488"/>
           </a:xfrm>
           <a:prstGeom prst="rect">
             <a:avLst>
@@ -22147,8 +22462,8 @@
         </p:nvSpPr>
         <p:spPr>
           <a:xfrm>
-            <a:off x="3602736" y="3364992"/>
-            <a:ext cx="1554480" cy="475488"/>
+            <a:off x="4370832" y="3364992"/>
+            <a:ext cx="1645920" cy="475488"/>
           </a:xfrm>
           <a:prstGeom prst="rect">
             <a:avLst/>
@@ -22186,8 +22501,8 @@
         </p:nvSpPr>
         <p:spPr>
           <a:xfrm>
-            <a:off x="5157216" y="3364992"/>
-            <a:ext cx="73152" cy="475488"/>
+            <a:off x="6016752" y="3364992"/>
+            <a:ext cx="411480" cy="475488"/>
           </a:xfrm>
           <a:prstGeom prst="rect">
             <a:avLst/>
@@ -22225,8 +22540,8 @@
         </p:nvSpPr>
         <p:spPr>
           <a:xfrm>
-            <a:off x="5230368" y="3364992"/>
-            <a:ext cx="1554480" cy="475488"/>
+            <a:off x="6428232" y="3364992"/>
+            <a:ext cx="1645920" cy="475488"/>
           </a:xfrm>
           <a:prstGeom prst="rect">
             <a:avLst>
@@ -22252,8 +22567,8 @@
         </p:nvSpPr>
         <p:spPr>
           <a:xfrm>
-            <a:off x="5230368" y="3364992"/>
-            <a:ext cx="1554480" cy="475488"/>
+            <a:off x="6428232" y="3364992"/>
+            <a:ext cx="1645920" cy="475488"/>
           </a:xfrm>
           <a:prstGeom prst="rect">
             <a:avLst/>
@@ -22277,7 +22592,7 @@
                 <a:ea typeface="Trebuchet MS" pitchFamily="34" charset="-122"/>
                 <a:cs typeface="Trebuchet MS" pitchFamily="34" charset="-120"/>
               </a:rPr>
-              <a:t>cov</a:t>
+              <a:t>ground</a:t>
             </a:r>
             <a:endParaRPr lang="en-US" sz="1400" dirty="0"/>
           </a:p>
@@ -22285,193 +22600,247 @@
       </p:sp>
       <p:sp>
         <p:nvSpPr>
-          <p:cNvPr id="33" name="Text 31"/>
-          <p:cNvSpPr/>
-          <p:nvPr/>
-        </p:nvSpPr>
-        <p:spPr>
-          <a:xfrm>
-            <a:off x="6784848" y="3364992"/>
-            <a:ext cx="73152" cy="475488"/>
-          </a:xfrm>
-          <a:prstGeom prst="rect">
-            <a:avLst/>
-          </a:prstGeom>
-          <a:noFill/>
-          <a:ln/>
-        </p:spPr>
-        <p:txBody>
-          <a:bodyPr wrap="square" lIns="0" tIns="0" rIns="0" bIns="0" rtlCol="0" anchor="ctr"/>
-          <a:lstStyle/>
-          <a:p>
-            <a:pPr algn="ctr" indent="0" marL="0">
-              <a:buNone/>
-            </a:pPr>
-            <a:r>
-              <a:rPr lang="en-US" sz="1600" b="1" dirty="0">
-                <a:solidFill>
-                  <a:srgbClr val="0D9488"/>
+          <p:cNvPr id="33" name="Shape 31"/>
+          <p:cNvSpPr/>
+          <p:nvPr/>
+        </p:nvSpPr>
+        <p:spPr>
+          <a:xfrm>
+            <a:off x="365760" y="4096512"/>
+            <a:ext cx="1371600" cy="804672"/>
+          </a:xfrm>
+          <a:prstGeom prst="rect">
+            <a:avLst>
+              <a:gd name="adj" fmla="val 6818"/>
+            </a:avLst>
+          </a:prstGeom>
+          <a:solidFill>
+            <a:srgbClr val="E2E8F0"/>
+          </a:solidFill>
+          <a:ln w="12700">
+            <a:solidFill>
+              <a:srgbClr val="E2E8F0"/>
+            </a:solidFill>
+            <a:prstDash val="solid"/>
+          </a:ln>
+        </p:spPr>
+      </p:sp>
+      <p:sp>
+        <p:nvSpPr>
+          <p:cNvPr id="34" name="Text 32"/>
+          <p:cNvSpPr/>
+          <p:nvPr/>
+        </p:nvSpPr>
+        <p:spPr>
+          <a:xfrm>
+            <a:off x="365760" y="4096512"/>
+            <a:ext cx="1371600" cy="804672"/>
+          </a:xfrm>
+          <a:prstGeom prst="rect">
+            <a:avLst/>
+          </a:prstGeom>
+          <a:noFill/>
+          <a:ln/>
+        </p:spPr>
+        <p:txBody>
+          <a:bodyPr wrap="square" lIns="0" tIns="0" rIns="0" bIns="0" rtlCol="0" anchor="ctr"/>
+          <a:lstStyle/>
+          <a:p>
+            <a:pPr algn="ctr" indent="0" marL="0">
+              <a:buNone/>
+            </a:pPr>
+            <a:r>
+              <a:rPr lang="en-US" sz="1100" b="1" dirty="0">
+                <a:solidFill>
+                  <a:srgbClr val="475569"/>
                 </a:solidFill>
                 <a:latin typeface="Trebuchet MS" pitchFamily="34" charset="0"/>
                 <a:ea typeface="Trebuchet MS" pitchFamily="34" charset="-122"/>
                 <a:cs typeface="Trebuchet MS" pitchFamily="34" charset="-120"/>
               </a:rPr>
-              <a:t>·</a:t>
-            </a:r>
-            <a:endParaRPr lang="en-US" sz="1600" dirty="0"/>
-          </a:p>
-        </p:txBody>
-      </p:sp>
-      <p:sp>
-        <p:nvSpPr>
-          <p:cNvPr id="34" name="Shape 32"/>
-          <p:cNvSpPr/>
-          <p:nvPr/>
-        </p:nvSpPr>
-        <p:spPr>
-          <a:xfrm>
-            <a:off x="6858000" y="3364992"/>
-            <a:ext cx="1554480" cy="475488"/>
+              <a:t>Phonemes</a:t>
+            </a:r>
+            <a:endParaRPr lang="en-US" sz="1100" dirty="0"/>
+          </a:p>
+        </p:txBody>
+      </p:sp>
+      <p:sp>
+        <p:nvSpPr>
+          <p:cNvPr id="35" name="Shape 33"/>
+          <p:cNvSpPr/>
+          <p:nvPr/>
+        </p:nvSpPr>
+        <p:spPr>
+          <a:xfrm>
+            <a:off x="1874520" y="4096512"/>
+            <a:ext cx="6903720" cy="658368"/>
           </a:xfrm>
           <a:prstGeom prst="rect">
             <a:avLst>
-              <a:gd name="adj" fmla="val 9615"/>
+              <a:gd name="adj" fmla="val 8333"/>
             </a:avLst>
           </a:prstGeom>
           <a:solidFill>
+            <a:srgbClr val="FCE7F3"/>
+          </a:solidFill>
+          <a:ln w="12700">
+            <a:solidFill>
+              <a:srgbClr val="DB2777"/>
+            </a:solidFill>
+            <a:prstDash val="solid"/>
+          </a:ln>
+        </p:spPr>
+      </p:sp>
+      <p:sp>
+        <p:nvSpPr>
+          <p:cNvPr id="36" name="Shape 34"/>
+          <p:cNvSpPr/>
+          <p:nvPr/>
+        </p:nvSpPr>
+        <p:spPr>
+          <a:xfrm>
+            <a:off x="2023872" y="4169664"/>
+            <a:ext cx="685800" cy="475488"/>
+          </a:xfrm>
+          <a:prstGeom prst="rect">
+            <a:avLst>
+              <a:gd name="adj" fmla="val 7692"/>
+            </a:avLst>
+          </a:prstGeom>
+          <a:solidFill>
             <a:srgbClr val="FFFFFF"/>
           </a:solidFill>
           <a:ln w="12700">
             <a:solidFill>
-              <a:srgbClr val="0D9488"/>
-            </a:solidFill>
-            <a:prstDash val="solid"/>
-          </a:ln>
-        </p:spPr>
-      </p:sp>
-      <p:sp>
-        <p:nvSpPr>
-          <p:cNvPr id="35" name="Text 33"/>
-          <p:cNvSpPr/>
-          <p:nvPr/>
-        </p:nvSpPr>
-        <p:spPr>
-          <a:xfrm>
-            <a:off x="6858000" y="3364992"/>
-            <a:ext cx="1554480" cy="475488"/>
-          </a:xfrm>
-          <a:prstGeom prst="rect">
-            <a:avLst/>
-          </a:prstGeom>
-          <a:noFill/>
-          <a:ln/>
-        </p:spPr>
-        <p:txBody>
-          <a:bodyPr wrap="square" lIns="0" tIns="0" rIns="0" bIns="0" rtlCol="0" anchor="ctr"/>
-          <a:lstStyle/>
-          <a:p>
-            <a:pPr algn="ctr" indent="0" marL="0">
-              <a:buNone/>
-            </a:pPr>
-            <a:r>
-              <a:rPr lang="en-US" sz="1400" b="1" dirty="0">
-                <a:solidFill>
-                  <a:srgbClr val="0D9488"/>
+              <a:srgbClr val="DB2777"/>
+            </a:solidFill>
+            <a:prstDash val="solid"/>
+          </a:ln>
+        </p:spPr>
+      </p:sp>
+      <p:sp>
+        <p:nvSpPr>
+          <p:cNvPr id="37" name="Text 35"/>
+          <p:cNvSpPr/>
+          <p:nvPr/>
+        </p:nvSpPr>
+        <p:spPr>
+          <a:xfrm>
+            <a:off x="2023872" y="4169664"/>
+            <a:ext cx="685800" cy="475488"/>
+          </a:xfrm>
+          <a:prstGeom prst="rect">
+            <a:avLst/>
+          </a:prstGeom>
+          <a:noFill/>
+          <a:ln/>
+        </p:spPr>
+        <p:txBody>
+          <a:bodyPr wrap="square" lIns="0" tIns="0" rIns="0" bIns="0" rtlCol="0" anchor="ctr"/>
+          <a:lstStyle/>
+          <a:p>
+            <a:pPr algn="ctr" indent="0" marL="0">
+              <a:buNone/>
+            </a:pPr>
+            <a:r>
+              <a:rPr lang="en-US" sz="900" b="1" dirty="0">
+                <a:solidFill>
+                  <a:srgbClr val="9D174D"/>
                 </a:solidFill>
                 <a:latin typeface="Trebuchet MS" pitchFamily="34" charset="0"/>
                 <a:ea typeface="Trebuchet MS" pitchFamily="34" charset="-122"/>
                 <a:cs typeface="Trebuchet MS" pitchFamily="34" charset="-120"/>
               </a:rPr>
-              <a:t>er</a:t>
-            </a:r>
-            <a:endParaRPr lang="en-US" sz="1400" dirty="0"/>
-          </a:p>
-        </p:txBody>
-      </p:sp>
-      <p:sp>
-        <p:nvSpPr>
-          <p:cNvPr id="36" name="Shape 34"/>
-          <p:cNvSpPr/>
-          <p:nvPr/>
-        </p:nvSpPr>
-        <p:spPr>
-          <a:xfrm>
-            <a:off x="365760" y="4096512"/>
-            <a:ext cx="1371600" cy="804672"/>
+              <a:t>u</a:t>
+            </a:r>
+            <a:endParaRPr lang="en-US" sz="900" dirty="0"/>
+          </a:p>
+        </p:txBody>
+      </p:sp>
+      <p:sp>
+        <p:nvSpPr>
+          <p:cNvPr id="38" name="Shape 36"/>
+          <p:cNvSpPr/>
+          <p:nvPr/>
+        </p:nvSpPr>
+        <p:spPr>
+          <a:xfrm>
+            <a:off x="2831592" y="4169664"/>
+            <a:ext cx="685800" cy="475488"/>
           </a:xfrm>
           <a:prstGeom prst="rect">
             <a:avLst>
-              <a:gd name="adj" fmla="val 6818"/>
+              <a:gd name="adj" fmla="val 7692"/>
             </a:avLst>
           </a:prstGeom>
           <a:solidFill>
-            <a:srgbClr val="E2E8F0"/>
-          </a:solidFill>
-          <a:ln w="12700">
-            <a:solidFill>
-              <a:srgbClr val="E2E8F0"/>
-            </a:solidFill>
-            <a:prstDash val="solid"/>
-          </a:ln>
-        </p:spPr>
-      </p:sp>
-      <p:sp>
-        <p:nvSpPr>
-          <p:cNvPr id="37" name="Text 35"/>
-          <p:cNvSpPr/>
-          <p:nvPr/>
-        </p:nvSpPr>
-        <p:spPr>
-          <a:xfrm>
-            <a:off x="365760" y="4096512"/>
-            <a:ext cx="1371600" cy="804672"/>
-          </a:xfrm>
-          <a:prstGeom prst="rect">
-            <a:avLst/>
-          </a:prstGeom>
-          <a:noFill/>
-          <a:ln/>
-        </p:spPr>
-        <p:txBody>
-          <a:bodyPr wrap="square" lIns="0" tIns="0" rIns="0" bIns="0" rtlCol="0" anchor="ctr"/>
-          <a:lstStyle/>
-          <a:p>
-            <a:pPr algn="ctr" indent="0" marL="0">
-              <a:buNone/>
-            </a:pPr>
-            <a:r>
-              <a:rPr lang="en-US" sz="1100" b="1" dirty="0">
-                <a:solidFill>
-                  <a:srgbClr val="475569"/>
+            <a:srgbClr val="FFFFFF"/>
+          </a:solidFill>
+          <a:ln w="12700">
+            <a:solidFill>
+              <a:srgbClr val="DB2777"/>
+            </a:solidFill>
+            <a:prstDash val="solid"/>
+          </a:ln>
+        </p:spPr>
+      </p:sp>
+      <p:sp>
+        <p:nvSpPr>
+          <p:cNvPr id="39" name="Text 37"/>
+          <p:cNvSpPr/>
+          <p:nvPr/>
+        </p:nvSpPr>
+        <p:spPr>
+          <a:xfrm>
+            <a:off x="2831592" y="4169664"/>
+            <a:ext cx="685800" cy="475488"/>
+          </a:xfrm>
+          <a:prstGeom prst="rect">
+            <a:avLst/>
+          </a:prstGeom>
+          <a:noFill/>
+          <a:ln/>
+        </p:spPr>
+        <p:txBody>
+          <a:bodyPr wrap="square" lIns="0" tIns="0" rIns="0" bIns="0" rtlCol="0" anchor="ctr"/>
+          <a:lstStyle/>
+          <a:p>
+            <a:pPr algn="ctr" indent="0" marL="0">
+              <a:buNone/>
+            </a:pPr>
+            <a:r>
+              <a:rPr lang="en-US" sz="900" b="1" dirty="0">
+                <a:solidFill>
+                  <a:srgbClr val="9D174D"/>
                 </a:solidFill>
                 <a:latin typeface="Trebuchet MS" pitchFamily="34" charset="0"/>
                 <a:ea typeface="Trebuchet MS" pitchFamily="34" charset="-122"/>
                 <a:cs typeface="Trebuchet MS" pitchFamily="34" charset="-120"/>
               </a:rPr>
-              <a:t>Phonemes</a:t>
-            </a:r>
-            <a:endParaRPr lang="en-US" sz="1100" dirty="0"/>
-          </a:p>
-        </p:txBody>
-      </p:sp>
-      <p:sp>
-        <p:nvSpPr>
-          <p:cNvPr id="38" name="Shape 36"/>
-          <p:cNvSpPr/>
-          <p:nvPr/>
-        </p:nvSpPr>
-        <p:spPr>
-          <a:xfrm>
-            <a:off x="1874520" y="4096512"/>
-            <a:ext cx="6903720" cy="804672"/>
+              <a:t>n</a:t>
+            </a:r>
+            <a:endParaRPr lang="en-US" sz="900" dirty="0"/>
+          </a:p>
+        </p:txBody>
+      </p:sp>
+      <p:sp>
+        <p:nvSpPr>
+          <p:cNvPr id="40" name="Shape 38"/>
+          <p:cNvSpPr/>
+          <p:nvPr/>
+        </p:nvSpPr>
+        <p:spPr>
+          <a:xfrm>
+            <a:off x="3639312" y="4169664"/>
+            <a:ext cx="685800" cy="475488"/>
           </a:xfrm>
           <a:prstGeom prst="rect">
             <a:avLst>
-              <a:gd name="adj" fmla="val 6818"/>
+              <a:gd name="adj" fmla="val 7692"/>
             </a:avLst>
           </a:prstGeom>
           <a:solidFill>
-            <a:srgbClr val="FCE7F3"/>
+            <a:srgbClr val="FFFFFF"/>
           </a:solidFill>
           <a:ln w="12700">
             <a:solidFill>
@@ -22483,41 +22852,14 @@
       </p:sp>
       <p:sp>
         <p:nvSpPr>
-          <p:cNvPr id="39" name="Shape 37"/>
-          <p:cNvSpPr/>
-          <p:nvPr/>
-        </p:nvSpPr>
-        <p:spPr>
-          <a:xfrm>
-            <a:off x="2023872" y="4169664"/>
-            <a:ext cx="685800" cy="384048"/>
-          </a:xfrm>
-          <a:prstGeom prst="rect">
-            <a:avLst>
-              <a:gd name="adj" fmla="val 9524"/>
-            </a:avLst>
-          </a:prstGeom>
-          <a:solidFill>
-            <a:srgbClr val="FFFFFF"/>
-          </a:solidFill>
-          <a:ln w="12700">
-            <a:solidFill>
-              <a:srgbClr val="DB2777"/>
-            </a:solidFill>
-            <a:prstDash val="solid"/>
-          </a:ln>
-        </p:spPr>
-      </p:sp>
-      <p:sp>
-        <p:nvSpPr>
-          <p:cNvPr id="40" name="Text 38"/>
-          <p:cNvSpPr/>
-          <p:nvPr/>
-        </p:nvSpPr>
-        <p:spPr>
-          <a:xfrm>
-            <a:off x="2023872" y="4169664"/>
-            <a:ext cx="685800" cy="384048"/>
+          <p:cNvPr id="41" name="Text 39"/>
+          <p:cNvSpPr/>
+          <p:nvPr/>
+        </p:nvSpPr>
+        <p:spPr>
+          <a:xfrm>
+            <a:off x="3639312" y="4169664"/>
+            <a:ext cx="685800" cy="475488"/>
           </a:xfrm>
           <a:prstGeom prst="rect">
             <a:avLst/>
@@ -22541,7 +22883,7 @@
                 <a:ea typeface="Trebuchet MS" pitchFamily="34" charset="-122"/>
                 <a:cs typeface="Trebuchet MS" pitchFamily="34" charset="-120"/>
               </a:rPr>
-              <a:t>u</a:t>
+              <a:t>d</a:t>
             </a:r>
             <a:endParaRPr lang="en-US" sz="900" dirty="0"/>
           </a:p>
@@ -22549,18 +22891,18 @@
       </p:sp>
       <p:sp>
         <p:nvSpPr>
-          <p:cNvPr id="41" name="Shape 39"/>
-          <p:cNvSpPr/>
-          <p:nvPr/>
-        </p:nvSpPr>
-        <p:spPr>
-          <a:xfrm>
-            <a:off x="2831592" y="4169664"/>
-            <a:ext cx="685800" cy="384048"/>
+          <p:cNvPr id="42" name="Shape 40"/>
+          <p:cNvSpPr/>
+          <p:nvPr/>
+        </p:nvSpPr>
+        <p:spPr>
+          <a:xfrm>
+            <a:off x="4447032" y="4169664"/>
+            <a:ext cx="685800" cy="475488"/>
           </a:xfrm>
           <a:prstGeom prst="rect">
             <a:avLst>
-              <a:gd name="adj" fmla="val 9524"/>
+              <a:gd name="adj" fmla="val 7692"/>
             </a:avLst>
           </a:prstGeom>
           <a:solidFill>
@@ -22576,14 +22918,14 @@
       </p:sp>
       <p:sp>
         <p:nvSpPr>
-          <p:cNvPr id="42" name="Text 40"/>
-          <p:cNvSpPr/>
-          <p:nvPr/>
-        </p:nvSpPr>
-        <p:spPr>
-          <a:xfrm>
-            <a:off x="2831592" y="4169664"/>
-            <a:ext cx="685800" cy="384048"/>
+          <p:cNvPr id="43" name="Text 41"/>
+          <p:cNvSpPr/>
+          <p:nvPr/>
+        </p:nvSpPr>
+        <p:spPr>
+          <a:xfrm>
+            <a:off x="4447032" y="4169664"/>
+            <a:ext cx="685800" cy="475488"/>
           </a:xfrm>
           <a:prstGeom prst="rect">
             <a:avLst/>
@@ -22607,7 +22949,7 @@
                 <a:ea typeface="Trebuchet MS" pitchFamily="34" charset="-122"/>
                 <a:cs typeface="Trebuchet MS" pitchFamily="34" charset="-120"/>
               </a:rPr>
-              <a:t>n</a:t>
+              <a:t>er</a:t>
             </a:r>
             <a:endParaRPr lang="en-US" sz="900" dirty="0"/>
           </a:p>
@@ -22615,18 +22957,18 @@
       </p:sp>
       <p:sp>
         <p:nvSpPr>
-          <p:cNvPr id="43" name="Shape 41"/>
-          <p:cNvSpPr/>
-          <p:nvPr/>
-        </p:nvSpPr>
-        <p:spPr>
-          <a:xfrm>
-            <a:off x="3639312" y="4169664"/>
-            <a:ext cx="685800" cy="384048"/>
+          <p:cNvPr id="44" name="Shape 42"/>
+          <p:cNvSpPr/>
+          <p:nvPr/>
+        </p:nvSpPr>
+        <p:spPr>
+          <a:xfrm>
+            <a:off x="5254752" y="4169664"/>
+            <a:ext cx="685800" cy="475488"/>
           </a:xfrm>
           <a:prstGeom prst="rect">
             <a:avLst>
-              <a:gd name="adj" fmla="val 9524"/>
+              <a:gd name="adj" fmla="val 7692"/>
             </a:avLst>
           </a:prstGeom>
           <a:solidFill>
@@ -22642,14 +22984,14 @@
       </p:sp>
       <p:sp>
         <p:nvSpPr>
-          <p:cNvPr id="44" name="Text 42"/>
-          <p:cNvSpPr/>
-          <p:nvPr/>
-        </p:nvSpPr>
-        <p:spPr>
-          <a:xfrm>
-            <a:off x="3639312" y="4169664"/>
-            <a:ext cx="685800" cy="384048"/>
+          <p:cNvPr id="45" name="Text 43"/>
+          <p:cNvSpPr/>
+          <p:nvPr/>
+        </p:nvSpPr>
+        <p:spPr>
+          <a:xfrm>
+            <a:off x="5254752" y="4169664"/>
+            <a:ext cx="685800" cy="475488"/>
           </a:xfrm>
           <a:prstGeom prst="rect">
             <a:avLst/>
@@ -22673,7 +23015,7 @@
                 <a:ea typeface="Trebuchet MS" pitchFamily="34" charset="-122"/>
                 <a:cs typeface="Trebuchet MS" pitchFamily="34" charset="-120"/>
               </a:rPr>
-              <a:t>d</a:t>
+              <a:t>g</a:t>
             </a:r>
             <a:endParaRPr lang="en-US" sz="900" dirty="0"/>
           </a:p>
@@ -22681,18 +23023,18 @@
       </p:sp>
       <p:sp>
         <p:nvSpPr>
-          <p:cNvPr id="45" name="Shape 43"/>
-          <p:cNvSpPr/>
-          <p:nvPr/>
-        </p:nvSpPr>
-        <p:spPr>
-          <a:xfrm>
-            <a:off x="4447032" y="4169664"/>
-            <a:ext cx="685800" cy="384048"/>
+          <p:cNvPr id="46" name="Shape 44"/>
+          <p:cNvSpPr/>
+          <p:nvPr/>
+        </p:nvSpPr>
+        <p:spPr>
+          <a:xfrm>
+            <a:off x="6062472" y="4169664"/>
+            <a:ext cx="685800" cy="475488"/>
           </a:xfrm>
           <a:prstGeom prst="rect">
             <a:avLst>
-              <a:gd name="adj" fmla="val 9524"/>
+              <a:gd name="adj" fmla="val 7692"/>
             </a:avLst>
           </a:prstGeom>
           <a:solidFill>
@@ -22708,14 +23050,14 @@
       </p:sp>
       <p:sp>
         <p:nvSpPr>
-          <p:cNvPr id="46" name="Text 44"/>
-          <p:cNvSpPr/>
-          <p:nvPr/>
-        </p:nvSpPr>
-        <p:spPr>
-          <a:xfrm>
-            <a:off x="4447032" y="4169664"/>
-            <a:ext cx="685800" cy="384048"/>
+          <p:cNvPr id="47" name="Text 45"/>
+          <p:cNvSpPr/>
+          <p:nvPr/>
+        </p:nvSpPr>
+        <p:spPr>
+          <a:xfrm>
+            <a:off x="6062472" y="4169664"/>
+            <a:ext cx="685800" cy="475488"/>
           </a:xfrm>
           <a:prstGeom prst="rect">
             <a:avLst/>
@@ -22739,7 +23081,7 @@
                 <a:ea typeface="Trebuchet MS" pitchFamily="34" charset="-122"/>
                 <a:cs typeface="Trebuchet MS" pitchFamily="34" charset="-120"/>
               </a:rPr>
-              <a:t>er</a:t>
+              <a:t>r</a:t>
             </a:r>
             <a:endParaRPr lang="en-US" sz="900" dirty="0"/>
           </a:p>
@@ -22747,18 +23089,18 @@
       </p:sp>
       <p:sp>
         <p:nvSpPr>
-          <p:cNvPr id="47" name="Shape 45"/>
-          <p:cNvSpPr/>
-          <p:nvPr/>
-        </p:nvSpPr>
-        <p:spPr>
-          <a:xfrm>
-            <a:off x="5254752" y="4169664"/>
-            <a:ext cx="685800" cy="384048"/>
+          <p:cNvPr id="48" name="Shape 46"/>
+          <p:cNvSpPr/>
+          <p:nvPr/>
+        </p:nvSpPr>
+        <p:spPr>
+          <a:xfrm>
+            <a:off x="6870192" y="4169664"/>
+            <a:ext cx="685800" cy="475488"/>
           </a:xfrm>
           <a:prstGeom prst="rect">
             <a:avLst>
-              <a:gd name="adj" fmla="val 9524"/>
+              <a:gd name="adj" fmla="val 7692"/>
             </a:avLst>
           </a:prstGeom>
           <a:solidFill>
@@ -22774,14 +23116,14 @@
       </p:sp>
       <p:sp>
         <p:nvSpPr>
-          <p:cNvPr id="48" name="Text 46"/>
-          <p:cNvSpPr/>
-          <p:nvPr/>
-        </p:nvSpPr>
-        <p:spPr>
-          <a:xfrm>
-            <a:off x="5254752" y="4169664"/>
-            <a:ext cx="685800" cy="384048"/>
+          <p:cNvPr id="49" name="Text 47"/>
+          <p:cNvSpPr/>
+          <p:nvPr/>
+        </p:nvSpPr>
+        <p:spPr>
+          <a:xfrm>
+            <a:off x="6870192" y="4169664"/>
+            <a:ext cx="685800" cy="475488"/>
           </a:xfrm>
           <a:prstGeom prst="rect">
             <a:avLst/>
@@ -22805,7 +23147,7 @@
                 <a:ea typeface="Trebuchet MS" pitchFamily="34" charset="-122"/>
                 <a:cs typeface="Trebuchet MS" pitchFamily="34" charset="-120"/>
               </a:rPr>
-              <a:t>c</a:t>
+              <a:t>ou</a:t>
             </a:r>
             <a:endParaRPr lang="en-US" sz="900" dirty="0"/>
           </a:p>
@@ -22813,57 +23155,18 @@
       </p:sp>
       <p:sp>
         <p:nvSpPr>
-          <p:cNvPr id="49" name="Text 47"/>
-          <p:cNvSpPr/>
-          <p:nvPr/>
-        </p:nvSpPr>
-        <p:spPr>
-          <a:xfrm>
-            <a:off x="5254752" y="4572000"/>
-            <a:ext cx="685800" cy="219456"/>
-          </a:xfrm>
-          <a:prstGeom prst="rect">
-            <a:avLst/>
-          </a:prstGeom>
-          <a:noFill/>
-          <a:ln/>
-        </p:spPr>
-        <p:txBody>
-          <a:bodyPr wrap="square" lIns="0" tIns="0" rIns="0" bIns="0" rtlCol="0" anchor="t"/>
-          <a:lstStyle/>
-          <a:p>
-            <a:pPr algn="ctr" indent="0" marL="0">
-              <a:buNone/>
-            </a:pPr>
-            <a:r>
-              <a:rPr lang="en-US" sz="750" i="1" dirty="0">
-                <a:solidFill>
-                  <a:srgbClr val="94A3B8"/>
-                </a:solidFill>
-                <a:latin typeface="Calibri" pitchFamily="34" charset="0"/>
-                <a:ea typeface="Calibri" pitchFamily="34" charset="-122"/>
-                <a:cs typeface="Calibri" pitchFamily="34" charset="-120"/>
-              </a:rPr>
-              <a:t>/k/</a:t>
-            </a:r>
-            <a:endParaRPr lang="en-US" sz="750" dirty="0"/>
-          </a:p>
-        </p:txBody>
-      </p:sp>
-      <p:sp>
-        <p:nvSpPr>
           <p:cNvPr id="50" name="Shape 48"/>
           <p:cNvSpPr/>
           <p:nvPr/>
         </p:nvSpPr>
         <p:spPr>
           <a:xfrm>
-            <a:off x="6062472" y="4169664"/>
-            <a:ext cx="685800" cy="384048"/>
+            <a:off x="7677912" y="4169664"/>
+            <a:ext cx="685800" cy="475488"/>
           </a:xfrm>
           <a:prstGeom prst="rect">
             <a:avLst>
-              <a:gd name="adj" fmla="val 9524"/>
+              <a:gd name="adj" fmla="val 7692"/>
             </a:avLst>
           </a:prstGeom>
           <a:solidFill>
@@ -22885,8 +23188,8 @@
         </p:nvSpPr>
         <p:spPr>
           <a:xfrm>
-            <a:off x="6062472" y="4169664"/>
-            <a:ext cx="685800" cy="384048"/>
+            <a:off x="7677912" y="4169664"/>
+            <a:ext cx="685800" cy="475488"/>
           </a:xfrm>
           <a:prstGeom prst="rect">
             <a:avLst/>
@@ -22910,139 +23213,7 @@
                 <a:ea typeface="Trebuchet MS" pitchFamily="34" charset="-122"/>
                 <a:cs typeface="Trebuchet MS" pitchFamily="34" charset="-120"/>
               </a:rPr>
-              <a:t>o</a:t>
-            </a:r>
-            <a:endParaRPr lang="en-US" sz="900" dirty="0"/>
-          </a:p>
-        </p:txBody>
-      </p:sp>
-      <p:sp>
-        <p:nvSpPr>
-          <p:cNvPr id="52" name="Shape 50"/>
-          <p:cNvSpPr/>
-          <p:nvPr/>
-        </p:nvSpPr>
-        <p:spPr>
-          <a:xfrm>
-            <a:off x="6870192" y="4169664"/>
-            <a:ext cx="685800" cy="384048"/>
-          </a:xfrm>
-          <a:prstGeom prst="rect">
-            <a:avLst>
-              <a:gd name="adj" fmla="val 9524"/>
-            </a:avLst>
-          </a:prstGeom>
-          <a:solidFill>
-            <a:srgbClr val="FFFFFF"/>
-          </a:solidFill>
-          <a:ln w="12700">
-            <a:solidFill>
-              <a:srgbClr val="DB2777"/>
-            </a:solidFill>
-            <a:prstDash val="solid"/>
-          </a:ln>
-        </p:spPr>
-      </p:sp>
-      <p:sp>
-        <p:nvSpPr>
-          <p:cNvPr id="53" name="Text 51"/>
-          <p:cNvSpPr/>
-          <p:nvPr/>
-        </p:nvSpPr>
-        <p:spPr>
-          <a:xfrm>
-            <a:off x="6870192" y="4169664"/>
-            <a:ext cx="685800" cy="384048"/>
-          </a:xfrm>
-          <a:prstGeom prst="rect">
-            <a:avLst/>
-          </a:prstGeom>
-          <a:noFill/>
-          <a:ln/>
-        </p:spPr>
-        <p:txBody>
-          <a:bodyPr wrap="square" lIns="0" tIns="0" rIns="0" bIns="0" rtlCol="0" anchor="ctr"/>
-          <a:lstStyle/>
-          <a:p>
-            <a:pPr algn="ctr" indent="0" marL="0">
-              <a:buNone/>
-            </a:pPr>
-            <a:r>
-              <a:rPr lang="en-US" sz="900" b="1" dirty="0">
-                <a:solidFill>
-                  <a:srgbClr val="9D174D"/>
-                </a:solidFill>
-                <a:latin typeface="Trebuchet MS" pitchFamily="34" charset="0"/>
-                <a:ea typeface="Trebuchet MS" pitchFamily="34" charset="-122"/>
-                <a:cs typeface="Trebuchet MS" pitchFamily="34" charset="-120"/>
-              </a:rPr>
-              <a:t>v</a:t>
-            </a:r>
-            <a:endParaRPr lang="en-US" sz="900" dirty="0"/>
-          </a:p>
-        </p:txBody>
-      </p:sp>
-      <p:sp>
-        <p:nvSpPr>
-          <p:cNvPr id="54" name="Shape 52"/>
-          <p:cNvSpPr/>
-          <p:nvPr/>
-        </p:nvSpPr>
-        <p:spPr>
-          <a:xfrm>
-            <a:off x="7677912" y="4169664"/>
-            <a:ext cx="685800" cy="384048"/>
-          </a:xfrm>
-          <a:prstGeom prst="rect">
-            <a:avLst>
-              <a:gd name="adj" fmla="val 9524"/>
-            </a:avLst>
-          </a:prstGeom>
-          <a:solidFill>
-            <a:srgbClr val="FFFFFF"/>
-          </a:solidFill>
-          <a:ln w="12700">
-            <a:solidFill>
-              <a:srgbClr val="DB2777"/>
-            </a:solidFill>
-            <a:prstDash val="solid"/>
-          </a:ln>
-        </p:spPr>
-      </p:sp>
-      <p:sp>
-        <p:nvSpPr>
-          <p:cNvPr id="55" name="Text 53"/>
-          <p:cNvSpPr/>
-          <p:nvPr/>
-        </p:nvSpPr>
-        <p:spPr>
-          <a:xfrm>
-            <a:off x="7677912" y="4169664"/>
-            <a:ext cx="685800" cy="384048"/>
-          </a:xfrm>
-          <a:prstGeom prst="rect">
-            <a:avLst/>
-          </a:prstGeom>
-          <a:noFill/>
-          <a:ln/>
-        </p:spPr>
-        <p:txBody>
-          <a:bodyPr wrap="square" lIns="0" tIns="0" rIns="0" bIns="0" rtlCol="0" anchor="ctr"/>
-          <a:lstStyle/>
-          <a:p>
-            <a:pPr algn="ctr" indent="0" marL="0">
-              <a:buNone/>
-            </a:pPr>
-            <a:r>
-              <a:rPr lang="en-US" sz="900" b="1" dirty="0">
-                <a:solidFill>
-                  <a:srgbClr val="9D174D"/>
-                </a:solidFill>
-                <a:latin typeface="Trebuchet MS" pitchFamily="34" charset="0"/>
-                <a:ea typeface="Trebuchet MS" pitchFamily="34" charset="-122"/>
-                <a:cs typeface="Trebuchet MS" pitchFamily="34" charset="-120"/>
-              </a:rPr>
-              <a:t>er</a:t>
+              <a:t>nd</a:t>
             </a:r>
             <a:endParaRPr lang="en-US" sz="900" dirty="0"/>
           </a:p>
@@ -23473,7 +23644,7 @@
                 <a:ea typeface="Trebuchet MS" pitchFamily="34" charset="-122"/>
                 <a:cs typeface="Trebuchet MS" pitchFamily="34" charset="-120"/>
               </a:rPr>
-              <a:t>underwater</a:t>
+              <a:t>underline</a:t>
             </a:r>
             <a:endParaRPr lang="en-US" sz="2800" dirty="0"/>
           </a:p>
@@ -24300,7 +24471,7 @@
                 <a:ea typeface="Trebuchet MS" pitchFamily="34" charset="-122"/>
                 <a:cs typeface="Trebuchet MS" pitchFamily="34" charset="-120"/>
               </a:rPr>
-              <a:t>underwater</a:t>
+              <a:t>underline</a:t>
             </a:r>
             <a:endParaRPr lang="en-US" sz="2800" dirty="0"/>
           </a:p>
@@ -24478,7 +24649,7 @@
                 <a:ea typeface="Calibri" pitchFamily="34" charset="-122"/>
                 <a:cs typeface="Calibri" pitchFamily="34" charset="-120"/>
               </a:rPr>
-              <a:t>below, beneath</a:t>
+              <a:t>below or beneath</a:t>
             </a:r>
             <a:endParaRPr lang="en-US" sz="850" dirty="0"/>
           </a:p>
@@ -24551,7 +24722,7 @@
                 <a:ea typeface="Trebuchet MS" pitchFamily="34" charset="-122"/>
                 <a:cs typeface="Trebuchet MS" pitchFamily="34" charset="-120"/>
               </a:rPr>
-              <a:t>water</a:t>
+              <a:t>line</a:t>
             </a:r>
             <a:endParaRPr lang="en-US" sz="1300" dirty="0"/>
           </a:p>
@@ -24590,7 +24761,7 @@
                 <a:ea typeface="Calibri" pitchFamily="34" charset="-122"/>
                 <a:cs typeface="Calibri" pitchFamily="34" charset="-120"/>
               </a:rPr>
-              <a:t>a clear liquid found in rivers, lakes and the sea</a:t>
+              <a:t>a long thin mark</a:t>
             </a:r>
             <a:endParaRPr lang="en-US" sz="850" dirty="0"/>
           </a:p>
@@ -26004,7 +26175,7 @@
                 <a:ea typeface="Trebuchet MS" pitchFamily="34" charset="-122"/>
                 <a:cs typeface="Trebuchet MS" pitchFamily="34" charset="-120"/>
               </a:rPr>
-              <a:t>underwater</a:t>
+              <a:t>underline</a:t>
             </a:r>
             <a:endParaRPr lang="en-US" sz="2800" dirty="0"/>
           </a:p>
@@ -26182,7 +26353,7 @@
                 <a:ea typeface="Calibri" pitchFamily="34" charset="-122"/>
                 <a:cs typeface="Calibri" pitchFamily="34" charset="-120"/>
               </a:rPr>
-              <a:t>below, beneath</a:t>
+              <a:t>below or beneath</a:t>
             </a:r>
             <a:endParaRPr lang="en-US" sz="850" dirty="0"/>
           </a:p>
@@ -26255,7 +26426,7 @@
                 <a:ea typeface="Trebuchet MS" pitchFamily="34" charset="-122"/>
                 <a:cs typeface="Trebuchet MS" pitchFamily="34" charset="-120"/>
               </a:rPr>
-              <a:t>water</a:t>
+              <a:t>line</a:t>
             </a:r>
             <a:endParaRPr lang="en-US" sz="1300" dirty="0"/>
           </a:p>
@@ -26294,7 +26465,7 @@
                 <a:ea typeface="Calibri" pitchFamily="34" charset="-122"/>
                 <a:cs typeface="Calibri" pitchFamily="34" charset="-120"/>
               </a:rPr>
-              <a:t>a clear liquid found in rivers, lakes and the sea</a:t>
+              <a:t>a long thin mark</a:t>
             </a:r>
             <a:endParaRPr lang="en-US" sz="850" dirty="0"/>
           </a:p>
@@ -26401,8 +26572,8 @@
         </p:nvSpPr>
         <p:spPr>
           <a:xfrm>
-            <a:off x="1975104" y="3364992"/>
-            <a:ext cx="1554480" cy="475488"/>
+            <a:off x="2313432" y="3364992"/>
+            <a:ext cx="1645920" cy="475488"/>
           </a:xfrm>
           <a:prstGeom prst="rect">
             <a:avLst>
@@ -26428,8 +26599,8 @@
         </p:nvSpPr>
         <p:spPr>
           <a:xfrm>
-            <a:off x="1975104" y="3364992"/>
-            <a:ext cx="1554480" cy="475488"/>
+            <a:off x="2313432" y="3364992"/>
+            <a:ext cx="1645920" cy="475488"/>
           </a:xfrm>
           <a:prstGeom prst="rect">
             <a:avLst/>
@@ -26467,8 +26638,8 @@
         </p:nvSpPr>
         <p:spPr>
           <a:xfrm>
-            <a:off x="3529584" y="3364992"/>
-            <a:ext cx="73152" cy="475488"/>
+            <a:off x="3959352" y="3364992"/>
+            <a:ext cx="411480" cy="475488"/>
           </a:xfrm>
           <a:prstGeom prst="rect">
             <a:avLst/>
@@ -26506,8 +26677,8 @@
         </p:nvSpPr>
         <p:spPr>
           <a:xfrm>
-            <a:off x="3602736" y="3364992"/>
-            <a:ext cx="1554480" cy="475488"/>
+            <a:off x="4370832" y="3364992"/>
+            <a:ext cx="1645920" cy="475488"/>
           </a:xfrm>
           <a:prstGeom prst="rect">
             <a:avLst>
@@ -26533,8 +26704,8 @@
         </p:nvSpPr>
         <p:spPr>
           <a:xfrm>
-            <a:off x="3602736" y="3364992"/>
-            <a:ext cx="1554480" cy="475488"/>
+            <a:off x="4370832" y="3364992"/>
+            <a:ext cx="1645920" cy="475488"/>
           </a:xfrm>
           <a:prstGeom prst="rect">
             <a:avLst/>
@@ -26572,8 +26743,8 @@
         </p:nvSpPr>
         <p:spPr>
           <a:xfrm>
-            <a:off x="5157216" y="3364992"/>
-            <a:ext cx="73152" cy="475488"/>
+            <a:off x="6016752" y="3364992"/>
+            <a:ext cx="411480" cy="475488"/>
           </a:xfrm>
           <a:prstGeom prst="rect">
             <a:avLst/>
@@ -26611,8 +26782,8 @@
         </p:nvSpPr>
         <p:spPr>
           <a:xfrm>
-            <a:off x="5230368" y="3364992"/>
-            <a:ext cx="1554480" cy="475488"/>
+            <a:off x="6428232" y="3364992"/>
+            <a:ext cx="1645920" cy="475488"/>
           </a:xfrm>
           <a:prstGeom prst="rect">
             <a:avLst>
@@ -26638,8 +26809,8 @@
         </p:nvSpPr>
         <p:spPr>
           <a:xfrm>
-            <a:off x="5230368" y="3364992"/>
-            <a:ext cx="1554480" cy="475488"/>
+            <a:off x="6428232" y="3364992"/>
+            <a:ext cx="1645920" cy="475488"/>
           </a:xfrm>
           <a:prstGeom prst="rect">
             <a:avLst/>
@@ -26663,7 +26834,7 @@
                 <a:ea typeface="Trebuchet MS" pitchFamily="34" charset="-122"/>
                 <a:cs typeface="Trebuchet MS" pitchFamily="34" charset="-120"/>
               </a:rPr>
-              <a:t>wa</a:t>
+              <a:t>line</a:t>
             </a:r>
             <a:endParaRPr lang="en-US" sz="1400" dirty="0"/>
           </a:p>
@@ -26671,119 +26842,80 @@
       </p:sp>
       <p:sp>
         <p:nvSpPr>
-          <p:cNvPr id="33" name="Text 31"/>
-          <p:cNvSpPr/>
-          <p:nvPr/>
-        </p:nvSpPr>
-        <p:spPr>
-          <a:xfrm>
-            <a:off x="6784848" y="3364992"/>
-            <a:ext cx="73152" cy="475488"/>
-          </a:xfrm>
-          <a:prstGeom prst="rect">
-            <a:avLst/>
-          </a:prstGeom>
-          <a:noFill/>
-          <a:ln/>
-        </p:spPr>
-        <p:txBody>
-          <a:bodyPr wrap="square" lIns="0" tIns="0" rIns="0" bIns="0" rtlCol="0" anchor="ctr"/>
-          <a:lstStyle/>
-          <a:p>
-            <a:pPr algn="ctr" indent="0" marL="0">
-              <a:buNone/>
-            </a:pPr>
-            <a:r>
-              <a:rPr lang="en-US" sz="1600" b="1" dirty="0">
-                <a:solidFill>
-                  <a:srgbClr val="0D9488"/>
+          <p:cNvPr id="33" name="Shape 31"/>
+          <p:cNvSpPr/>
+          <p:nvPr/>
+        </p:nvSpPr>
+        <p:spPr>
+          <a:xfrm>
+            <a:off x="365760" y="4096512"/>
+            <a:ext cx="1371600" cy="804672"/>
+          </a:xfrm>
+          <a:prstGeom prst="rect">
+            <a:avLst>
+              <a:gd name="adj" fmla="val 6818"/>
+            </a:avLst>
+          </a:prstGeom>
+          <a:solidFill>
+            <a:srgbClr val="E2E8F0"/>
+          </a:solidFill>
+          <a:ln w="12700">
+            <a:solidFill>
+              <a:srgbClr val="E2E8F0"/>
+            </a:solidFill>
+            <a:prstDash val="solid"/>
+          </a:ln>
+        </p:spPr>
+      </p:sp>
+      <p:sp>
+        <p:nvSpPr>
+          <p:cNvPr id="34" name="Text 32"/>
+          <p:cNvSpPr/>
+          <p:nvPr/>
+        </p:nvSpPr>
+        <p:spPr>
+          <a:xfrm>
+            <a:off x="365760" y="4096512"/>
+            <a:ext cx="1371600" cy="804672"/>
+          </a:xfrm>
+          <a:prstGeom prst="rect">
+            <a:avLst/>
+          </a:prstGeom>
+          <a:noFill/>
+          <a:ln/>
+        </p:spPr>
+        <p:txBody>
+          <a:bodyPr wrap="square" lIns="0" tIns="0" rIns="0" bIns="0" rtlCol="0" anchor="ctr"/>
+          <a:lstStyle/>
+          <a:p>
+            <a:pPr algn="ctr" indent="0" marL="0">
+              <a:buNone/>
+            </a:pPr>
+            <a:r>
+              <a:rPr lang="en-US" sz="1100" b="1" dirty="0">
+                <a:solidFill>
+                  <a:srgbClr val="475569"/>
                 </a:solidFill>
                 <a:latin typeface="Trebuchet MS" pitchFamily="34" charset="0"/>
                 <a:ea typeface="Trebuchet MS" pitchFamily="34" charset="-122"/>
                 <a:cs typeface="Trebuchet MS" pitchFamily="34" charset="-120"/>
               </a:rPr>
-              <a:t>·</a:t>
-            </a:r>
-            <a:endParaRPr lang="en-US" sz="1600" dirty="0"/>
-          </a:p>
-        </p:txBody>
-      </p:sp>
-      <p:sp>
-        <p:nvSpPr>
-          <p:cNvPr id="34" name="Shape 32"/>
-          <p:cNvSpPr/>
-          <p:nvPr/>
-        </p:nvSpPr>
-        <p:spPr>
-          <a:xfrm>
-            <a:off x="6858000" y="3364992"/>
-            <a:ext cx="1554480" cy="475488"/>
-          </a:xfrm>
-          <a:prstGeom prst="rect">
-            <a:avLst>
-              <a:gd name="adj" fmla="val 9615"/>
-            </a:avLst>
-          </a:prstGeom>
-          <a:solidFill>
-            <a:srgbClr val="FFFFFF"/>
-          </a:solidFill>
-          <a:ln w="12700">
-            <a:solidFill>
-              <a:srgbClr val="0D9488"/>
-            </a:solidFill>
-            <a:prstDash val="solid"/>
-          </a:ln>
-        </p:spPr>
-      </p:sp>
-      <p:sp>
-        <p:nvSpPr>
-          <p:cNvPr id="35" name="Text 33"/>
-          <p:cNvSpPr/>
-          <p:nvPr/>
-        </p:nvSpPr>
-        <p:spPr>
-          <a:xfrm>
-            <a:off x="6858000" y="3364992"/>
-            <a:ext cx="1554480" cy="475488"/>
-          </a:xfrm>
-          <a:prstGeom prst="rect">
-            <a:avLst/>
-          </a:prstGeom>
-          <a:noFill/>
-          <a:ln/>
-        </p:spPr>
-        <p:txBody>
-          <a:bodyPr wrap="square" lIns="0" tIns="0" rIns="0" bIns="0" rtlCol="0" anchor="ctr"/>
-          <a:lstStyle/>
-          <a:p>
-            <a:pPr algn="ctr" indent="0" marL="0">
-              <a:buNone/>
-            </a:pPr>
-            <a:r>
-              <a:rPr lang="en-US" sz="1400" b="1" dirty="0">
-                <a:solidFill>
-                  <a:srgbClr val="0D9488"/>
-                </a:solidFill>
-                <a:latin typeface="Trebuchet MS" pitchFamily="34" charset="0"/>
-                <a:ea typeface="Trebuchet MS" pitchFamily="34" charset="-122"/>
-                <a:cs typeface="Trebuchet MS" pitchFamily="34" charset="-120"/>
-              </a:rPr>
-              <a:t>ter</a:t>
-            </a:r>
-            <a:endParaRPr lang="en-US" sz="1400" dirty="0"/>
-          </a:p>
-        </p:txBody>
-      </p:sp>
-      <p:sp>
-        <p:nvSpPr>
-          <p:cNvPr id="36" name="Shape 34"/>
-          <p:cNvSpPr/>
-          <p:nvPr/>
-        </p:nvSpPr>
-        <p:spPr>
-          <a:xfrm>
-            <a:off x="365760" y="4096512"/>
-            <a:ext cx="1371600" cy="804672"/>
+              <a:t>Phonemes</a:t>
+            </a:r>
+            <a:endParaRPr lang="en-US" sz="1100" dirty="0"/>
+          </a:p>
+        </p:txBody>
+      </p:sp>
+      <p:sp>
+        <p:nvSpPr>
+          <p:cNvPr id="35" name="Shape 33"/>
+          <p:cNvSpPr/>
+          <p:nvPr/>
+        </p:nvSpPr>
+        <p:spPr>
+          <a:xfrm>
+            <a:off x="1874520" y="4096512"/>
+            <a:ext cx="6903720" cy="804672"/>
           </a:xfrm>
           <a:prstGeom prst="rect">
             <a:avLst>
@@ -26791,85 +26923,19 @@
             </a:avLst>
           </a:prstGeom>
           <a:solidFill>
-            <a:srgbClr val="E2E8F0"/>
+            <a:srgbClr val="F8FAFC"/>
           </a:solidFill>
           <a:ln w="12700">
             <a:solidFill>
               <a:srgbClr val="E2E8F0"/>
             </a:solidFill>
-            <a:prstDash val="solid"/>
-          </a:ln>
-        </p:spPr>
-      </p:sp>
-      <p:sp>
-        <p:nvSpPr>
-          <p:cNvPr id="37" name="Text 35"/>
-          <p:cNvSpPr/>
-          <p:nvPr/>
-        </p:nvSpPr>
-        <p:spPr>
-          <a:xfrm>
-            <a:off x="365760" y="4096512"/>
-            <a:ext cx="1371600" cy="804672"/>
-          </a:xfrm>
-          <a:prstGeom prst="rect">
-            <a:avLst/>
-          </a:prstGeom>
-          <a:noFill/>
-          <a:ln/>
-        </p:spPr>
-        <p:txBody>
-          <a:bodyPr wrap="square" lIns="0" tIns="0" rIns="0" bIns="0" rtlCol="0" anchor="ctr"/>
-          <a:lstStyle/>
-          <a:p>
-            <a:pPr algn="ctr" indent="0" marL="0">
-              <a:buNone/>
-            </a:pPr>
-            <a:r>
-              <a:rPr lang="en-US" sz="1100" b="1" dirty="0">
-                <a:solidFill>
-                  <a:srgbClr val="475569"/>
-                </a:solidFill>
-                <a:latin typeface="Trebuchet MS" pitchFamily="34" charset="0"/>
-                <a:ea typeface="Trebuchet MS" pitchFamily="34" charset="-122"/>
-                <a:cs typeface="Trebuchet MS" pitchFamily="34" charset="-120"/>
-              </a:rPr>
-              <a:t>Phonemes</a:t>
-            </a:r>
-            <a:endParaRPr lang="en-US" sz="1100" dirty="0"/>
-          </a:p>
-        </p:txBody>
-      </p:sp>
-      <p:sp>
-        <p:nvSpPr>
-          <p:cNvPr id="38" name="Shape 36"/>
-          <p:cNvSpPr/>
-          <p:nvPr/>
-        </p:nvSpPr>
-        <p:spPr>
-          <a:xfrm>
-            <a:off x="1874520" y="4096512"/>
-            <a:ext cx="6903720" cy="804672"/>
-          </a:xfrm>
-          <a:prstGeom prst="rect">
-            <a:avLst>
-              <a:gd name="adj" fmla="val 6818"/>
-            </a:avLst>
-          </a:prstGeom>
-          <a:solidFill>
-            <a:srgbClr val="F8FAFC"/>
-          </a:solidFill>
-          <a:ln w="12700">
-            <a:solidFill>
-              <a:srgbClr val="E2E8F0"/>
-            </a:solidFill>
             <a:prstDash val="dash"/>
           </a:ln>
         </p:spPr>
       </p:sp>
       <p:sp>
         <p:nvSpPr>
-          <p:cNvPr id="39" name="Text 37"/>
+          <p:cNvPr id="36" name="Text 34"/>
           <p:cNvSpPr/>
           <p:nvPr/>
         </p:nvSpPr>
@@ -27331,7 +27397,7 @@
                 <a:ea typeface="Trebuchet MS" pitchFamily="34" charset="-122"/>
                 <a:cs typeface="Trebuchet MS" pitchFamily="34" charset="-120"/>
               </a:rPr>
-              <a:t>underwater</a:t>
+              <a:t>underline</a:t>
             </a:r>
             <a:endParaRPr lang="en-US" sz="2800" dirty="0"/>
           </a:p>
@@ -27509,7 +27575,7 @@
                 <a:ea typeface="Calibri" pitchFamily="34" charset="-122"/>
                 <a:cs typeface="Calibri" pitchFamily="34" charset="-120"/>
               </a:rPr>
-              <a:t>below, beneath</a:t>
+              <a:t>below or beneath</a:t>
             </a:r>
             <a:endParaRPr lang="en-US" sz="850" dirty="0"/>
           </a:p>
@@ -27582,7 +27648,7 @@
                 <a:ea typeface="Trebuchet MS" pitchFamily="34" charset="-122"/>
                 <a:cs typeface="Trebuchet MS" pitchFamily="34" charset="-120"/>
               </a:rPr>
-              <a:t>water</a:t>
+              <a:t>line</a:t>
             </a:r>
             <a:endParaRPr lang="en-US" sz="1300" dirty="0"/>
           </a:p>
@@ -27621,7 +27687,7 @@
                 <a:ea typeface="Calibri" pitchFamily="34" charset="-122"/>
                 <a:cs typeface="Calibri" pitchFamily="34" charset="-120"/>
               </a:rPr>
-              <a:t>a clear liquid found in rivers, lakes and the sea</a:t>
+              <a:t>a long thin mark</a:t>
             </a:r>
             <a:endParaRPr lang="en-US" sz="850" dirty="0"/>
           </a:p>
@@ -27728,8 +27794,8 @@
         </p:nvSpPr>
         <p:spPr>
           <a:xfrm>
-            <a:off x="1975104" y="3364992"/>
-            <a:ext cx="1554480" cy="475488"/>
+            <a:off x="2313432" y="3364992"/>
+            <a:ext cx="1645920" cy="475488"/>
           </a:xfrm>
           <a:prstGeom prst="rect">
             <a:avLst>
@@ -27755,8 +27821,8 @@
         </p:nvSpPr>
         <p:spPr>
           <a:xfrm>
-            <a:off x="1975104" y="3364992"/>
-            <a:ext cx="1554480" cy="475488"/>
+            <a:off x="2313432" y="3364992"/>
+            <a:ext cx="1645920" cy="475488"/>
           </a:xfrm>
           <a:prstGeom prst="rect">
             <a:avLst/>
@@ -27794,8 +27860,8 @@
         </p:nvSpPr>
         <p:spPr>
           <a:xfrm>
-            <a:off x="3529584" y="3364992"/>
-            <a:ext cx="73152" cy="475488"/>
+            <a:off x="3959352" y="3364992"/>
+            <a:ext cx="411480" cy="475488"/>
           </a:xfrm>
           <a:prstGeom prst="rect">
             <a:avLst/>
@@ -27833,8 +27899,8 @@
         </p:nvSpPr>
         <p:spPr>
           <a:xfrm>
-            <a:off x="3602736" y="3364992"/>
-            <a:ext cx="1554480" cy="475488"/>
+            <a:off x="4370832" y="3364992"/>
+            <a:ext cx="1645920" cy="475488"/>
           </a:xfrm>
           <a:prstGeom prst="rect">
             <a:avLst>
@@ -27860,8 +27926,8 @@
         </p:nvSpPr>
         <p:spPr>
           <a:xfrm>
-            <a:off x="3602736" y="3364992"/>
-            <a:ext cx="1554480" cy="475488"/>
+            <a:off x="4370832" y="3364992"/>
+            <a:ext cx="1645920" cy="475488"/>
           </a:xfrm>
           <a:prstGeom prst="rect">
             <a:avLst/>
@@ -27899,8 +27965,8 @@
         </p:nvSpPr>
         <p:spPr>
           <a:xfrm>
-            <a:off x="5157216" y="3364992"/>
-            <a:ext cx="73152" cy="475488"/>
+            <a:off x="6016752" y="3364992"/>
+            <a:ext cx="411480" cy="475488"/>
           </a:xfrm>
           <a:prstGeom prst="rect">
             <a:avLst/>
@@ -27938,8 +28004,8 @@
         </p:nvSpPr>
         <p:spPr>
           <a:xfrm>
-            <a:off x="5230368" y="3364992"/>
-            <a:ext cx="1554480" cy="475488"/>
+            <a:off x="6428232" y="3364992"/>
+            <a:ext cx="1645920" cy="475488"/>
           </a:xfrm>
           <a:prstGeom prst="rect">
             <a:avLst>
@@ -27965,8 +28031,8 @@
         </p:nvSpPr>
         <p:spPr>
           <a:xfrm>
-            <a:off x="5230368" y="3364992"/>
-            <a:ext cx="1554480" cy="475488"/>
+            <a:off x="6428232" y="3364992"/>
+            <a:ext cx="1645920" cy="475488"/>
           </a:xfrm>
           <a:prstGeom prst="rect">
             <a:avLst/>
@@ -27990,7 +28056,7 @@
                 <a:ea typeface="Trebuchet MS" pitchFamily="34" charset="-122"/>
                 <a:cs typeface="Trebuchet MS" pitchFamily="34" charset="-120"/>
               </a:rPr>
-              <a:t>wa</a:t>
+              <a:t>line</a:t>
             </a:r>
             <a:endParaRPr lang="en-US" sz="1400" dirty="0"/>
           </a:p>
@@ -27998,211 +28064,238 @@
       </p:sp>
       <p:sp>
         <p:nvSpPr>
-          <p:cNvPr id="33" name="Text 31"/>
-          <p:cNvSpPr/>
-          <p:nvPr/>
-        </p:nvSpPr>
-        <p:spPr>
-          <a:xfrm>
-            <a:off x="6784848" y="3364992"/>
-            <a:ext cx="73152" cy="475488"/>
-          </a:xfrm>
-          <a:prstGeom prst="rect">
-            <a:avLst/>
-          </a:prstGeom>
-          <a:noFill/>
-          <a:ln/>
-        </p:spPr>
-        <p:txBody>
-          <a:bodyPr wrap="square" lIns="0" tIns="0" rIns="0" bIns="0" rtlCol="0" anchor="ctr"/>
-          <a:lstStyle/>
-          <a:p>
-            <a:pPr algn="ctr" indent="0" marL="0">
-              <a:buNone/>
-            </a:pPr>
-            <a:r>
-              <a:rPr lang="en-US" sz="1600" b="1" dirty="0">
-                <a:solidFill>
-                  <a:srgbClr val="0D9488"/>
+          <p:cNvPr id="33" name="Shape 31"/>
+          <p:cNvSpPr/>
+          <p:nvPr/>
+        </p:nvSpPr>
+        <p:spPr>
+          <a:xfrm>
+            <a:off x="365760" y="4096512"/>
+            <a:ext cx="1371600" cy="804672"/>
+          </a:xfrm>
+          <a:prstGeom prst="rect">
+            <a:avLst>
+              <a:gd name="adj" fmla="val 6818"/>
+            </a:avLst>
+          </a:prstGeom>
+          <a:solidFill>
+            <a:srgbClr val="E2E8F0"/>
+          </a:solidFill>
+          <a:ln w="12700">
+            <a:solidFill>
+              <a:srgbClr val="E2E8F0"/>
+            </a:solidFill>
+            <a:prstDash val="solid"/>
+          </a:ln>
+        </p:spPr>
+      </p:sp>
+      <p:sp>
+        <p:nvSpPr>
+          <p:cNvPr id="34" name="Text 32"/>
+          <p:cNvSpPr/>
+          <p:nvPr/>
+        </p:nvSpPr>
+        <p:spPr>
+          <a:xfrm>
+            <a:off x="365760" y="4096512"/>
+            <a:ext cx="1371600" cy="804672"/>
+          </a:xfrm>
+          <a:prstGeom prst="rect">
+            <a:avLst/>
+          </a:prstGeom>
+          <a:noFill/>
+          <a:ln/>
+        </p:spPr>
+        <p:txBody>
+          <a:bodyPr wrap="square" lIns="0" tIns="0" rIns="0" bIns="0" rtlCol="0" anchor="ctr"/>
+          <a:lstStyle/>
+          <a:p>
+            <a:pPr algn="ctr" indent="0" marL="0">
+              <a:buNone/>
+            </a:pPr>
+            <a:r>
+              <a:rPr lang="en-US" sz="1100" b="1" dirty="0">
+                <a:solidFill>
+                  <a:srgbClr val="475569"/>
                 </a:solidFill>
                 <a:latin typeface="Trebuchet MS" pitchFamily="34" charset="0"/>
                 <a:ea typeface="Trebuchet MS" pitchFamily="34" charset="-122"/>
                 <a:cs typeface="Trebuchet MS" pitchFamily="34" charset="-120"/>
               </a:rPr>
-              <a:t>·</a:t>
-            </a:r>
-            <a:endParaRPr lang="en-US" sz="1600" dirty="0"/>
-          </a:p>
-        </p:txBody>
-      </p:sp>
-      <p:sp>
-        <p:nvSpPr>
-          <p:cNvPr id="34" name="Shape 32"/>
-          <p:cNvSpPr/>
-          <p:nvPr/>
-        </p:nvSpPr>
-        <p:spPr>
-          <a:xfrm>
-            <a:off x="6858000" y="3364992"/>
-            <a:ext cx="1554480" cy="475488"/>
+              <a:t>Phonemes</a:t>
+            </a:r>
+            <a:endParaRPr lang="en-US" sz="1100" dirty="0"/>
+          </a:p>
+        </p:txBody>
+      </p:sp>
+      <p:sp>
+        <p:nvSpPr>
+          <p:cNvPr id="35" name="Shape 33"/>
+          <p:cNvSpPr/>
+          <p:nvPr/>
+        </p:nvSpPr>
+        <p:spPr>
+          <a:xfrm>
+            <a:off x="1874520" y="4096512"/>
+            <a:ext cx="6903720" cy="658368"/>
           </a:xfrm>
           <a:prstGeom prst="rect">
             <a:avLst>
-              <a:gd name="adj" fmla="val 9615"/>
+              <a:gd name="adj" fmla="val 8333"/>
             </a:avLst>
           </a:prstGeom>
           <a:solidFill>
+            <a:srgbClr val="FCE7F3"/>
+          </a:solidFill>
+          <a:ln w="12700">
+            <a:solidFill>
+              <a:srgbClr val="DB2777"/>
+            </a:solidFill>
+            <a:prstDash val="solid"/>
+          </a:ln>
+        </p:spPr>
+      </p:sp>
+      <p:sp>
+        <p:nvSpPr>
+          <p:cNvPr id="36" name="Shape 34"/>
+          <p:cNvSpPr/>
+          <p:nvPr/>
+        </p:nvSpPr>
+        <p:spPr>
+          <a:xfrm>
+            <a:off x="2023872" y="4169664"/>
+            <a:ext cx="685800" cy="475488"/>
+          </a:xfrm>
+          <a:prstGeom prst="rect">
+            <a:avLst>
+              <a:gd name="adj" fmla="val 7692"/>
+            </a:avLst>
+          </a:prstGeom>
+          <a:solidFill>
             <a:srgbClr val="FFFFFF"/>
           </a:solidFill>
           <a:ln w="12700">
             <a:solidFill>
-              <a:srgbClr val="0D9488"/>
-            </a:solidFill>
-            <a:prstDash val="solid"/>
-          </a:ln>
-        </p:spPr>
-      </p:sp>
-      <p:sp>
-        <p:nvSpPr>
-          <p:cNvPr id="35" name="Text 33"/>
-          <p:cNvSpPr/>
-          <p:nvPr/>
-        </p:nvSpPr>
-        <p:spPr>
-          <a:xfrm>
-            <a:off x="6858000" y="3364992"/>
-            <a:ext cx="1554480" cy="475488"/>
-          </a:xfrm>
-          <a:prstGeom prst="rect">
-            <a:avLst/>
-          </a:prstGeom>
-          <a:noFill/>
-          <a:ln/>
-        </p:spPr>
-        <p:txBody>
-          <a:bodyPr wrap="square" lIns="0" tIns="0" rIns="0" bIns="0" rtlCol="0" anchor="ctr"/>
-          <a:lstStyle/>
-          <a:p>
-            <a:pPr algn="ctr" indent="0" marL="0">
-              <a:buNone/>
-            </a:pPr>
-            <a:r>
-              <a:rPr lang="en-US" sz="1400" b="1" dirty="0">
-                <a:solidFill>
-                  <a:srgbClr val="0D9488"/>
+              <a:srgbClr val="DB2777"/>
+            </a:solidFill>
+            <a:prstDash val="solid"/>
+          </a:ln>
+        </p:spPr>
+      </p:sp>
+      <p:sp>
+        <p:nvSpPr>
+          <p:cNvPr id="37" name="Text 35"/>
+          <p:cNvSpPr/>
+          <p:nvPr/>
+        </p:nvSpPr>
+        <p:spPr>
+          <a:xfrm>
+            <a:off x="2023872" y="4169664"/>
+            <a:ext cx="685800" cy="475488"/>
+          </a:xfrm>
+          <a:prstGeom prst="rect">
+            <a:avLst/>
+          </a:prstGeom>
+          <a:noFill/>
+          <a:ln/>
+        </p:spPr>
+        <p:txBody>
+          <a:bodyPr wrap="square" lIns="0" tIns="0" rIns="0" bIns="0" rtlCol="0" anchor="ctr"/>
+          <a:lstStyle/>
+          <a:p>
+            <a:pPr algn="ctr" indent="0" marL="0">
+              <a:buNone/>
+            </a:pPr>
+            <a:r>
+              <a:rPr lang="en-US" sz="900" b="1" dirty="0">
+                <a:solidFill>
+                  <a:srgbClr val="9D174D"/>
                 </a:solidFill>
                 <a:latin typeface="Trebuchet MS" pitchFamily="34" charset="0"/>
                 <a:ea typeface="Trebuchet MS" pitchFamily="34" charset="-122"/>
                 <a:cs typeface="Trebuchet MS" pitchFamily="34" charset="-120"/>
               </a:rPr>
-              <a:t>ter</a:t>
-            </a:r>
-            <a:endParaRPr lang="en-US" sz="1400" dirty="0"/>
-          </a:p>
-        </p:txBody>
-      </p:sp>
-      <p:sp>
-        <p:nvSpPr>
-          <p:cNvPr id="36" name="Shape 34"/>
-          <p:cNvSpPr/>
-          <p:nvPr/>
-        </p:nvSpPr>
-        <p:spPr>
-          <a:xfrm>
-            <a:off x="365760" y="4096512"/>
-            <a:ext cx="1371600" cy="804672"/>
+              <a:t>u</a:t>
+            </a:r>
+            <a:endParaRPr lang="en-US" sz="900" dirty="0"/>
+          </a:p>
+        </p:txBody>
+      </p:sp>
+      <p:sp>
+        <p:nvSpPr>
+          <p:cNvPr id="38" name="Shape 36"/>
+          <p:cNvSpPr/>
+          <p:nvPr/>
+        </p:nvSpPr>
+        <p:spPr>
+          <a:xfrm>
+            <a:off x="2831592" y="4169664"/>
+            <a:ext cx="685800" cy="475488"/>
           </a:xfrm>
           <a:prstGeom prst="rect">
             <a:avLst>
-              <a:gd name="adj" fmla="val 6818"/>
+              <a:gd name="adj" fmla="val 7692"/>
             </a:avLst>
           </a:prstGeom>
           <a:solidFill>
-            <a:srgbClr val="E2E8F0"/>
-          </a:solidFill>
-          <a:ln w="12700">
-            <a:solidFill>
-              <a:srgbClr val="E2E8F0"/>
-            </a:solidFill>
-            <a:prstDash val="solid"/>
-          </a:ln>
-        </p:spPr>
-      </p:sp>
-      <p:sp>
-        <p:nvSpPr>
-          <p:cNvPr id="37" name="Text 35"/>
-          <p:cNvSpPr/>
-          <p:nvPr/>
-        </p:nvSpPr>
-        <p:spPr>
-          <a:xfrm>
-            <a:off x="365760" y="4096512"/>
-            <a:ext cx="1371600" cy="804672"/>
-          </a:xfrm>
-          <a:prstGeom prst="rect">
-            <a:avLst/>
-          </a:prstGeom>
-          <a:noFill/>
-          <a:ln/>
-        </p:spPr>
-        <p:txBody>
-          <a:bodyPr wrap="square" lIns="0" tIns="0" rIns="0" bIns="0" rtlCol="0" anchor="ctr"/>
-          <a:lstStyle/>
-          <a:p>
-            <a:pPr algn="ctr" indent="0" marL="0">
-              <a:buNone/>
-            </a:pPr>
-            <a:r>
-              <a:rPr lang="en-US" sz="1100" b="1" dirty="0">
-                <a:solidFill>
-                  <a:srgbClr val="475569"/>
+            <a:srgbClr val="FFFFFF"/>
+          </a:solidFill>
+          <a:ln w="12700">
+            <a:solidFill>
+              <a:srgbClr val="DB2777"/>
+            </a:solidFill>
+            <a:prstDash val="solid"/>
+          </a:ln>
+        </p:spPr>
+      </p:sp>
+      <p:sp>
+        <p:nvSpPr>
+          <p:cNvPr id="39" name="Text 37"/>
+          <p:cNvSpPr/>
+          <p:nvPr/>
+        </p:nvSpPr>
+        <p:spPr>
+          <a:xfrm>
+            <a:off x="2831592" y="4169664"/>
+            <a:ext cx="685800" cy="475488"/>
+          </a:xfrm>
+          <a:prstGeom prst="rect">
+            <a:avLst/>
+          </a:prstGeom>
+          <a:noFill/>
+          <a:ln/>
+        </p:spPr>
+        <p:txBody>
+          <a:bodyPr wrap="square" lIns="0" tIns="0" rIns="0" bIns="0" rtlCol="0" anchor="ctr"/>
+          <a:lstStyle/>
+          <a:p>
+            <a:pPr algn="ctr" indent="0" marL="0">
+              <a:buNone/>
+            </a:pPr>
+            <a:r>
+              <a:rPr lang="en-US" sz="900" b="1" dirty="0">
+                <a:solidFill>
+                  <a:srgbClr val="9D174D"/>
                 </a:solidFill>
                 <a:latin typeface="Trebuchet MS" pitchFamily="34" charset="0"/>
                 <a:ea typeface="Trebuchet MS" pitchFamily="34" charset="-122"/>
                 <a:cs typeface="Trebuchet MS" pitchFamily="34" charset="-120"/>
               </a:rPr>
-              <a:t>Phonemes</a:t>
-            </a:r>
-            <a:endParaRPr lang="en-US" sz="1100" dirty="0"/>
-          </a:p>
-        </p:txBody>
-      </p:sp>
-      <p:sp>
-        <p:nvSpPr>
-          <p:cNvPr id="38" name="Shape 36"/>
-          <p:cNvSpPr/>
-          <p:nvPr/>
-        </p:nvSpPr>
-        <p:spPr>
-          <a:xfrm>
-            <a:off x="1874520" y="4096512"/>
-            <a:ext cx="6903720" cy="658368"/>
-          </a:xfrm>
-          <a:prstGeom prst="rect">
-            <a:avLst>
-              <a:gd name="adj" fmla="val 8333"/>
-            </a:avLst>
-          </a:prstGeom>
-          <a:solidFill>
-            <a:srgbClr val="FCE7F3"/>
-          </a:solidFill>
-          <a:ln w="12700">
-            <a:solidFill>
-              <a:srgbClr val="DB2777"/>
-            </a:solidFill>
-            <a:prstDash val="solid"/>
-          </a:ln>
-        </p:spPr>
-      </p:sp>
-      <p:sp>
-        <p:nvSpPr>
-          <p:cNvPr id="39" name="Shape 37"/>
-          <p:cNvSpPr/>
-          <p:nvPr/>
-        </p:nvSpPr>
-        <p:spPr>
-          <a:xfrm>
-            <a:off x="2023872" y="4169664"/>
+              <a:t>n</a:t>
+            </a:r>
+            <a:endParaRPr lang="en-US" sz="900" dirty="0"/>
+          </a:p>
+        </p:txBody>
+      </p:sp>
+      <p:sp>
+        <p:nvSpPr>
+          <p:cNvPr id="40" name="Shape 38"/>
+          <p:cNvSpPr/>
+          <p:nvPr/>
+        </p:nvSpPr>
+        <p:spPr>
+          <a:xfrm>
+            <a:off x="3639312" y="4169664"/>
             <a:ext cx="685800" cy="475488"/>
           </a:xfrm>
           <a:prstGeom prst="rect">
@@ -28223,13 +28316,13 @@
       </p:sp>
       <p:sp>
         <p:nvSpPr>
-          <p:cNvPr id="40" name="Text 38"/>
-          <p:cNvSpPr/>
-          <p:nvPr/>
-        </p:nvSpPr>
-        <p:spPr>
-          <a:xfrm>
-            <a:off x="2023872" y="4169664"/>
+          <p:cNvPr id="41" name="Text 39"/>
+          <p:cNvSpPr/>
+          <p:nvPr/>
+        </p:nvSpPr>
+        <p:spPr>
+          <a:xfrm>
+            <a:off x="3639312" y="4169664"/>
             <a:ext cx="685800" cy="475488"/>
           </a:xfrm>
           <a:prstGeom prst="rect">
@@ -28254,7 +28347,7 @@
                 <a:ea typeface="Trebuchet MS" pitchFamily="34" charset="-122"/>
                 <a:cs typeface="Trebuchet MS" pitchFamily="34" charset="-120"/>
               </a:rPr>
-              <a:t>u</a:t>
+              <a:t>d</a:t>
             </a:r>
             <a:endParaRPr lang="en-US" sz="900" dirty="0"/>
           </a:p>
@@ -28262,13 +28355,13 @@
       </p:sp>
       <p:sp>
         <p:nvSpPr>
-          <p:cNvPr id="41" name="Shape 39"/>
-          <p:cNvSpPr/>
-          <p:nvPr/>
-        </p:nvSpPr>
-        <p:spPr>
-          <a:xfrm>
-            <a:off x="2831592" y="4169664"/>
+          <p:cNvPr id="42" name="Shape 40"/>
+          <p:cNvSpPr/>
+          <p:nvPr/>
+        </p:nvSpPr>
+        <p:spPr>
+          <a:xfrm>
+            <a:off x="4447032" y="4169664"/>
             <a:ext cx="685800" cy="475488"/>
           </a:xfrm>
           <a:prstGeom prst="rect">
@@ -28289,13 +28382,13 @@
       </p:sp>
       <p:sp>
         <p:nvSpPr>
-          <p:cNvPr id="42" name="Text 40"/>
-          <p:cNvSpPr/>
-          <p:nvPr/>
-        </p:nvSpPr>
-        <p:spPr>
-          <a:xfrm>
-            <a:off x="2831592" y="4169664"/>
+          <p:cNvPr id="43" name="Text 41"/>
+          <p:cNvSpPr/>
+          <p:nvPr/>
+        </p:nvSpPr>
+        <p:spPr>
+          <a:xfrm>
+            <a:off x="4447032" y="4169664"/>
             <a:ext cx="685800" cy="475488"/>
           </a:xfrm>
           <a:prstGeom prst="rect">
@@ -28320,7 +28413,7 @@
                 <a:ea typeface="Trebuchet MS" pitchFamily="34" charset="-122"/>
                 <a:cs typeface="Trebuchet MS" pitchFamily="34" charset="-120"/>
               </a:rPr>
-              <a:t>n</a:t>
+              <a:t>er</a:t>
             </a:r>
             <a:endParaRPr lang="en-US" sz="900" dirty="0"/>
           </a:p>
@@ -28328,13 +28421,13 @@
       </p:sp>
       <p:sp>
         <p:nvSpPr>
-          <p:cNvPr id="43" name="Shape 41"/>
-          <p:cNvSpPr/>
-          <p:nvPr/>
-        </p:nvSpPr>
-        <p:spPr>
-          <a:xfrm>
-            <a:off x="3639312" y="4169664"/>
+          <p:cNvPr id="44" name="Shape 42"/>
+          <p:cNvSpPr/>
+          <p:nvPr/>
+        </p:nvSpPr>
+        <p:spPr>
+          <a:xfrm>
+            <a:off x="5254752" y="4169664"/>
             <a:ext cx="685800" cy="475488"/>
           </a:xfrm>
           <a:prstGeom prst="rect">
@@ -28355,13 +28448,13 @@
       </p:sp>
       <p:sp>
         <p:nvSpPr>
-          <p:cNvPr id="44" name="Text 42"/>
-          <p:cNvSpPr/>
-          <p:nvPr/>
-        </p:nvSpPr>
-        <p:spPr>
-          <a:xfrm>
-            <a:off x="3639312" y="4169664"/>
+          <p:cNvPr id="45" name="Text 43"/>
+          <p:cNvSpPr/>
+          <p:nvPr/>
+        </p:nvSpPr>
+        <p:spPr>
+          <a:xfrm>
+            <a:off x="5254752" y="4169664"/>
             <a:ext cx="685800" cy="475488"/>
           </a:xfrm>
           <a:prstGeom prst="rect">
@@ -28386,7 +28479,7 @@
                 <a:ea typeface="Trebuchet MS" pitchFamily="34" charset="-122"/>
                 <a:cs typeface="Trebuchet MS" pitchFamily="34" charset="-120"/>
               </a:rPr>
-              <a:t>d</a:t>
+              <a:t>l</a:t>
             </a:r>
             <a:endParaRPr lang="en-US" sz="900" dirty="0"/>
           </a:p>
@@ -28394,13 +28487,13 @@
       </p:sp>
       <p:sp>
         <p:nvSpPr>
-          <p:cNvPr id="45" name="Shape 43"/>
-          <p:cNvSpPr/>
-          <p:nvPr/>
-        </p:nvSpPr>
-        <p:spPr>
-          <a:xfrm>
-            <a:off x="4447032" y="4169664"/>
+          <p:cNvPr id="46" name="Shape 44"/>
+          <p:cNvSpPr/>
+          <p:nvPr/>
+        </p:nvSpPr>
+        <p:spPr>
+          <a:xfrm>
+            <a:off x="6062472" y="4169664"/>
             <a:ext cx="685800" cy="475488"/>
           </a:xfrm>
           <a:prstGeom prst="rect">
@@ -28421,13 +28514,13 @@
       </p:sp>
       <p:sp>
         <p:nvSpPr>
-          <p:cNvPr id="46" name="Text 44"/>
-          <p:cNvSpPr/>
-          <p:nvPr/>
-        </p:nvSpPr>
-        <p:spPr>
-          <a:xfrm>
-            <a:off x="4447032" y="4169664"/>
+          <p:cNvPr id="47" name="Text 45"/>
+          <p:cNvSpPr/>
+          <p:nvPr/>
+        </p:nvSpPr>
+        <p:spPr>
+          <a:xfrm>
+            <a:off x="6062472" y="4169664"/>
             <a:ext cx="685800" cy="475488"/>
           </a:xfrm>
           <a:prstGeom prst="rect">
@@ -28452,7 +28545,7 @@
                 <a:ea typeface="Trebuchet MS" pitchFamily="34" charset="-122"/>
                 <a:cs typeface="Trebuchet MS" pitchFamily="34" charset="-120"/>
               </a:rPr>
-              <a:t>er</a:t>
+              <a:t>i</a:t>
             </a:r>
             <a:endParaRPr lang="en-US" sz="900" dirty="0"/>
           </a:p>
@@ -28460,13 +28553,13 @@
       </p:sp>
       <p:sp>
         <p:nvSpPr>
-          <p:cNvPr id="47" name="Shape 45"/>
-          <p:cNvSpPr/>
-          <p:nvPr/>
-        </p:nvSpPr>
-        <p:spPr>
-          <a:xfrm>
-            <a:off x="5254752" y="4169664"/>
+          <p:cNvPr id="48" name="Shape 46"/>
+          <p:cNvSpPr/>
+          <p:nvPr/>
+        </p:nvSpPr>
+        <p:spPr>
+          <a:xfrm>
+            <a:off x="6870192" y="4169664"/>
             <a:ext cx="685800" cy="475488"/>
           </a:xfrm>
           <a:prstGeom prst="rect">
@@ -28487,13 +28580,13 @@
       </p:sp>
       <p:sp>
         <p:nvSpPr>
-          <p:cNvPr id="48" name="Text 46"/>
-          <p:cNvSpPr/>
-          <p:nvPr/>
-        </p:nvSpPr>
-        <p:spPr>
-          <a:xfrm>
-            <a:off x="5254752" y="4169664"/>
+          <p:cNvPr id="49" name="Text 47"/>
+          <p:cNvSpPr/>
+          <p:nvPr/>
+        </p:nvSpPr>
+        <p:spPr>
+          <a:xfrm>
+            <a:off x="6870192" y="4169664"/>
             <a:ext cx="685800" cy="475488"/>
           </a:xfrm>
           <a:prstGeom prst="rect">
@@ -28518,7 +28611,7 @@
                 <a:ea typeface="Trebuchet MS" pitchFamily="34" charset="-122"/>
                 <a:cs typeface="Trebuchet MS" pitchFamily="34" charset="-120"/>
               </a:rPr>
-              <a:t>w</a:t>
+              <a:t>n</a:t>
             </a:r>
             <a:endParaRPr lang="en-US" sz="900" dirty="0"/>
           </a:p>
@@ -28526,13 +28619,13 @@
       </p:sp>
       <p:sp>
         <p:nvSpPr>
-          <p:cNvPr id="49" name="Shape 47"/>
-          <p:cNvSpPr/>
-          <p:nvPr/>
-        </p:nvSpPr>
-        <p:spPr>
-          <a:xfrm>
-            <a:off x="6062472" y="4169664"/>
+          <p:cNvPr id="50" name="Shape 48"/>
+          <p:cNvSpPr/>
+          <p:nvPr/>
+        </p:nvSpPr>
+        <p:spPr>
+          <a:xfrm>
+            <a:off x="7677912" y="4169664"/>
             <a:ext cx="685800" cy="475488"/>
           </a:xfrm>
           <a:prstGeom prst="rect">
@@ -28553,13 +28646,13 @@
       </p:sp>
       <p:sp>
         <p:nvSpPr>
-          <p:cNvPr id="50" name="Text 48"/>
-          <p:cNvSpPr/>
-          <p:nvPr/>
-        </p:nvSpPr>
-        <p:spPr>
-          <a:xfrm>
-            <a:off x="6062472" y="4169664"/>
+          <p:cNvPr id="51" name="Text 49"/>
+          <p:cNvSpPr/>
+          <p:nvPr/>
+        </p:nvSpPr>
+        <p:spPr>
+          <a:xfrm>
+            <a:off x="7677912" y="4169664"/>
             <a:ext cx="685800" cy="475488"/>
           </a:xfrm>
           <a:prstGeom prst="rect">
@@ -28584,139 +28677,7 @@
                 <a:ea typeface="Trebuchet MS" pitchFamily="34" charset="-122"/>
                 <a:cs typeface="Trebuchet MS" pitchFamily="34" charset="-120"/>
               </a:rPr>
-              <a:t>a</a:t>
-            </a:r>
-            <a:endParaRPr lang="en-US" sz="900" dirty="0"/>
-          </a:p>
-        </p:txBody>
-      </p:sp>
-      <p:sp>
-        <p:nvSpPr>
-          <p:cNvPr id="51" name="Shape 49"/>
-          <p:cNvSpPr/>
-          <p:nvPr/>
-        </p:nvSpPr>
-        <p:spPr>
-          <a:xfrm>
-            <a:off x="6870192" y="4169664"/>
-            <a:ext cx="685800" cy="475488"/>
-          </a:xfrm>
-          <a:prstGeom prst="rect">
-            <a:avLst>
-              <a:gd name="adj" fmla="val 7692"/>
-            </a:avLst>
-          </a:prstGeom>
-          <a:solidFill>
-            <a:srgbClr val="FFFFFF"/>
-          </a:solidFill>
-          <a:ln w="12700">
-            <a:solidFill>
-              <a:srgbClr val="DB2777"/>
-            </a:solidFill>
-            <a:prstDash val="solid"/>
-          </a:ln>
-        </p:spPr>
-      </p:sp>
-      <p:sp>
-        <p:nvSpPr>
-          <p:cNvPr id="52" name="Text 50"/>
-          <p:cNvSpPr/>
-          <p:nvPr/>
-        </p:nvSpPr>
-        <p:spPr>
-          <a:xfrm>
-            <a:off x="6870192" y="4169664"/>
-            <a:ext cx="685800" cy="475488"/>
-          </a:xfrm>
-          <a:prstGeom prst="rect">
-            <a:avLst/>
-          </a:prstGeom>
-          <a:noFill/>
-          <a:ln/>
-        </p:spPr>
-        <p:txBody>
-          <a:bodyPr wrap="square" lIns="0" tIns="0" rIns="0" bIns="0" rtlCol="0" anchor="ctr"/>
-          <a:lstStyle/>
-          <a:p>
-            <a:pPr algn="ctr" indent="0" marL="0">
-              <a:buNone/>
-            </a:pPr>
-            <a:r>
-              <a:rPr lang="en-US" sz="900" b="1" dirty="0">
-                <a:solidFill>
-                  <a:srgbClr val="9D174D"/>
-                </a:solidFill>
-                <a:latin typeface="Trebuchet MS" pitchFamily="34" charset="0"/>
-                <a:ea typeface="Trebuchet MS" pitchFamily="34" charset="-122"/>
-                <a:cs typeface="Trebuchet MS" pitchFamily="34" charset="-120"/>
-              </a:rPr>
-              <a:t>t</a:t>
-            </a:r>
-            <a:endParaRPr lang="en-US" sz="900" dirty="0"/>
-          </a:p>
-        </p:txBody>
-      </p:sp>
-      <p:sp>
-        <p:nvSpPr>
-          <p:cNvPr id="53" name="Shape 51"/>
-          <p:cNvSpPr/>
-          <p:nvPr/>
-        </p:nvSpPr>
-        <p:spPr>
-          <a:xfrm>
-            <a:off x="7677912" y="4169664"/>
-            <a:ext cx="685800" cy="475488"/>
-          </a:xfrm>
-          <a:prstGeom prst="rect">
-            <a:avLst>
-              <a:gd name="adj" fmla="val 7692"/>
-            </a:avLst>
-          </a:prstGeom>
-          <a:solidFill>
-            <a:srgbClr val="FFFFFF"/>
-          </a:solidFill>
-          <a:ln w="12700">
-            <a:solidFill>
-              <a:srgbClr val="DB2777"/>
-            </a:solidFill>
-            <a:prstDash val="solid"/>
-          </a:ln>
-        </p:spPr>
-      </p:sp>
-      <p:sp>
-        <p:nvSpPr>
-          <p:cNvPr id="54" name="Text 52"/>
-          <p:cNvSpPr/>
-          <p:nvPr/>
-        </p:nvSpPr>
-        <p:spPr>
-          <a:xfrm>
-            <a:off x="7677912" y="4169664"/>
-            <a:ext cx="685800" cy="475488"/>
-          </a:xfrm>
-          <a:prstGeom prst="rect">
-            <a:avLst/>
-          </a:prstGeom>
-          <a:noFill/>
-          <a:ln/>
-        </p:spPr>
-        <p:txBody>
-          <a:bodyPr wrap="square" lIns="0" tIns="0" rIns="0" bIns="0" rtlCol="0" anchor="ctr"/>
-          <a:lstStyle/>
-          <a:p>
-            <a:pPr algn="ctr" indent="0" marL="0">
-              <a:buNone/>
-            </a:pPr>
-            <a:r>
-              <a:rPr lang="en-US" sz="900" b="1" dirty="0">
-                <a:solidFill>
-                  <a:srgbClr val="9D174D"/>
-                </a:solidFill>
-                <a:latin typeface="Trebuchet MS" pitchFamily="34" charset="0"/>
-                <a:ea typeface="Trebuchet MS" pitchFamily="34" charset="-122"/>
-                <a:cs typeface="Trebuchet MS" pitchFamily="34" charset="-120"/>
-              </a:rPr>
-              <a:t>er</a:t>
+              <a:t>e</a:t>
             </a:r>
             <a:endParaRPr lang="en-US" sz="900" dirty="0"/>
           </a:p>
@@ -29147,7 +29108,7 @@
                 <a:ea typeface="Trebuchet MS" pitchFamily="34" charset="-122"/>
                 <a:cs typeface="Trebuchet MS" pitchFamily="34" charset="-120"/>
               </a:rPr>
-              <a:t>underline</a:t>
+              <a:t>undercooked</a:t>
             </a:r>
             <a:endParaRPr lang="en-US" sz="2800" dirty="0"/>
           </a:p>
@@ -29974,7 +29935,7 @@
                 <a:ea typeface="Trebuchet MS" pitchFamily="34" charset="-122"/>
                 <a:cs typeface="Trebuchet MS" pitchFamily="34" charset="-120"/>
               </a:rPr>
-              <a:t>underline</a:t>
+              <a:t>undercooked</a:t>
             </a:r>
             <a:endParaRPr lang="en-US" sz="2800" dirty="0"/>
           </a:p>
@@ -30054,7 +30015,7 @@
         </p:nvSpPr>
         <p:spPr>
           <a:xfrm>
-            <a:off x="2938272" y="2258568"/>
+            <a:off x="2221992" y="2258568"/>
             <a:ext cx="1828800" cy="292608"/>
           </a:xfrm>
           <a:prstGeom prst="rect">
@@ -30088,7 +30049,7 @@
         </p:nvSpPr>
         <p:spPr>
           <a:xfrm>
-            <a:off x="2938272" y="2258568"/>
+            <a:off x="2221992" y="2258568"/>
             <a:ext cx="1828800" cy="292608"/>
           </a:xfrm>
           <a:prstGeom prst="rect">
@@ -30127,7 +30088,7 @@
         </p:nvSpPr>
         <p:spPr>
           <a:xfrm>
-            <a:off x="2938272" y="2569464"/>
+            <a:off x="2221992" y="2569464"/>
             <a:ext cx="1828800" cy="201168"/>
           </a:xfrm>
           <a:prstGeom prst="rect">
@@ -30152,7 +30113,7 @@
                 <a:ea typeface="Calibri" pitchFamily="34" charset="-122"/>
                 <a:cs typeface="Calibri" pitchFamily="34" charset="-120"/>
               </a:rPr>
-              <a:t>below, beneath</a:t>
+              <a:t>not enough</a:t>
             </a:r>
             <a:endParaRPr lang="en-US" sz="850" dirty="0"/>
           </a:p>
@@ -30166,7 +30127,7 @@
         </p:nvSpPr>
         <p:spPr>
           <a:xfrm>
-            <a:off x="5803392" y="2258568"/>
+            <a:off x="4370832" y="2258568"/>
             <a:ext cx="1828800" cy="292608"/>
           </a:xfrm>
           <a:prstGeom prst="rect">
@@ -30200,7 +30161,7 @@
         </p:nvSpPr>
         <p:spPr>
           <a:xfrm>
-            <a:off x="5803392" y="2258568"/>
+            <a:off x="4370832" y="2258568"/>
             <a:ext cx="1828800" cy="292608"/>
           </a:xfrm>
           <a:prstGeom prst="rect">
@@ -30225,7 +30186,7 @@
                 <a:ea typeface="Trebuchet MS" pitchFamily="34" charset="-122"/>
                 <a:cs typeface="Trebuchet MS" pitchFamily="34" charset="-120"/>
               </a:rPr>
-              <a:t>line</a:t>
+              <a:t>cook</a:t>
             </a:r>
             <a:endParaRPr lang="en-US" sz="1300" dirty="0"/>
           </a:p>
@@ -30239,7 +30200,7 @@
         </p:nvSpPr>
         <p:spPr>
           <a:xfrm>
-            <a:off x="5803392" y="2569464"/>
+            <a:off x="4370832" y="2569464"/>
             <a:ext cx="1828800" cy="201168"/>
           </a:xfrm>
           <a:prstGeom prst="rect">
@@ -30264,7 +30225,7 @@
                 <a:ea typeface="Calibri" pitchFamily="34" charset="-122"/>
                 <a:cs typeface="Calibri" pitchFamily="34" charset="-120"/>
               </a:rPr>
-              <a:t>a long thin mark</a:t>
+              <a:t>to heat food</a:t>
             </a:r>
             <a:endParaRPr lang="en-US" sz="850" dirty="0"/>
           </a:p>
@@ -30273,6 +30234,118 @@
       <p:sp>
         <p:nvSpPr>
           <p:cNvPr id="22" name="Shape 20"/>
+          <p:cNvSpPr/>
+          <p:nvPr/>
+        </p:nvSpPr>
+        <p:spPr>
+          <a:xfrm>
+            <a:off x="6519672" y="2258568"/>
+            <a:ext cx="1828800" cy="292608"/>
+          </a:xfrm>
+          <a:prstGeom prst="rect">
+            <a:avLst>
+              <a:gd name="adj" fmla="val 25000"/>
+            </a:avLst>
+          </a:prstGeom>
+          <a:solidFill>
+            <a:srgbClr val="FCE7F3"/>
+          </a:solidFill>
+          <a:ln w="19050">
+            <a:solidFill>
+              <a:srgbClr val="DB2777"/>
+            </a:solidFill>
+            <a:prstDash val="solid"/>
+          </a:ln>
+          <a:effectLst>
+            <a:outerShdw sx="100000" sy="100000" kx="0" ky="0" algn="bl" rotWithShape="0" blurRad="101600" dist="38100" dir="8100000">
+              <a:srgbClr val="000000">
+                <a:alpha val="12000"/>
+              </a:srgbClr>
+            </a:outerShdw>
+          </a:effectLst>
+        </p:spPr>
+      </p:sp>
+      <p:sp>
+        <p:nvSpPr>
+          <p:cNvPr id="23" name="Text 21"/>
+          <p:cNvSpPr/>
+          <p:nvPr/>
+        </p:nvSpPr>
+        <p:spPr>
+          <a:xfrm>
+            <a:off x="6519672" y="2258568"/>
+            <a:ext cx="1828800" cy="292608"/>
+          </a:xfrm>
+          <a:prstGeom prst="rect">
+            <a:avLst/>
+          </a:prstGeom>
+          <a:noFill/>
+          <a:ln/>
+        </p:spPr>
+        <p:txBody>
+          <a:bodyPr wrap="square" lIns="0" tIns="0" rIns="0" bIns="0" rtlCol="0" anchor="ctr"/>
+          <a:lstStyle/>
+          <a:p>
+            <a:pPr algn="ctr" indent="0" marL="0">
+              <a:buNone/>
+            </a:pPr>
+            <a:r>
+              <a:rPr lang="en-US" sz="1300" b="1" dirty="0">
+                <a:solidFill>
+                  <a:srgbClr val="9D174D"/>
+                </a:solidFill>
+                <a:latin typeface="Trebuchet MS" pitchFamily="34" charset="0"/>
+                <a:ea typeface="Trebuchet MS" pitchFamily="34" charset="-122"/>
+                <a:cs typeface="Trebuchet MS" pitchFamily="34" charset="-120"/>
+              </a:rPr>
+              <a:t>ed</a:t>
+            </a:r>
+            <a:endParaRPr lang="en-US" sz="1300" dirty="0"/>
+          </a:p>
+        </p:txBody>
+      </p:sp>
+      <p:sp>
+        <p:nvSpPr>
+          <p:cNvPr id="24" name="Text 22"/>
+          <p:cNvSpPr/>
+          <p:nvPr/>
+        </p:nvSpPr>
+        <p:spPr>
+          <a:xfrm>
+            <a:off x="6519672" y="2569464"/>
+            <a:ext cx="1828800" cy="201168"/>
+          </a:xfrm>
+          <a:prstGeom prst="rect">
+            <a:avLst/>
+          </a:prstGeom>
+          <a:noFill/>
+          <a:ln/>
+        </p:spPr>
+        <p:txBody>
+          <a:bodyPr wrap="square" lIns="0" tIns="0" rIns="0" bIns="0" rtlCol="0" anchor="t"/>
+          <a:lstStyle/>
+          <a:p>
+            <a:pPr algn="ctr" indent="0" marL="0">
+              <a:buNone/>
+            </a:pPr>
+            <a:r>
+              <a:rPr lang="en-US" sz="850" dirty="0">
+                <a:solidFill>
+                  <a:srgbClr val="475569"/>
+                </a:solidFill>
+                <a:latin typeface="Calibri" pitchFamily="34" charset="0"/>
+                <a:ea typeface="Calibri" pitchFamily="34" charset="-122"/>
+                <a:cs typeface="Calibri" pitchFamily="34" charset="-120"/>
+              </a:rPr>
+              <a:t>past tense</a:t>
+            </a:r>
+            <a:endParaRPr lang="en-US" sz="850" dirty="0"/>
+          </a:p>
+        </p:txBody>
+      </p:sp>
+      <p:sp>
+        <p:nvSpPr>
+          <p:cNvPr id="25" name="Shape 23"/>
           <p:cNvSpPr/>
           <p:nvPr/>
         </p:nvSpPr>
@@ -30299,7 +30372,7 @@
       </p:sp>
       <p:sp>
         <p:nvSpPr>
-          <p:cNvPr id="23" name="Text 21"/>
+          <p:cNvPr id="26" name="Text 24"/>
           <p:cNvSpPr/>
           <p:nvPr/>
         </p:nvSpPr>
@@ -30338,7 +30411,7 @@
       </p:sp>
       <p:sp>
         <p:nvSpPr>
-          <p:cNvPr id="24" name="Shape 22"/>
+          <p:cNvPr id="27" name="Shape 25"/>
           <p:cNvSpPr/>
           <p:nvPr/>
         </p:nvSpPr>
@@ -30365,7 +30438,7 @@
       </p:sp>
       <p:sp>
         <p:nvSpPr>
-          <p:cNvPr id="25" name="Text 23"/>
+          <p:cNvPr id="28" name="Text 26"/>
           <p:cNvSpPr/>
           <p:nvPr/>
         </p:nvSpPr>
@@ -30404,7 +30477,7 @@
       </p:sp>
       <p:sp>
         <p:nvSpPr>
-          <p:cNvPr id="26" name="Shape 24"/>
+          <p:cNvPr id="29" name="Shape 27"/>
           <p:cNvSpPr/>
           <p:nvPr/>
         </p:nvSpPr>
@@ -30431,7 +30504,7 @@
       </p:sp>
       <p:sp>
         <p:nvSpPr>
-          <p:cNvPr id="27" name="Text 25"/>
+          <p:cNvPr id="30" name="Text 28"/>
           <p:cNvSpPr/>
           <p:nvPr/>
         </p:nvSpPr>
@@ -30470,7 +30543,7 @@
       </p:sp>
       <p:sp>
         <p:nvSpPr>
-          <p:cNvPr id="28" name="Shape 26"/>
+          <p:cNvPr id="31" name="Shape 29"/>
           <p:cNvSpPr/>
           <p:nvPr/>
         </p:nvSpPr>
@@ -30497,7 +30570,7 @@
       </p:sp>
       <p:sp>
         <p:nvSpPr>
-          <p:cNvPr id="29" name="Text 27"/>
+          <p:cNvPr id="32" name="Text 30"/>
           <p:cNvSpPr/>
           <p:nvPr/>
         </p:nvSpPr>
@@ -30959,7 +31032,7 @@
                 <a:ea typeface="Trebuchet MS" pitchFamily="34" charset="-122"/>
                 <a:cs typeface="Trebuchet MS" pitchFamily="34" charset="-120"/>
               </a:rPr>
-              <a:t>underline</a:t>
+              <a:t>undercooked</a:t>
             </a:r>
             <a:endParaRPr lang="en-US" sz="2800" dirty="0"/>
           </a:p>
@@ -31039,7 +31112,7 @@
         </p:nvSpPr>
         <p:spPr>
           <a:xfrm>
-            <a:off x="2938272" y="2258568"/>
+            <a:off x="2221992" y="2258568"/>
             <a:ext cx="1828800" cy="292608"/>
           </a:xfrm>
           <a:prstGeom prst="rect">
@@ -31073,7 +31146,7 @@
         </p:nvSpPr>
         <p:spPr>
           <a:xfrm>
-            <a:off x="2938272" y="2258568"/>
+            <a:off x="2221992" y="2258568"/>
             <a:ext cx="1828800" cy="292608"/>
           </a:xfrm>
           <a:prstGeom prst="rect">
@@ -31112,7 +31185,7 @@
         </p:nvSpPr>
         <p:spPr>
           <a:xfrm>
-            <a:off x="2938272" y="2569464"/>
+            <a:off x="2221992" y="2569464"/>
             <a:ext cx="1828800" cy="201168"/>
           </a:xfrm>
           <a:prstGeom prst="rect">
@@ -31137,7 +31210,7 @@
                 <a:ea typeface="Calibri" pitchFamily="34" charset="-122"/>
                 <a:cs typeface="Calibri" pitchFamily="34" charset="-120"/>
               </a:rPr>
-              <a:t>below, beneath</a:t>
+              <a:t>not enough</a:t>
             </a:r>
             <a:endParaRPr lang="en-US" sz="850" dirty="0"/>
           </a:p>
@@ -31151,7 +31224,7 @@
         </p:nvSpPr>
         <p:spPr>
           <a:xfrm>
-            <a:off x="5803392" y="2258568"/>
+            <a:off x="4370832" y="2258568"/>
             <a:ext cx="1828800" cy="292608"/>
           </a:xfrm>
           <a:prstGeom prst="rect">
@@ -31185,7 +31258,7 @@
         </p:nvSpPr>
         <p:spPr>
           <a:xfrm>
-            <a:off x="5803392" y="2258568"/>
+            <a:off x="4370832" y="2258568"/>
             <a:ext cx="1828800" cy="292608"/>
           </a:xfrm>
           <a:prstGeom prst="rect">
@@ -31210,7 +31283,7 @@
                 <a:ea typeface="Trebuchet MS" pitchFamily="34" charset="-122"/>
                 <a:cs typeface="Trebuchet MS" pitchFamily="34" charset="-120"/>
               </a:rPr>
-              <a:t>line</a:t>
+              <a:t>cook</a:t>
             </a:r>
             <a:endParaRPr lang="en-US" sz="1300" dirty="0"/>
           </a:p>
@@ -31224,7 +31297,7 @@
         </p:nvSpPr>
         <p:spPr>
           <a:xfrm>
-            <a:off x="5803392" y="2569464"/>
+            <a:off x="4370832" y="2569464"/>
             <a:ext cx="1828800" cy="201168"/>
           </a:xfrm>
           <a:prstGeom prst="rect">
@@ -31249,7 +31322,7 @@
                 <a:ea typeface="Calibri" pitchFamily="34" charset="-122"/>
                 <a:cs typeface="Calibri" pitchFamily="34" charset="-120"/>
               </a:rPr>
-              <a:t>a long thin mark</a:t>
+              <a:t>to heat food</a:t>
             </a:r>
             <a:endParaRPr lang="en-US" sz="850" dirty="0"/>
           </a:p>
@@ -31258,6 +31331,118 @@
       <p:sp>
         <p:nvSpPr>
           <p:cNvPr id="22" name="Shape 20"/>
+          <p:cNvSpPr/>
+          <p:nvPr/>
+        </p:nvSpPr>
+        <p:spPr>
+          <a:xfrm>
+            <a:off x="6519672" y="2258568"/>
+            <a:ext cx="1828800" cy="292608"/>
+          </a:xfrm>
+          <a:prstGeom prst="rect">
+            <a:avLst>
+              <a:gd name="adj" fmla="val 25000"/>
+            </a:avLst>
+          </a:prstGeom>
+          <a:solidFill>
+            <a:srgbClr val="FCE7F3"/>
+          </a:solidFill>
+          <a:ln w="19050">
+            <a:solidFill>
+              <a:srgbClr val="DB2777"/>
+            </a:solidFill>
+            <a:prstDash val="solid"/>
+          </a:ln>
+          <a:effectLst>
+            <a:outerShdw sx="100000" sy="100000" kx="0" ky="0" algn="bl" rotWithShape="0" blurRad="101600" dist="38100" dir="8100000">
+              <a:srgbClr val="000000">
+                <a:alpha val="12000"/>
+              </a:srgbClr>
+            </a:outerShdw>
+          </a:effectLst>
+        </p:spPr>
+      </p:sp>
+      <p:sp>
+        <p:nvSpPr>
+          <p:cNvPr id="23" name="Text 21"/>
+          <p:cNvSpPr/>
+          <p:nvPr/>
+        </p:nvSpPr>
+        <p:spPr>
+          <a:xfrm>
+            <a:off x="6519672" y="2258568"/>
+            <a:ext cx="1828800" cy="292608"/>
+          </a:xfrm>
+          <a:prstGeom prst="rect">
+            <a:avLst/>
+          </a:prstGeom>
+          <a:noFill/>
+          <a:ln/>
+        </p:spPr>
+        <p:txBody>
+          <a:bodyPr wrap="square" lIns="0" tIns="0" rIns="0" bIns="0" rtlCol="0" anchor="ctr"/>
+          <a:lstStyle/>
+          <a:p>
+            <a:pPr algn="ctr" indent="0" marL="0">
+              <a:buNone/>
+            </a:pPr>
+            <a:r>
+              <a:rPr lang="en-US" sz="1300" b="1" dirty="0">
+                <a:solidFill>
+                  <a:srgbClr val="9D174D"/>
+                </a:solidFill>
+                <a:latin typeface="Trebuchet MS" pitchFamily="34" charset="0"/>
+                <a:ea typeface="Trebuchet MS" pitchFamily="34" charset="-122"/>
+                <a:cs typeface="Trebuchet MS" pitchFamily="34" charset="-120"/>
+              </a:rPr>
+              <a:t>ed</a:t>
+            </a:r>
+            <a:endParaRPr lang="en-US" sz="1300" dirty="0"/>
+          </a:p>
+        </p:txBody>
+      </p:sp>
+      <p:sp>
+        <p:nvSpPr>
+          <p:cNvPr id="24" name="Text 22"/>
+          <p:cNvSpPr/>
+          <p:nvPr/>
+        </p:nvSpPr>
+        <p:spPr>
+          <a:xfrm>
+            <a:off x="6519672" y="2569464"/>
+            <a:ext cx="1828800" cy="201168"/>
+          </a:xfrm>
+          <a:prstGeom prst="rect">
+            <a:avLst/>
+          </a:prstGeom>
+          <a:noFill/>
+          <a:ln/>
+        </p:spPr>
+        <p:txBody>
+          <a:bodyPr wrap="square" lIns="0" tIns="0" rIns="0" bIns="0" rtlCol="0" anchor="t"/>
+          <a:lstStyle/>
+          <a:p>
+            <a:pPr algn="ctr" indent="0" marL="0">
+              <a:buNone/>
+            </a:pPr>
+            <a:r>
+              <a:rPr lang="en-US" sz="850" dirty="0">
+                <a:solidFill>
+                  <a:srgbClr val="475569"/>
+                </a:solidFill>
+                <a:latin typeface="Calibri" pitchFamily="34" charset="0"/>
+                <a:ea typeface="Calibri" pitchFamily="34" charset="-122"/>
+                <a:cs typeface="Calibri" pitchFamily="34" charset="-120"/>
+              </a:rPr>
+              <a:t>past tense</a:t>
+            </a:r>
+            <a:endParaRPr lang="en-US" sz="850" dirty="0"/>
+          </a:p>
+        </p:txBody>
+      </p:sp>
+      <p:sp>
+        <p:nvSpPr>
+          <p:cNvPr id="25" name="Shape 23"/>
           <p:cNvSpPr/>
           <p:nvPr/>
         </p:nvSpPr>
@@ -31284,7 +31469,7 @@
       </p:sp>
       <p:sp>
         <p:nvSpPr>
-          <p:cNvPr id="23" name="Text 21"/>
+          <p:cNvPr id="26" name="Text 24"/>
           <p:cNvSpPr/>
           <p:nvPr/>
         </p:nvSpPr>
@@ -31323,7 +31508,7 @@
       </p:sp>
       <p:sp>
         <p:nvSpPr>
-          <p:cNvPr id="24" name="Shape 22"/>
+          <p:cNvPr id="27" name="Shape 25"/>
           <p:cNvSpPr/>
           <p:nvPr/>
         </p:nvSpPr>
@@ -31350,7 +31535,7 @@
       </p:sp>
       <p:sp>
         <p:nvSpPr>
-          <p:cNvPr id="25" name="Shape 23"/>
+          <p:cNvPr id="28" name="Shape 26"/>
           <p:cNvSpPr/>
           <p:nvPr/>
         </p:nvSpPr>
@@ -31377,7 +31562,7 @@
       </p:sp>
       <p:sp>
         <p:nvSpPr>
-          <p:cNvPr id="26" name="Text 24"/>
+          <p:cNvPr id="29" name="Text 27"/>
           <p:cNvSpPr/>
           <p:nvPr/>
         </p:nvSpPr>
@@ -31416,7 +31601,7 @@
       </p:sp>
       <p:sp>
         <p:nvSpPr>
-          <p:cNvPr id="27" name="Text 25"/>
+          <p:cNvPr id="30" name="Text 28"/>
           <p:cNvSpPr/>
           <p:nvPr/>
         </p:nvSpPr>
@@ -31455,7 +31640,7 @@
       </p:sp>
       <p:sp>
         <p:nvSpPr>
-          <p:cNvPr id="28" name="Shape 26"/>
+          <p:cNvPr id="31" name="Shape 29"/>
           <p:cNvSpPr/>
           <p:nvPr/>
         </p:nvSpPr>
@@ -31482,7 +31667,7 @@
       </p:sp>
       <p:sp>
         <p:nvSpPr>
-          <p:cNvPr id="29" name="Text 27"/>
+          <p:cNvPr id="32" name="Text 30"/>
           <p:cNvSpPr/>
           <p:nvPr/>
         </p:nvSpPr>
@@ -31521,7 +31706,7 @@
       </p:sp>
       <p:sp>
         <p:nvSpPr>
-          <p:cNvPr id="30" name="Text 28"/>
+          <p:cNvPr id="33" name="Text 31"/>
           <p:cNvSpPr/>
           <p:nvPr/>
         </p:nvSpPr>
@@ -31560,7 +31745,7 @@
       </p:sp>
       <p:sp>
         <p:nvSpPr>
-          <p:cNvPr id="31" name="Shape 29"/>
+          <p:cNvPr id="34" name="Shape 32"/>
           <p:cNvSpPr/>
           <p:nvPr/>
         </p:nvSpPr>
@@ -31587,7 +31772,7 @@
       </p:sp>
       <p:sp>
         <p:nvSpPr>
-          <p:cNvPr id="32" name="Text 30"/>
+          <p:cNvPr id="35" name="Text 33"/>
           <p:cNvSpPr/>
           <p:nvPr/>
         </p:nvSpPr>
@@ -31618,7 +31803,7 @@
                 <a:ea typeface="Trebuchet MS" pitchFamily="34" charset="-122"/>
                 <a:cs typeface="Trebuchet MS" pitchFamily="34" charset="-120"/>
               </a:rPr>
-              <a:t>line</a:t>
+              <a:t>cooked</a:t>
             </a:r>
             <a:endParaRPr lang="en-US" sz="1400" dirty="0"/>
           </a:p>
@@ -31626,7 +31811,7 @@
       </p:sp>
       <p:sp>
         <p:nvSpPr>
-          <p:cNvPr id="33" name="Shape 31"/>
+          <p:cNvPr id="36" name="Shape 34"/>
           <p:cNvSpPr/>
           <p:nvPr/>
         </p:nvSpPr>
@@ -31653,7 +31838,7 @@
       </p:sp>
       <p:sp>
         <p:nvSpPr>
-          <p:cNvPr id="34" name="Text 32"/>
+          <p:cNvPr id="37" name="Text 35"/>
           <p:cNvSpPr/>
           <p:nvPr/>
         </p:nvSpPr>
@@ -31692,7 +31877,7 @@
       </p:sp>
       <p:sp>
         <p:nvSpPr>
-          <p:cNvPr id="35" name="Shape 33"/>
+          <p:cNvPr id="38" name="Shape 36"/>
           <p:cNvSpPr/>
           <p:nvPr/>
         </p:nvSpPr>
@@ -31719,7 +31904,7 @@
       </p:sp>
       <p:sp>
         <p:nvSpPr>
-          <p:cNvPr id="36" name="Text 34"/>
+          <p:cNvPr id="39" name="Text 37"/>
           <p:cNvSpPr/>
           <p:nvPr/>
         </p:nvSpPr>
@@ -32181,7 +32366,7 @@
                 <a:ea typeface="Trebuchet MS" pitchFamily="34" charset="-122"/>
                 <a:cs typeface="Trebuchet MS" pitchFamily="34" charset="-120"/>
               </a:rPr>
-              <a:t>underline</a:t>
+              <a:t>undercooked</a:t>
             </a:r>
             <a:endParaRPr lang="en-US" sz="2800" dirty="0"/>
           </a:p>
@@ -32261,7 +32446,7 @@
         </p:nvSpPr>
         <p:spPr>
           <a:xfrm>
-            <a:off x="2938272" y="2258568"/>
+            <a:off x="2221992" y="2258568"/>
             <a:ext cx="1828800" cy="292608"/>
           </a:xfrm>
           <a:prstGeom prst="rect">
@@ -32295,7 +32480,7 @@
         </p:nvSpPr>
         <p:spPr>
           <a:xfrm>
-            <a:off x="2938272" y="2258568"/>
+            <a:off x="2221992" y="2258568"/>
             <a:ext cx="1828800" cy="292608"/>
           </a:xfrm>
           <a:prstGeom prst="rect">
@@ -32334,7 +32519,7 @@
         </p:nvSpPr>
         <p:spPr>
           <a:xfrm>
-            <a:off x="2938272" y="2569464"/>
+            <a:off x="2221992" y="2569464"/>
             <a:ext cx="1828800" cy="201168"/>
           </a:xfrm>
           <a:prstGeom prst="rect">
@@ -32359,7 +32544,7 @@
                 <a:ea typeface="Calibri" pitchFamily="34" charset="-122"/>
                 <a:cs typeface="Calibri" pitchFamily="34" charset="-120"/>
               </a:rPr>
-              <a:t>below, beneath</a:t>
+              <a:t>not enough</a:t>
             </a:r>
             <a:endParaRPr lang="en-US" sz="850" dirty="0"/>
           </a:p>
@@ -32373,7 +32558,7 @@
         </p:nvSpPr>
         <p:spPr>
           <a:xfrm>
-            <a:off x="5803392" y="2258568"/>
+            <a:off x="4370832" y="2258568"/>
             <a:ext cx="1828800" cy="292608"/>
           </a:xfrm>
           <a:prstGeom prst="rect">
@@ -32407,7 +32592,7 @@
         </p:nvSpPr>
         <p:spPr>
           <a:xfrm>
-            <a:off x="5803392" y="2258568"/>
+            <a:off x="4370832" y="2258568"/>
             <a:ext cx="1828800" cy="292608"/>
           </a:xfrm>
           <a:prstGeom prst="rect">
@@ -32432,7 +32617,7 @@
                 <a:ea typeface="Trebuchet MS" pitchFamily="34" charset="-122"/>
                 <a:cs typeface="Trebuchet MS" pitchFamily="34" charset="-120"/>
               </a:rPr>
-              <a:t>line</a:t>
+              <a:t>cook</a:t>
             </a:r>
             <a:endParaRPr lang="en-US" sz="1300" dirty="0"/>
           </a:p>
@@ -32446,7 +32631,7 @@
         </p:nvSpPr>
         <p:spPr>
           <a:xfrm>
-            <a:off x="5803392" y="2569464"/>
+            <a:off x="4370832" y="2569464"/>
             <a:ext cx="1828800" cy="201168"/>
           </a:xfrm>
           <a:prstGeom prst="rect">
@@ -32471,7 +32656,7 @@
                 <a:ea typeface="Calibri" pitchFamily="34" charset="-122"/>
                 <a:cs typeface="Calibri" pitchFamily="34" charset="-120"/>
               </a:rPr>
-              <a:t>a long thin mark</a:t>
+              <a:t>to heat food</a:t>
             </a:r>
             <a:endParaRPr lang="en-US" sz="850" dirty="0"/>
           </a:p>
@@ -32480,6 +32665,118 @@
       <p:sp>
         <p:nvSpPr>
           <p:cNvPr id="22" name="Shape 20"/>
+          <p:cNvSpPr/>
+          <p:nvPr/>
+        </p:nvSpPr>
+        <p:spPr>
+          <a:xfrm>
+            <a:off x="6519672" y="2258568"/>
+            <a:ext cx="1828800" cy="292608"/>
+          </a:xfrm>
+          <a:prstGeom prst="rect">
+            <a:avLst>
+              <a:gd name="adj" fmla="val 25000"/>
+            </a:avLst>
+          </a:prstGeom>
+          <a:solidFill>
+            <a:srgbClr val="FCE7F3"/>
+          </a:solidFill>
+          <a:ln w="19050">
+            <a:solidFill>
+              <a:srgbClr val="DB2777"/>
+            </a:solidFill>
+            <a:prstDash val="solid"/>
+          </a:ln>
+          <a:effectLst>
+            <a:outerShdw sx="100000" sy="100000" kx="0" ky="0" algn="bl" rotWithShape="0" blurRad="101600" dist="38100" dir="8100000">
+              <a:srgbClr val="000000">
+                <a:alpha val="12000"/>
+              </a:srgbClr>
+            </a:outerShdw>
+          </a:effectLst>
+        </p:spPr>
+      </p:sp>
+      <p:sp>
+        <p:nvSpPr>
+          <p:cNvPr id="23" name="Text 21"/>
+          <p:cNvSpPr/>
+          <p:nvPr/>
+        </p:nvSpPr>
+        <p:spPr>
+          <a:xfrm>
+            <a:off x="6519672" y="2258568"/>
+            <a:ext cx="1828800" cy="292608"/>
+          </a:xfrm>
+          <a:prstGeom prst="rect">
+            <a:avLst/>
+          </a:prstGeom>
+          <a:noFill/>
+          <a:ln/>
+        </p:spPr>
+        <p:txBody>
+          <a:bodyPr wrap="square" lIns="0" tIns="0" rIns="0" bIns="0" rtlCol="0" anchor="ctr"/>
+          <a:lstStyle/>
+          <a:p>
+            <a:pPr algn="ctr" indent="0" marL="0">
+              <a:buNone/>
+            </a:pPr>
+            <a:r>
+              <a:rPr lang="en-US" sz="1300" b="1" dirty="0">
+                <a:solidFill>
+                  <a:srgbClr val="9D174D"/>
+                </a:solidFill>
+                <a:latin typeface="Trebuchet MS" pitchFamily="34" charset="0"/>
+                <a:ea typeface="Trebuchet MS" pitchFamily="34" charset="-122"/>
+                <a:cs typeface="Trebuchet MS" pitchFamily="34" charset="-120"/>
+              </a:rPr>
+              <a:t>ed</a:t>
+            </a:r>
+            <a:endParaRPr lang="en-US" sz="1300" dirty="0"/>
+          </a:p>
+        </p:txBody>
+      </p:sp>
+      <p:sp>
+        <p:nvSpPr>
+          <p:cNvPr id="24" name="Text 22"/>
+          <p:cNvSpPr/>
+          <p:nvPr/>
+        </p:nvSpPr>
+        <p:spPr>
+          <a:xfrm>
+            <a:off x="6519672" y="2569464"/>
+            <a:ext cx="1828800" cy="201168"/>
+          </a:xfrm>
+          <a:prstGeom prst="rect">
+            <a:avLst/>
+          </a:prstGeom>
+          <a:noFill/>
+          <a:ln/>
+        </p:spPr>
+        <p:txBody>
+          <a:bodyPr wrap="square" lIns="0" tIns="0" rIns="0" bIns="0" rtlCol="0" anchor="t"/>
+          <a:lstStyle/>
+          <a:p>
+            <a:pPr algn="ctr" indent="0" marL="0">
+              <a:buNone/>
+            </a:pPr>
+            <a:r>
+              <a:rPr lang="en-US" sz="850" dirty="0">
+                <a:solidFill>
+                  <a:srgbClr val="475569"/>
+                </a:solidFill>
+                <a:latin typeface="Calibri" pitchFamily="34" charset="0"/>
+                <a:ea typeface="Calibri" pitchFamily="34" charset="-122"/>
+                <a:cs typeface="Calibri" pitchFamily="34" charset="-120"/>
+              </a:rPr>
+              <a:t>past tense</a:t>
+            </a:r>
+            <a:endParaRPr lang="en-US" sz="850" dirty="0"/>
+          </a:p>
+        </p:txBody>
+      </p:sp>
+      <p:sp>
+        <p:nvSpPr>
+          <p:cNvPr id="25" name="Shape 23"/>
           <p:cNvSpPr/>
           <p:nvPr/>
         </p:nvSpPr>
@@ -32506,7 +32803,7 @@
       </p:sp>
       <p:sp>
         <p:nvSpPr>
-          <p:cNvPr id="23" name="Text 21"/>
+          <p:cNvPr id="26" name="Text 24"/>
           <p:cNvSpPr/>
           <p:nvPr/>
         </p:nvSpPr>
@@ -32545,7 +32842,7 @@
       </p:sp>
       <p:sp>
         <p:nvSpPr>
-          <p:cNvPr id="24" name="Shape 22"/>
+          <p:cNvPr id="27" name="Shape 25"/>
           <p:cNvSpPr/>
           <p:nvPr/>
         </p:nvSpPr>
@@ -32572,7 +32869,7 @@
       </p:sp>
       <p:sp>
         <p:nvSpPr>
-          <p:cNvPr id="25" name="Shape 23"/>
+          <p:cNvPr id="28" name="Shape 26"/>
           <p:cNvSpPr/>
           <p:nvPr/>
         </p:nvSpPr>
@@ -32599,7 +32896,7 @@
       </p:sp>
       <p:sp>
         <p:nvSpPr>
-          <p:cNvPr id="26" name="Text 24"/>
+          <p:cNvPr id="29" name="Text 27"/>
           <p:cNvSpPr/>
           <p:nvPr/>
         </p:nvSpPr>
@@ -32638,7 +32935,7 @@
       </p:sp>
       <p:sp>
         <p:nvSpPr>
-          <p:cNvPr id="27" name="Text 25"/>
+          <p:cNvPr id="30" name="Text 28"/>
           <p:cNvSpPr/>
           <p:nvPr/>
         </p:nvSpPr>
@@ -32677,7 +32974,7 @@
       </p:sp>
       <p:sp>
         <p:nvSpPr>
-          <p:cNvPr id="28" name="Shape 26"/>
+          <p:cNvPr id="31" name="Shape 29"/>
           <p:cNvSpPr/>
           <p:nvPr/>
         </p:nvSpPr>
@@ -32704,7 +33001,7 @@
       </p:sp>
       <p:sp>
         <p:nvSpPr>
-          <p:cNvPr id="29" name="Text 27"/>
+          <p:cNvPr id="32" name="Text 30"/>
           <p:cNvSpPr/>
           <p:nvPr/>
         </p:nvSpPr>
@@ -32743,7 +33040,7 @@
       </p:sp>
       <p:sp>
         <p:nvSpPr>
-          <p:cNvPr id="30" name="Text 28"/>
+          <p:cNvPr id="33" name="Text 31"/>
           <p:cNvSpPr/>
           <p:nvPr/>
         </p:nvSpPr>
@@ -32782,7 +33079,7 @@
       </p:sp>
       <p:sp>
         <p:nvSpPr>
-          <p:cNvPr id="31" name="Shape 29"/>
+          <p:cNvPr id="34" name="Shape 32"/>
           <p:cNvSpPr/>
           <p:nvPr/>
         </p:nvSpPr>
@@ -32809,7 +33106,7 @@
       </p:sp>
       <p:sp>
         <p:nvSpPr>
-          <p:cNvPr id="32" name="Text 30"/>
+          <p:cNvPr id="35" name="Text 33"/>
           <p:cNvSpPr/>
           <p:nvPr/>
         </p:nvSpPr>
@@ -32840,7 +33137,7 @@
                 <a:ea typeface="Trebuchet MS" pitchFamily="34" charset="-122"/>
                 <a:cs typeface="Trebuchet MS" pitchFamily="34" charset="-120"/>
               </a:rPr>
-              <a:t>line</a:t>
+              <a:t>cooked</a:t>
             </a:r>
             <a:endParaRPr lang="en-US" sz="1400" dirty="0"/>
           </a:p>
@@ -32848,7 +33145,7 @@
       </p:sp>
       <p:sp>
         <p:nvSpPr>
-          <p:cNvPr id="33" name="Shape 31"/>
+          <p:cNvPr id="36" name="Shape 34"/>
           <p:cNvSpPr/>
           <p:nvPr/>
         </p:nvSpPr>
@@ -32875,7 +33172,7 @@
       </p:sp>
       <p:sp>
         <p:nvSpPr>
-          <p:cNvPr id="34" name="Text 32"/>
+          <p:cNvPr id="37" name="Text 35"/>
           <p:cNvSpPr/>
           <p:nvPr/>
         </p:nvSpPr>
@@ -32914,18 +33211,18 @@
       </p:sp>
       <p:sp>
         <p:nvSpPr>
-          <p:cNvPr id="35" name="Shape 33"/>
+          <p:cNvPr id="38" name="Shape 36"/>
           <p:cNvSpPr/>
           <p:nvPr/>
         </p:nvSpPr>
         <p:spPr>
           <a:xfrm>
             <a:off x="1874520" y="4096512"/>
-            <a:ext cx="6903720" cy="804672"/>
+            <a:ext cx="6903720" cy="658368"/>
           </a:xfrm>
           <a:prstGeom prst="rect">
             <a:avLst>
-              <a:gd name="adj" fmla="val 6818"/>
+              <a:gd name="adj" fmla="val 8333"/>
             </a:avLst>
           </a:prstGeom>
           <a:solidFill>
@@ -32941,18 +33238,18 @@
       </p:sp>
       <p:sp>
         <p:nvSpPr>
-          <p:cNvPr id="36" name="Shape 34"/>
-          <p:cNvSpPr/>
-          <p:nvPr/>
-        </p:nvSpPr>
-        <p:spPr>
-          <a:xfrm>
-            <a:off x="2124837" y="4169664"/>
-            <a:ext cx="685800" cy="384048"/>
+          <p:cNvPr id="39" name="Shape 37"/>
+          <p:cNvSpPr/>
+          <p:nvPr/>
+        </p:nvSpPr>
+        <p:spPr>
+          <a:xfrm>
+            <a:off x="2023872" y="4169664"/>
+            <a:ext cx="685800" cy="475488"/>
           </a:xfrm>
           <a:prstGeom prst="rect">
             <a:avLst>
-              <a:gd name="adj" fmla="val 9524"/>
+              <a:gd name="adj" fmla="val 7692"/>
             </a:avLst>
           </a:prstGeom>
           <a:solidFill>
@@ -32968,14 +33265,14 @@
       </p:sp>
       <p:sp>
         <p:nvSpPr>
-          <p:cNvPr id="37" name="Text 35"/>
-          <p:cNvSpPr/>
-          <p:nvPr/>
-        </p:nvSpPr>
-        <p:spPr>
-          <a:xfrm>
-            <a:off x="2124837" y="4169664"/>
-            <a:ext cx="685800" cy="384048"/>
+          <p:cNvPr id="40" name="Text 38"/>
+          <p:cNvSpPr/>
+          <p:nvPr/>
+        </p:nvSpPr>
+        <p:spPr>
+          <a:xfrm>
+            <a:off x="2023872" y="4169664"/>
+            <a:ext cx="685800" cy="475488"/>
           </a:xfrm>
           <a:prstGeom prst="rect">
             <a:avLst/>
@@ -33007,18 +33304,18 @@
       </p:sp>
       <p:sp>
         <p:nvSpPr>
-          <p:cNvPr id="38" name="Shape 36"/>
-          <p:cNvSpPr/>
-          <p:nvPr/>
-        </p:nvSpPr>
-        <p:spPr>
-          <a:xfrm>
-            <a:off x="3033522" y="4169664"/>
-            <a:ext cx="685800" cy="384048"/>
+          <p:cNvPr id="41" name="Shape 39"/>
+          <p:cNvSpPr/>
+          <p:nvPr/>
+        </p:nvSpPr>
+        <p:spPr>
+          <a:xfrm>
+            <a:off x="2831592" y="4169664"/>
+            <a:ext cx="685800" cy="475488"/>
           </a:xfrm>
           <a:prstGeom prst="rect">
             <a:avLst>
-              <a:gd name="adj" fmla="val 9524"/>
+              <a:gd name="adj" fmla="val 7692"/>
             </a:avLst>
           </a:prstGeom>
           <a:solidFill>
@@ -33034,14 +33331,14 @@
       </p:sp>
       <p:sp>
         <p:nvSpPr>
-          <p:cNvPr id="39" name="Text 37"/>
-          <p:cNvSpPr/>
-          <p:nvPr/>
-        </p:nvSpPr>
-        <p:spPr>
-          <a:xfrm>
-            <a:off x="3033522" y="4169664"/>
-            <a:ext cx="685800" cy="384048"/>
+          <p:cNvPr id="42" name="Text 40"/>
+          <p:cNvSpPr/>
+          <p:nvPr/>
+        </p:nvSpPr>
+        <p:spPr>
+          <a:xfrm>
+            <a:off x="2831592" y="4169664"/>
+            <a:ext cx="685800" cy="475488"/>
           </a:xfrm>
           <a:prstGeom prst="rect">
             <a:avLst/>
@@ -33073,18 +33370,18 @@
       </p:sp>
       <p:sp>
         <p:nvSpPr>
-          <p:cNvPr id="40" name="Shape 38"/>
-          <p:cNvSpPr/>
-          <p:nvPr/>
-        </p:nvSpPr>
-        <p:spPr>
-          <a:xfrm>
-            <a:off x="3942207" y="4169664"/>
-            <a:ext cx="685800" cy="384048"/>
+          <p:cNvPr id="43" name="Shape 41"/>
+          <p:cNvSpPr/>
+          <p:nvPr/>
+        </p:nvSpPr>
+        <p:spPr>
+          <a:xfrm>
+            <a:off x="3639312" y="4169664"/>
+            <a:ext cx="685800" cy="475488"/>
           </a:xfrm>
           <a:prstGeom prst="rect">
             <a:avLst>
-              <a:gd name="adj" fmla="val 9524"/>
+              <a:gd name="adj" fmla="val 7692"/>
             </a:avLst>
           </a:prstGeom>
           <a:solidFill>
@@ -33100,14 +33397,14 @@
       </p:sp>
       <p:sp>
         <p:nvSpPr>
-          <p:cNvPr id="41" name="Text 39"/>
-          <p:cNvSpPr/>
-          <p:nvPr/>
-        </p:nvSpPr>
-        <p:spPr>
-          <a:xfrm>
-            <a:off x="3942207" y="4169664"/>
-            <a:ext cx="685800" cy="384048"/>
+          <p:cNvPr id="44" name="Text 42"/>
+          <p:cNvSpPr/>
+          <p:nvPr/>
+        </p:nvSpPr>
+        <p:spPr>
+          <a:xfrm>
+            <a:off x="3639312" y="4169664"/>
+            <a:ext cx="685800" cy="475488"/>
           </a:xfrm>
           <a:prstGeom prst="rect">
             <a:avLst/>
@@ -33139,18 +33436,18 @@
       </p:sp>
       <p:sp>
         <p:nvSpPr>
-          <p:cNvPr id="42" name="Shape 40"/>
-          <p:cNvSpPr/>
-          <p:nvPr/>
-        </p:nvSpPr>
-        <p:spPr>
-          <a:xfrm>
-            <a:off x="4850892" y="4169664"/>
-            <a:ext cx="685800" cy="384048"/>
+          <p:cNvPr id="45" name="Shape 43"/>
+          <p:cNvSpPr/>
+          <p:nvPr/>
+        </p:nvSpPr>
+        <p:spPr>
+          <a:xfrm>
+            <a:off x="4447032" y="4169664"/>
+            <a:ext cx="685800" cy="475488"/>
           </a:xfrm>
           <a:prstGeom prst="rect">
             <a:avLst>
-              <a:gd name="adj" fmla="val 9524"/>
+              <a:gd name="adj" fmla="val 7692"/>
             </a:avLst>
           </a:prstGeom>
           <a:solidFill>
@@ -33166,14 +33463,14 @@
       </p:sp>
       <p:sp>
         <p:nvSpPr>
-          <p:cNvPr id="43" name="Text 41"/>
-          <p:cNvSpPr/>
-          <p:nvPr/>
-        </p:nvSpPr>
-        <p:spPr>
-          <a:xfrm>
-            <a:off x="4850892" y="4169664"/>
-            <a:ext cx="685800" cy="384048"/>
+          <p:cNvPr id="46" name="Text 44"/>
+          <p:cNvSpPr/>
+          <p:nvPr/>
+        </p:nvSpPr>
+        <p:spPr>
+          <a:xfrm>
+            <a:off x="4447032" y="4169664"/>
+            <a:ext cx="685800" cy="475488"/>
           </a:xfrm>
           <a:prstGeom prst="rect">
             <a:avLst/>
@@ -33205,18 +33502,18 @@
       </p:sp>
       <p:sp>
         <p:nvSpPr>
-          <p:cNvPr id="44" name="Shape 42"/>
-          <p:cNvSpPr/>
-          <p:nvPr/>
-        </p:nvSpPr>
-        <p:spPr>
-          <a:xfrm>
-            <a:off x="5759577" y="4169664"/>
-            <a:ext cx="685800" cy="384048"/>
+          <p:cNvPr id="47" name="Shape 45"/>
+          <p:cNvSpPr/>
+          <p:nvPr/>
+        </p:nvSpPr>
+        <p:spPr>
+          <a:xfrm>
+            <a:off x="5254752" y="4169664"/>
+            <a:ext cx="685800" cy="475488"/>
           </a:xfrm>
           <a:prstGeom prst="rect">
             <a:avLst>
-              <a:gd name="adj" fmla="val 9524"/>
+              <a:gd name="adj" fmla="val 7692"/>
             </a:avLst>
           </a:prstGeom>
           <a:solidFill>
@@ -33232,14 +33529,14 @@
       </p:sp>
       <p:sp>
         <p:nvSpPr>
-          <p:cNvPr id="45" name="Text 43"/>
-          <p:cNvSpPr/>
-          <p:nvPr/>
-        </p:nvSpPr>
-        <p:spPr>
-          <a:xfrm>
-            <a:off x="5759577" y="4169664"/>
-            <a:ext cx="685800" cy="384048"/>
+          <p:cNvPr id="48" name="Text 46"/>
+          <p:cNvSpPr/>
+          <p:nvPr/>
+        </p:nvSpPr>
+        <p:spPr>
+          <a:xfrm>
+            <a:off x="5254752" y="4169664"/>
+            <a:ext cx="685800" cy="475488"/>
           </a:xfrm>
           <a:prstGeom prst="rect">
             <a:avLst/>
@@ -33263,7 +33560,7 @@
                 <a:ea typeface="Trebuchet MS" pitchFamily="34" charset="-122"/>
                 <a:cs typeface="Trebuchet MS" pitchFamily="34" charset="-120"/>
               </a:rPr>
-              <a:t>l</a:t>
+              <a:t>c</a:t>
             </a:r>
             <a:endParaRPr lang="en-US" sz="900" dirty="0"/>
           </a:p>
@@ -33271,18 +33568,18 @@
       </p:sp>
       <p:sp>
         <p:nvSpPr>
-          <p:cNvPr id="46" name="Shape 44"/>
-          <p:cNvSpPr/>
-          <p:nvPr/>
-        </p:nvSpPr>
-        <p:spPr>
-          <a:xfrm>
-            <a:off x="6668262" y="4169664"/>
-            <a:ext cx="685800" cy="384048"/>
+          <p:cNvPr id="49" name="Shape 47"/>
+          <p:cNvSpPr/>
+          <p:nvPr/>
+        </p:nvSpPr>
+        <p:spPr>
+          <a:xfrm>
+            <a:off x="6062472" y="4169664"/>
+            <a:ext cx="685800" cy="475488"/>
           </a:xfrm>
           <a:prstGeom prst="rect">
             <a:avLst>
-              <a:gd name="adj" fmla="val 9524"/>
+              <a:gd name="adj" fmla="val 7692"/>
             </a:avLst>
           </a:prstGeom>
           <a:solidFill>
@@ -33298,14 +33595,14 @@
       </p:sp>
       <p:sp>
         <p:nvSpPr>
-          <p:cNvPr id="47" name="Text 45"/>
-          <p:cNvSpPr/>
-          <p:nvPr/>
-        </p:nvSpPr>
-        <p:spPr>
-          <a:xfrm>
-            <a:off x="6668262" y="4169664"/>
-            <a:ext cx="685800" cy="384048"/>
+          <p:cNvPr id="50" name="Text 48"/>
+          <p:cNvSpPr/>
+          <p:nvPr/>
+        </p:nvSpPr>
+        <p:spPr>
+          <a:xfrm>
+            <a:off x="6062472" y="4169664"/>
+            <a:ext cx="685800" cy="475488"/>
           </a:xfrm>
           <a:prstGeom prst="rect">
             <a:avLst/>
@@ -33329,7 +33626,7 @@
                 <a:ea typeface="Trebuchet MS" pitchFamily="34" charset="-122"/>
                 <a:cs typeface="Trebuchet MS" pitchFamily="34" charset="-120"/>
               </a:rPr>
-              <a:t>i</a:t>
+              <a:t>oo</a:t>
             </a:r>
             <a:endParaRPr lang="en-US" sz="900" dirty="0"/>
           </a:p>
@@ -33337,18 +33634,18 @@
       </p:sp>
       <p:sp>
         <p:nvSpPr>
-          <p:cNvPr id="48" name="Shape 46"/>
-          <p:cNvSpPr/>
-          <p:nvPr/>
-        </p:nvSpPr>
-        <p:spPr>
-          <a:xfrm>
-            <a:off x="7576947" y="4169664"/>
-            <a:ext cx="685800" cy="384048"/>
+          <p:cNvPr id="51" name="Shape 49"/>
+          <p:cNvSpPr/>
+          <p:nvPr/>
+        </p:nvSpPr>
+        <p:spPr>
+          <a:xfrm>
+            <a:off x="6870192" y="4169664"/>
+            <a:ext cx="685800" cy="475488"/>
           </a:xfrm>
           <a:prstGeom prst="rect">
             <a:avLst>
-              <a:gd name="adj" fmla="val 9524"/>
+              <a:gd name="adj" fmla="val 7692"/>
             </a:avLst>
           </a:prstGeom>
           <a:solidFill>
@@ -33364,14 +33661,14 @@
       </p:sp>
       <p:sp>
         <p:nvSpPr>
-          <p:cNvPr id="49" name="Text 47"/>
-          <p:cNvSpPr/>
-          <p:nvPr/>
-        </p:nvSpPr>
-        <p:spPr>
-          <a:xfrm>
-            <a:off x="7576947" y="4169664"/>
-            <a:ext cx="685800" cy="384048"/>
+          <p:cNvPr id="52" name="Text 50"/>
+          <p:cNvSpPr/>
+          <p:nvPr/>
+        </p:nvSpPr>
+        <p:spPr>
+          <a:xfrm>
+            <a:off x="6870192" y="4169664"/>
+            <a:ext cx="685800" cy="475488"/>
           </a:xfrm>
           <a:prstGeom prst="rect">
             <a:avLst/>
@@ -33395,7 +33692,7 @@
                 <a:ea typeface="Trebuchet MS" pitchFamily="34" charset="-122"/>
                 <a:cs typeface="Trebuchet MS" pitchFamily="34" charset="-120"/>
               </a:rPr>
-              <a:t>ne</a:t>
+              <a:t>k</a:t>
             </a:r>
             <a:endParaRPr lang="en-US" sz="900" dirty="0"/>
           </a:p>
@@ -33403,40 +33700,67 @@
       </p:sp>
       <p:sp>
         <p:nvSpPr>
-          <p:cNvPr id="50" name="Text 48"/>
-          <p:cNvSpPr/>
-          <p:nvPr/>
-        </p:nvSpPr>
-        <p:spPr>
-          <a:xfrm>
-            <a:off x="7576947" y="4572000"/>
-            <a:ext cx="685800" cy="219456"/>
-          </a:xfrm>
-          <a:prstGeom prst="rect">
-            <a:avLst/>
-          </a:prstGeom>
-          <a:noFill/>
-          <a:ln/>
-        </p:spPr>
-        <p:txBody>
-          <a:bodyPr wrap="square" lIns="0" tIns="0" rIns="0" bIns="0" rtlCol="0" anchor="t"/>
-          <a:lstStyle/>
-          <a:p>
-            <a:pPr algn="ctr" indent="0" marL="0">
-              <a:buNone/>
-            </a:pPr>
-            <a:r>
-              <a:rPr lang="en-US" sz="750" i="1" dirty="0">
-                <a:solidFill>
-                  <a:srgbClr val="94A3B8"/>
-                </a:solidFill>
-                <a:latin typeface="Calibri" pitchFamily="34" charset="0"/>
-                <a:ea typeface="Calibri" pitchFamily="34" charset="-122"/>
-                <a:cs typeface="Calibri" pitchFamily="34" charset="-120"/>
-              </a:rPr>
-              <a:t>/n/</a:t>
-            </a:r>
-            <a:endParaRPr lang="en-US" sz="750" dirty="0"/>
+          <p:cNvPr id="53" name="Shape 51"/>
+          <p:cNvSpPr/>
+          <p:nvPr/>
+        </p:nvSpPr>
+        <p:spPr>
+          <a:xfrm>
+            <a:off x="7677912" y="4169664"/>
+            <a:ext cx="685800" cy="475488"/>
+          </a:xfrm>
+          <a:prstGeom prst="rect">
+            <a:avLst>
+              <a:gd name="adj" fmla="val 7692"/>
+            </a:avLst>
+          </a:prstGeom>
+          <a:solidFill>
+            <a:srgbClr val="FFFFFF"/>
+          </a:solidFill>
+          <a:ln w="12700">
+            <a:solidFill>
+              <a:srgbClr val="DB2777"/>
+            </a:solidFill>
+            <a:prstDash val="solid"/>
+          </a:ln>
+        </p:spPr>
+      </p:sp>
+      <p:sp>
+        <p:nvSpPr>
+          <p:cNvPr id="54" name="Text 52"/>
+          <p:cNvSpPr/>
+          <p:nvPr/>
+        </p:nvSpPr>
+        <p:spPr>
+          <a:xfrm>
+            <a:off x="7677912" y="4169664"/>
+            <a:ext cx="685800" cy="475488"/>
+          </a:xfrm>
+          <a:prstGeom prst="rect">
+            <a:avLst/>
+          </a:prstGeom>
+          <a:noFill/>
+          <a:ln/>
+        </p:spPr>
+        <p:txBody>
+          <a:bodyPr wrap="square" lIns="0" tIns="0" rIns="0" bIns="0" rtlCol="0" anchor="ctr"/>
+          <a:lstStyle/>
+          <a:p>
+            <a:pPr algn="ctr" indent="0" marL="0">
+              <a:buNone/>
+            </a:pPr>
+            <a:r>
+              <a:rPr lang="en-US" sz="900" b="1" dirty="0">
+                <a:solidFill>
+                  <a:srgbClr val="9D174D"/>
+                </a:solidFill>
+                <a:latin typeface="Trebuchet MS" pitchFamily="34" charset="0"/>
+                <a:ea typeface="Trebuchet MS" pitchFamily="34" charset="-122"/>
+                <a:cs typeface="Trebuchet MS" pitchFamily="34" charset="-120"/>
+              </a:rPr>
+              <a:t>ed</a:t>
+            </a:r>
+            <a:endParaRPr lang="en-US" sz="900" dirty="0"/>
           </a:p>
         </p:txBody>
       </p:sp>
@@ -35324,7 +35648,7 @@
                 <a:ea typeface="Trebuchet MS" pitchFamily="34" charset="-122"/>
                 <a:cs typeface="Trebuchet MS" pitchFamily="34" charset="-120"/>
               </a:rPr>
-              <a:t>-ing</a:t>
+              <a:t>-ed</a:t>
             </a:r>
             <a:endParaRPr lang="en-US" sz="1300" dirty="0"/>
           </a:p>
@@ -35413,7 +35737,7 @@
                 <a:ea typeface="Trebuchet MS" pitchFamily="34" charset="-122"/>
                 <a:cs typeface="Trebuchet MS" pitchFamily="34" charset="-120"/>
               </a:rPr>
-              <a:t>stand</a:t>
+              <a:t>ground</a:t>
             </a:r>
             <a:endParaRPr lang="en-US" sz="1300" dirty="0"/>
           </a:p>
@@ -35477,7 +35801,7 @@
                 <a:ea typeface="Trebuchet MS" pitchFamily="34" charset="-122"/>
                 <a:cs typeface="Trebuchet MS" pitchFamily="34" charset="-120"/>
               </a:rPr>
-              <a:t>-ed</a:t>
+              <a:t>-ing</a:t>
             </a:r>
             <a:endParaRPr lang="en-US" sz="1300" dirty="0"/>
           </a:p>
@@ -35566,7 +35890,7 @@
                 <a:ea typeface="Trebuchet MS" pitchFamily="34" charset="-122"/>
                 <a:cs typeface="Trebuchet MS" pitchFamily="34" charset="-120"/>
               </a:rPr>
-              <a:t>ground</a:t>
+              <a:t>stand</a:t>
             </a:r>
             <a:endParaRPr lang="en-US" sz="1300" dirty="0"/>
           </a:p>
@@ -35719,7 +36043,7 @@
                 <a:ea typeface="Trebuchet MS" pitchFamily="34" charset="-122"/>
                 <a:cs typeface="Trebuchet MS" pitchFamily="34" charset="-120"/>
               </a:rPr>
-              <a:t>line</a:t>
+              <a:t>water</a:t>
             </a:r>
             <a:endParaRPr lang="en-US" sz="1300" dirty="0"/>
           </a:p>
@@ -35783,7 +36107,7 @@
                 <a:ea typeface="Trebuchet MS" pitchFamily="34" charset="-122"/>
                 <a:cs typeface="Trebuchet MS" pitchFamily="34" charset="-120"/>
               </a:rPr>
-              <a:t>-ment</a:t>
+              <a:t>-able</a:t>
             </a:r>
             <a:endParaRPr lang="en-US" sz="1300" dirty="0"/>
           </a:p>
@@ -35872,7 +36196,7 @@
                 <a:ea typeface="Trebuchet MS" pitchFamily="34" charset="-122"/>
                 <a:cs typeface="Trebuchet MS" pitchFamily="34" charset="-120"/>
               </a:rPr>
-              <a:t>water</a:t>
+              <a:t>line</a:t>
             </a:r>
             <a:endParaRPr lang="en-US" sz="1300" dirty="0"/>
           </a:p>
@@ -35936,7 +36260,7 @@
                 <a:ea typeface="Trebuchet MS" pitchFamily="34" charset="-122"/>
                 <a:cs typeface="Trebuchet MS" pitchFamily="34" charset="-120"/>
               </a:rPr>
-              <a:t>-able</a:t>
+              <a:t>-ment</a:t>
             </a:r>
             <a:endParaRPr lang="en-US" sz="1300" dirty="0"/>
           </a:p>
@@ -36107,7 +36431,7 @@
                 <a:ea typeface="Trebuchet MS" pitchFamily="34" charset="-122"/>
                 <a:cs typeface="Trebuchet MS" pitchFamily="34" charset="-120"/>
               </a:rPr>
-              <a:t>understand</a:t>
+              <a:t>underground</a:t>
             </a:r>
             <a:endParaRPr lang="en-US" sz="1200" dirty="0"/>
           </a:p>
@@ -36173,7 +36497,7 @@
                 <a:ea typeface="Trebuchet MS" pitchFamily="34" charset="-122"/>
                 <a:cs typeface="Trebuchet MS" pitchFamily="34" charset="-120"/>
               </a:rPr>
-              <a:t>underground</a:t>
+              <a:t>understand</a:t>
             </a:r>
             <a:endParaRPr lang="en-US" sz="1200" dirty="0"/>
           </a:p>
@@ -36239,7 +36563,7 @@
                 <a:ea typeface="Trebuchet MS" pitchFamily="34" charset="-122"/>
                 <a:cs typeface="Trebuchet MS" pitchFamily="34" charset="-120"/>
               </a:rPr>
-              <a:t>underline</a:t>
+              <a:t>underwater</a:t>
             </a:r>
             <a:endParaRPr lang="en-US" sz="1200" dirty="0"/>
           </a:p>
@@ -36305,7 +36629,7 @@
                 <a:ea typeface="Trebuchet MS" pitchFamily="34" charset="-122"/>
                 <a:cs typeface="Trebuchet MS" pitchFamily="34" charset="-120"/>
               </a:rPr>
-              <a:t>underwater</a:t>
+              <a:t>underline</a:t>
             </a:r>
             <a:endParaRPr lang="en-US" sz="1200" dirty="0"/>
           </a:p>
@@ -36371,7 +36695,7 @@
                 <a:ea typeface="Trebuchet MS" pitchFamily="34" charset="-122"/>
                 <a:cs typeface="Trebuchet MS" pitchFamily="34" charset="-120"/>
               </a:rPr>
-              <a:t>underfed</a:t>
+              <a:t>undercooked</a:t>
             </a:r>
             <a:endParaRPr lang="en-US" sz="1200" dirty="0"/>
           </a:p>
@@ -36503,7 +36827,7 @@
                 <a:ea typeface="Trebuchet MS" pitchFamily="34" charset="-122"/>
                 <a:cs typeface="Trebuchet MS" pitchFamily="34" charset="-120"/>
               </a:rPr>
-              <a:t>underway</a:t>
+              <a:t>undernourished</a:t>
             </a:r>
             <a:endParaRPr lang="en-US" sz="1200" dirty="0"/>
           </a:p>
@@ -37691,7 +38015,7 @@
                 <a:ea typeface="Calibri" pitchFamily="34" charset="-122"/>
                 <a:cs typeface="Calibri" pitchFamily="34" charset="-120"/>
               </a:rPr>
-              <a:t>1.  The prefix 'under-' can mean 'below' or 'beneath' something.</a:t>
+              <a:t>1.  'Underground' means below the surface of the ground.</a:t>
             </a:r>
             <a:endParaRPr lang="en-US" sz="1300" dirty="0"/>
           </a:p>
@@ -37830,7 +38154,7 @@
                 <a:ea typeface="Calibri" pitchFamily="34" charset="-122"/>
                 <a:cs typeface="Calibri" pitchFamily="34" charset="-120"/>
               </a:rPr>
-              <a:t>2.  The prefix 'under-' means the same thing as the prefix 'over-'.</a:t>
+              <a:t>2.  The prefix 'under-' can mean 'not enough', as in undercooked.</a:t>
             </a:r>
             <a:endParaRPr lang="en-US" sz="1300" dirty="0"/>
           </a:p>
@@ -37853,11 +38177,11 @@
             </a:avLst>
           </a:prstGeom>
           <a:solidFill>
-            <a:srgbClr val="FEE2E2"/>
-          </a:solidFill>
-          <a:ln w="12700">
-            <a:solidFill>
-              <a:srgbClr val="DC2626"/>
+            <a:srgbClr val="DCFCE7"/>
+          </a:solidFill>
+          <a:ln w="12700">
+            <a:solidFill>
+              <a:srgbClr val="16A34A"/>
             </a:solidFill>
             <a:prstDash val="solid"/>
           </a:ln>
@@ -37890,13 +38214,13 @@
             <a:r>
               <a:rPr lang="en-US" sz="1100" b="1" dirty="0">
                 <a:solidFill>
-                  <a:srgbClr val="DC2626"/>
+                  <a:srgbClr val="16A34A"/>
                 </a:solidFill>
                 <a:latin typeface="Trebuchet MS" pitchFamily="34" charset="0"/>
                 <a:ea typeface="Trebuchet MS" pitchFamily="34" charset="-122"/>
                 <a:cs typeface="Trebuchet MS" pitchFamily="34" charset="-120"/>
               </a:rPr>
-              <a:t>FALSE</a:t>
+              <a:t>TRUE</a:t>
             </a:r>
             <a:endParaRPr lang="en-US" sz="1100" dirty="0"/>
           </a:p>
@@ -37969,7 +38293,7 @@
                 <a:ea typeface="Calibri" pitchFamily="34" charset="-122"/>
                 <a:cs typeface="Calibri" pitchFamily="34" charset="-120"/>
               </a:rPr>
-              <a:t>3.  The word 'underwater' contains the prefix 'under-' meaning below.</a:t>
+              <a:t>3.  The prefix 'under-' always means the same thing as the prefix 'over-'.</a:t>
             </a:r>
             <a:endParaRPr lang="en-US" sz="1300" dirty="0"/>
           </a:p>
@@ -37992,11 +38316,11 @@
             </a:avLst>
           </a:prstGeom>
           <a:solidFill>
-            <a:srgbClr val="DCFCE7"/>
-          </a:solidFill>
-          <a:ln w="12700">
-            <a:solidFill>
-              <a:srgbClr val="16A34A"/>
+            <a:srgbClr val="FEE2E2"/>
+          </a:solidFill>
+          <a:ln w="12700">
+            <a:solidFill>
+              <a:srgbClr val="DC2626"/>
             </a:solidFill>
             <a:prstDash val="solid"/>
           </a:ln>
@@ -38029,13 +38353,13 @@
             <a:r>
               <a:rPr lang="en-US" sz="1100" b="1" dirty="0">
                 <a:solidFill>
-                  <a:srgbClr val="16A34A"/>
+                  <a:srgbClr val="DC2626"/>
                 </a:solidFill>
                 <a:latin typeface="Trebuchet MS" pitchFamily="34" charset="0"/>
                 <a:ea typeface="Trebuchet MS" pitchFamily="34" charset="-122"/>
                 <a:cs typeface="Trebuchet MS" pitchFamily="34" charset="-120"/>
               </a:rPr>
-              <a:t>TRUE</a:t>
+              <a:t>FALSE</a:t>
             </a:r>
             <a:endParaRPr lang="en-US" sz="1100" dirty="0"/>
           </a:p>
@@ -38108,7 +38432,7 @@
                 <a:ea typeface="Calibri" pitchFamily="34" charset="-122"/>
                 <a:cs typeface="Calibri" pitchFamily="34" charset="-120"/>
               </a:rPr>
-              <a:t>4.  The prefix 'under-' can also mean not enough, like in 'underfed'.</a:t>
+              <a:t>4.  The prefix 'under-' comes from Old English.</a:t>
             </a:r>
             <a:endParaRPr lang="en-US" sz="1300" dirty="0"/>
           </a:p>
@@ -38247,7 +38571,7 @@
                 <a:ea typeface="Calibri" pitchFamily="34" charset="-122"/>
                 <a:cs typeface="Calibri" pitchFamily="34" charset="-120"/>
               </a:rPr>
-              <a:t>5.  The prefix 'under-' comes from a French word.</a:t>
+              <a:t>5.  The word 'understand' has nothing to do with the prefix 'under-'.</a:t>
             </a:r>
             <a:endParaRPr lang="en-US" sz="1300" dirty="0"/>
           </a:p>
@@ -38952,7 +39276,7 @@
                 <a:ea typeface="Trebuchet MS" pitchFamily="34" charset="-122"/>
                 <a:cs typeface="Trebuchet MS" pitchFamily="34" charset="-120"/>
               </a:rPr>
-              <a:t>understand</a:t>
+              <a:t>underground</a:t>
             </a:r>
             <a:endParaRPr lang="en-US" sz="1300" dirty="0"/>
           </a:p>
@@ -39018,7 +39342,7 @@
                 <a:ea typeface="Trebuchet MS" pitchFamily="34" charset="-122"/>
                 <a:cs typeface="Trebuchet MS" pitchFamily="34" charset="-120"/>
               </a:rPr>
-              <a:t>underground</a:t>
+              <a:t>understand</a:t>
             </a:r>
             <a:endParaRPr lang="en-US" sz="1300" dirty="0"/>
           </a:p>
@@ -39084,7 +39408,7 @@
                 <a:ea typeface="Trebuchet MS" pitchFamily="34" charset="-122"/>
                 <a:cs typeface="Trebuchet MS" pitchFamily="34" charset="-120"/>
               </a:rPr>
-              <a:t>underline</a:t>
+              <a:t>underwater</a:t>
             </a:r>
             <a:endParaRPr lang="en-US" sz="1300" dirty="0"/>
           </a:p>
@@ -39150,7 +39474,7 @@
                 <a:ea typeface="Trebuchet MS" pitchFamily="34" charset="-122"/>
                 <a:cs typeface="Trebuchet MS" pitchFamily="34" charset="-120"/>
               </a:rPr>
-              <a:t>underwater</a:t>
+              <a:t>underline</a:t>
             </a:r>
             <a:endParaRPr lang="en-US" sz="1300" dirty="0"/>
           </a:p>
@@ -39216,7 +39540,7 @@
                 <a:ea typeface="Trebuchet MS" pitchFamily="34" charset="-122"/>
                 <a:cs typeface="Trebuchet MS" pitchFamily="34" charset="-120"/>
               </a:rPr>
-              <a:t>underfed</a:t>
+              <a:t>undercooked</a:t>
             </a:r>
             <a:endParaRPr lang="en-US" sz="1300" dirty="0"/>
           </a:p>
@@ -40003,7 +40327,7 @@
                 <a:ea typeface="Trebuchet MS" pitchFamily="34" charset="-122"/>
                 <a:cs typeface="Trebuchet MS" pitchFamily="34" charset="-120"/>
               </a:rPr>
-              <a:t>-ing</a:t>
+              <a:t>-ed</a:t>
             </a:r>
             <a:endParaRPr lang="en-US" sz="1300" dirty="0"/>
           </a:p>
@@ -40092,7 +40416,7 @@
                 <a:ea typeface="Trebuchet MS" pitchFamily="34" charset="-122"/>
                 <a:cs typeface="Trebuchet MS" pitchFamily="34" charset="-120"/>
               </a:rPr>
-              <a:t>stand</a:t>
+              <a:t>ground</a:t>
             </a:r>
             <a:endParaRPr lang="en-US" sz="1300" dirty="0"/>
           </a:p>
@@ -40156,7 +40480,7 @@
                 <a:ea typeface="Trebuchet MS" pitchFamily="34" charset="-122"/>
                 <a:cs typeface="Trebuchet MS" pitchFamily="34" charset="-120"/>
               </a:rPr>
-              <a:t>-ed</a:t>
+              <a:t>-ing</a:t>
             </a:r>
             <a:endParaRPr lang="en-US" sz="1300" dirty="0"/>
           </a:p>
@@ -40245,7 +40569,7 @@
                 <a:ea typeface="Trebuchet MS" pitchFamily="34" charset="-122"/>
                 <a:cs typeface="Trebuchet MS" pitchFamily="34" charset="-120"/>
               </a:rPr>
-              <a:t>ground</a:t>
+              <a:t>stand</a:t>
             </a:r>
             <a:endParaRPr lang="en-US" sz="1300" dirty="0"/>
           </a:p>
@@ -40398,7 +40722,7 @@
                 <a:ea typeface="Trebuchet MS" pitchFamily="34" charset="-122"/>
                 <a:cs typeface="Trebuchet MS" pitchFamily="34" charset="-120"/>
               </a:rPr>
-              <a:t>line</a:t>
+              <a:t>water</a:t>
             </a:r>
             <a:endParaRPr lang="en-US" sz="1300" dirty="0"/>
           </a:p>
@@ -40462,7 +40786,7 @@
                 <a:ea typeface="Trebuchet MS" pitchFamily="34" charset="-122"/>
                 <a:cs typeface="Trebuchet MS" pitchFamily="34" charset="-120"/>
               </a:rPr>
-              <a:t>-ment</a:t>
+              <a:t>-able</a:t>
             </a:r>
             <a:endParaRPr lang="en-US" sz="1300" dirty="0"/>
           </a:p>
@@ -40551,7 +40875,7 @@
                 <a:ea typeface="Trebuchet MS" pitchFamily="34" charset="-122"/>
                 <a:cs typeface="Trebuchet MS" pitchFamily="34" charset="-120"/>
               </a:rPr>
-              <a:t>water</a:t>
+              <a:t>line</a:t>
             </a:r>
             <a:endParaRPr lang="en-US" sz="1300" dirty="0"/>
           </a:p>
@@ -40615,7 +40939,7 @@
                 <a:ea typeface="Trebuchet MS" pitchFamily="34" charset="-122"/>
                 <a:cs typeface="Trebuchet MS" pitchFamily="34" charset="-120"/>
               </a:rPr>
-              <a:t>-able</a:t>
+              <a:t>-ment</a:t>
             </a:r>
             <a:endParaRPr lang="en-US" sz="1300" dirty="0"/>
           </a:p>
@@ -40893,7 +41217,7 @@
         <p:spPr>
           <a:xfrm>
             <a:off x="4599432" y="4178808"/>
-            <a:ext cx="950976" cy="420624"/>
+            <a:ext cx="822960" cy="420624"/>
           </a:xfrm>
           <a:prstGeom prst="rect">
             <a:avLst>
@@ -40927,7 +41251,7 @@
         <p:spPr>
           <a:xfrm>
             <a:off x="4599432" y="4178808"/>
-            <a:ext cx="950976" cy="420624"/>
+            <a:ext cx="822960" cy="420624"/>
           </a:xfrm>
           <a:prstGeom prst="rect">
             <a:avLst/>
@@ -40951,7 +41275,7 @@
                 <a:ea typeface="Trebuchet MS" pitchFamily="34" charset="-122"/>
                 <a:cs typeface="Trebuchet MS" pitchFamily="34" charset="-120"/>
               </a:rPr>
-              <a:t>-ing</a:t>
+              <a:t>-ed</a:t>
             </a:r>
             <a:endParaRPr lang="en-US" sz="1300" dirty="0"/>
           </a:p>
@@ -40965,7 +41289,7 @@
         </p:nvSpPr>
         <p:spPr>
           <a:xfrm>
-            <a:off x="5623560" y="4178808"/>
+            <a:off x="5495544" y="4178808"/>
             <a:ext cx="365760" cy="420624"/>
           </a:xfrm>
           <a:prstGeom prst="rect">
@@ -41004,7 +41328,7 @@
         </p:nvSpPr>
         <p:spPr>
           <a:xfrm>
-            <a:off x="6035040" y="4178808"/>
+            <a:off x="5907024" y="4178808"/>
             <a:ext cx="2194560" cy="420624"/>
           </a:xfrm>
           <a:prstGeom prst="rect">
@@ -41031,7 +41355,7 @@
         </p:nvSpPr>
         <p:spPr>
           <a:xfrm>
-            <a:off x="6035040" y="4178808"/>
+            <a:off x="5907024" y="4178808"/>
             <a:ext cx="2194560" cy="420624"/>
           </a:xfrm>
           <a:prstGeom prst="rect">
@@ -41526,7 +41850,7 @@
                 <a:ea typeface="Calibri" pitchFamily="34" charset="-122"/>
                 <a:cs typeface="Calibri" pitchFamily="34" charset="-120"/>
               </a:rPr>
-              <a:t>Below the surface of the water.</a:t>
+              <a:t>To draw a line underneath a word or piece of text.</a:t>
             </a:r>
             <a:endParaRPr lang="en-US" sz="1200" dirty="0"/>
           </a:p>
@@ -41599,7 +41923,7 @@
                 <a:ea typeface="Trebuchet MS" pitchFamily="34" charset="-122"/>
                 <a:cs typeface="Trebuchet MS" pitchFamily="34" charset="-120"/>
               </a:rPr>
-              <a:t>understand</a:t>
+              <a:t>underground</a:t>
             </a:r>
             <a:endParaRPr lang="en-US" sz="1200" dirty="0"/>
           </a:p>
@@ -41665,7 +41989,7 @@
                 <a:ea typeface="Calibri" pitchFamily="34" charset="-122"/>
                 <a:cs typeface="Calibri" pitchFamily="34" charset="-120"/>
               </a:rPr>
-              <a:t>Working in secret, often to catch criminals without being noticed.</a:t>
+              <a:t>Working in secret, often as a disguise to find out information.</a:t>
             </a:r>
             <a:endParaRPr lang="en-US" sz="1200" dirty="0"/>
           </a:p>
@@ -41738,7 +42062,7 @@
                 <a:ea typeface="Trebuchet MS" pitchFamily="34" charset="-122"/>
                 <a:cs typeface="Trebuchet MS" pitchFamily="34" charset="-120"/>
               </a:rPr>
-              <a:t>underground</a:t>
+              <a:t>understand</a:t>
             </a:r>
             <a:endParaRPr lang="en-US" sz="1200" dirty="0"/>
           </a:p>
@@ -41804,7 +42128,7 @@
                 <a:ea typeface="Calibri" pitchFamily="34" charset="-122"/>
                 <a:cs typeface="Calibri" pitchFamily="34" charset="-120"/>
               </a:rPr>
-              <a:t>To draw a line underneath a word or sentence to show it is important.</a:t>
+              <a:t>Below the surface of the water.</a:t>
             </a:r>
             <a:endParaRPr lang="en-US" sz="1200" dirty="0"/>
           </a:p>
@@ -41877,7 +42201,7 @@
                 <a:ea typeface="Trebuchet MS" pitchFamily="34" charset="-122"/>
                 <a:cs typeface="Trebuchet MS" pitchFamily="34" charset="-120"/>
               </a:rPr>
-              <a:t>underline</a:t>
+              <a:t>underwater</a:t>
             </a:r>
             <a:endParaRPr lang="en-US" sz="1200" dirty="0"/>
           </a:p>
@@ -41943,7 +42267,7 @@
                 <a:ea typeface="Calibri" pitchFamily="34" charset="-122"/>
                 <a:cs typeface="Calibri" pitchFamily="34" charset="-120"/>
               </a:rPr>
-              <a:t>Not given enough food to be healthy.</a:t>
+              <a:t>Food that has not been cooked enough and may still be raw in the middle.</a:t>
             </a:r>
             <a:endParaRPr lang="en-US" sz="1200" dirty="0"/>
           </a:p>
@@ -42016,7 +42340,7 @@
                 <a:ea typeface="Trebuchet MS" pitchFamily="34" charset="-122"/>
                 <a:cs typeface="Trebuchet MS" pitchFamily="34" charset="-120"/>
               </a:rPr>
-              <a:t>underwater</a:t>
+              <a:t>underline</a:t>
             </a:r>
             <a:endParaRPr lang="en-US" sz="1200" dirty="0"/>
           </a:p>
@@ -42155,7 +42479,7 @@
                 <a:ea typeface="Trebuchet MS" pitchFamily="34" charset="-122"/>
                 <a:cs typeface="Trebuchet MS" pitchFamily="34" charset="-120"/>
               </a:rPr>
-              <a:t>underfed</a:t>
+              <a:t>undercooked</a:t>
             </a:r>
             <a:endParaRPr lang="en-US" sz="1200" dirty="0"/>
           </a:p>
@@ -42221,7 +42545,7 @@
                 <a:ea typeface="Calibri" pitchFamily="34" charset="-122"/>
                 <a:cs typeface="Calibri" pitchFamily="34" charset="-120"/>
               </a:rPr>
-              <a:t>Below the surface of the ground, like tunnels or roots.</a:t>
+              <a:t>To know what something means or how something works.</a:t>
             </a:r>
             <a:endParaRPr lang="en-US" sz="1200" dirty="0"/>
           </a:p>
@@ -42360,7 +42684,7 @@
                 <a:ea typeface="Calibri" pitchFamily="34" charset="-122"/>
                 <a:cs typeface="Calibri" pitchFamily="34" charset="-120"/>
               </a:rPr>
-              <a:t>To know what something means or how something works.</a:t>
+              <a:t>Below the surface of the ground.</a:t>
             </a:r>
             <a:endParaRPr lang="en-US" sz="1200" dirty="0"/>
           </a:p>
@@ -42855,7 +43179,7 @@
                 <a:ea typeface="Calibri" pitchFamily="34" charset="-122"/>
                 <a:cs typeface="Calibri" pitchFamily="34" charset="-120"/>
               </a:rPr>
-              <a:t>The undercover police officer followed the suspect through the busy market.</a:t>
+              <a:t>The spy worked undercover to find out what the thieves were planning.</a:t>
             </a:r>
             <a:endParaRPr lang="en-US" sz="1500" dirty="0"/>
           </a:p>
@@ -43019,7 +43343,7 @@
                 <a:ea typeface="Calibri" pitchFamily="34" charset="-122"/>
                 <a:cs typeface="Calibri" pitchFamily="34" charset="-120"/>
               </a:rPr>
-              <a:t>We watched the divers explore the underwater cave on a nature documentary.</a:t>
+              <a:t>We learned that many animals live underground during the cold winter months.</a:t>
             </a:r>
             <a:endParaRPr lang="en-US" sz="1500" dirty="0"/>
           </a:p>
@@ -43183,7 +43507,7 @@
                 <a:ea typeface="Calibri" pitchFamily="34" charset="-122"/>
                 <a:cs typeface="Calibri" pitchFamily="34" charset="-120"/>
               </a:rPr>
-              <a:t>Do you understand the instructions for the maths activity?</a:t>
+              <a:t>Mrs Chen told us to underline the most important words in the paragraph.</a:t>
             </a:r>
             <a:endParaRPr lang="en-US" sz="1500" dirty="0"/>
           </a:p>
